--- a/slides/antigravity_telecom_workshop_es.pptx
+++ b/slides/antigravity_telecom_workshop_es.pptx
@@ -16,6 +16,10 @@
     <p:sldId id="264" r:id="rId16"/>
     <p:sldId id="265" r:id="rId17"/>
     <p:sldId id="266" r:id="rId18"/>
+    <p:sldId id="267" r:id="rId19"/>
+    <p:sldId id="268" r:id="rId20"/>
+    <p:sldId id="269" r:id="rId21"/>
+    <p:sldId id="270" r:id="rId22"/>
   </p:sldIdLst>
   <p:sldSz cx="12191695" cy="6858000" type="screen4x3"/>
   <p:notesSz cx="6858000" cy="9144000"/>
@@ -582,7 +586,7 @@
           <a:lstStyle/>
           <a:p>
             <a:r>
-              <a:t>Explica cómo Antigravity ayuda a diseñar y programar el sistema multi-agente basado en Google ADK + protocolo A2A, cómo probarlo localmente con `adk web` y cómo desplegarlo con Terraform a Google Cloud y Gemini Enterprise.</a:t>
+              <a:t>Módulo clave de seguridad y gobernanza: muestra en la consola de Google Cloud cómo se auditan las licencias Gemini Enterprise y cómo los Hooks locales bloquean acciones riesgosas.</a:t>
             </a:r>
           </a:p>
         </p:txBody>
@@ -652,7 +656,287 @@
           <a:lstStyle/>
           <a:p>
             <a:r>
-              <a:t>Guía a los participantes en el Capstone final: pruebas en el dashboard web, en la interfaz interactiva ADK Dev UI (`./scripts/run_adk_web.sh`) y validación de despliegue Terraform (`./deploy/deploy_gcp.sh --dry-run`).</a:t>
+              <a:t>Revisa los Objetivos del Lab 3 y los componentes FastMCP + Hooks que construirán.</a:t>
+            </a:r>
+          </a:p>
+        </p:txBody>
+      </p:sp>
+      <p:sp>
+        <p:nvSpPr>
+          <p:cNvPr id="4" name="Slide Number Placeholder 3"/>
+          <p:cNvSpPr>
+            <a:spLocks noGrp="1"/>
+          </p:cNvSpPr>
+          <p:nvPr>
+            <p:ph type="sldNum" idx="5" sz="quarter"/>
+          </p:nvPr>
+        </p:nvSpPr>
+        <p:spPr/>
+      </p:sp>
+    </p:spTree>
+  </p:cSld>
+  <p:clrMapOvr>
+    <a:masterClrMapping/>
+  </p:clrMapOvr>
+</p:notes>
+</file>
+
+<file path=ppt/notesSlides/notesSlide12.xml><?xml version="1.0" encoding="utf-8"?>
+<p:notes xmlns:a="http://schemas.openxmlformats.org/drawingml/2006/main" xmlns:p="http://schemas.openxmlformats.org/presentationml/2006/main" xmlns:r="http://schemas.openxmlformats.org/officeDocument/2006/relationships">
+  <p:cSld>
+    <p:spTree>
+      <p:nvGrpSpPr>
+        <p:cNvPr id="1" name=""/>
+        <p:cNvGrpSpPr/>
+        <p:nvPr/>
+      </p:nvGrpSpPr>
+      <p:grpSpPr>
+        <a:xfrm>
+          <a:off x="0" y="0"/>
+          <a:ext cx="0" cy="0"/>
+          <a:chOff x="0" y="0"/>
+          <a:chExt cx="0" cy="0"/>
+        </a:xfrm>
+      </p:grpSpPr>
+      <p:sp>
+        <p:nvSpPr>
+          <p:cNvPr id="2" name="Slide Image Placeholder 1"/>
+          <p:cNvSpPr>
+            <a:spLocks noGrp="1"/>
+          </p:cNvSpPr>
+          <p:nvPr>
+            <p:ph type="sldImg" idx="2"/>
+          </p:nvPr>
+        </p:nvSpPr>
+        <p:spPr/>
+      </p:sp>
+      <p:sp>
+        <p:nvSpPr>
+          <p:cNvPr id="3" name="Notes Placeholder 2"/>
+          <p:cNvSpPr>
+            <a:spLocks noGrp="1"/>
+          </p:cNvSpPr>
+          <p:nvPr>
+            <p:ph type="body" idx="3" sz="quarter"/>
+          </p:nvPr>
+        </p:nvSpPr>
+        <p:spPr/>
+        <p:txBody>
+          <a:bodyPr/>
+          <a:lstStyle/>
+          <a:p>
+            <a:r>
+              <a:t>Mantén esta diapositiva proyectada durante el Lab 3.</a:t>
+            </a:r>
+          </a:p>
+        </p:txBody>
+      </p:sp>
+      <p:sp>
+        <p:nvSpPr>
+          <p:cNvPr id="4" name="Slide Number Placeholder 3"/>
+          <p:cNvSpPr>
+            <a:spLocks noGrp="1"/>
+          </p:cNvSpPr>
+          <p:nvPr>
+            <p:ph type="sldNum" idx="5" sz="quarter"/>
+          </p:nvPr>
+        </p:nvSpPr>
+        <p:spPr/>
+      </p:sp>
+    </p:spTree>
+  </p:cSld>
+  <p:clrMapOvr>
+    <a:masterClrMapping/>
+  </p:clrMapOvr>
+</p:notes>
+</file>
+
+<file path=ppt/notesSlides/notesSlide13.xml><?xml version="1.0" encoding="utf-8"?>
+<p:notes xmlns:a="http://schemas.openxmlformats.org/drawingml/2006/main" xmlns:p="http://schemas.openxmlformats.org/presentationml/2006/main" xmlns:r="http://schemas.openxmlformats.org/officeDocument/2006/relationships">
+  <p:cSld>
+    <p:spTree>
+      <p:nvGrpSpPr>
+        <p:cNvPr id="1" name=""/>
+        <p:cNvGrpSpPr/>
+        <p:nvPr/>
+      </p:nvGrpSpPr>
+      <p:grpSpPr>
+        <a:xfrm>
+          <a:off x="0" y="0"/>
+          <a:ext cx="0" cy="0"/>
+          <a:chOff x="0" y="0"/>
+          <a:chExt cx="0" cy="0"/>
+        </a:xfrm>
+      </p:grpSpPr>
+      <p:sp>
+        <p:nvSpPr>
+          <p:cNvPr id="2" name="Slide Image Placeholder 1"/>
+          <p:cNvSpPr>
+            <a:spLocks noGrp="1"/>
+          </p:cNvSpPr>
+          <p:nvPr>
+            <p:ph type="sldImg" idx="2"/>
+          </p:nvPr>
+        </p:nvSpPr>
+        <p:spPr/>
+      </p:sp>
+      <p:sp>
+        <p:nvSpPr>
+          <p:cNvPr id="3" name="Notes Placeholder 2"/>
+          <p:cNvSpPr>
+            <a:spLocks noGrp="1"/>
+          </p:cNvSpPr>
+          <p:nvPr>
+            <p:ph type="body" idx="3" sz="quarter"/>
+          </p:nvPr>
+        </p:nvSpPr>
+        <p:spPr/>
+        <p:txBody>
+          <a:bodyPr/>
+          <a:lstStyle/>
+          <a:p>
+            <a:r>
+              <a:t>Explica cómo Antigravity ayuda a diseñar y programar el sistema multi-agente basado en Google ADK + protocolo A2A, cómo probarlo localmente con `adk web` y cómo desplegarlo con Terraform a Google Cloud y Gemini Enterprise.</a:t>
+            </a:r>
+          </a:p>
+        </p:txBody>
+      </p:sp>
+      <p:sp>
+        <p:nvSpPr>
+          <p:cNvPr id="4" name="Slide Number Placeholder 3"/>
+          <p:cNvSpPr>
+            <a:spLocks noGrp="1"/>
+          </p:cNvSpPr>
+          <p:nvPr>
+            <p:ph type="sldNum" idx="5" sz="quarter"/>
+          </p:nvPr>
+        </p:nvSpPr>
+        <p:spPr/>
+      </p:sp>
+    </p:spTree>
+  </p:cSld>
+  <p:clrMapOvr>
+    <a:masterClrMapping/>
+  </p:clrMapOvr>
+</p:notes>
+</file>
+
+<file path=ppt/notesSlides/notesSlide14.xml><?xml version="1.0" encoding="utf-8"?>
+<p:notes xmlns:a="http://schemas.openxmlformats.org/drawingml/2006/main" xmlns:p="http://schemas.openxmlformats.org/presentationml/2006/main" xmlns:r="http://schemas.openxmlformats.org/officeDocument/2006/relationships">
+  <p:cSld>
+    <p:spTree>
+      <p:nvGrpSpPr>
+        <p:cNvPr id="1" name=""/>
+        <p:cNvGrpSpPr/>
+        <p:nvPr/>
+      </p:nvGrpSpPr>
+      <p:grpSpPr>
+        <a:xfrm>
+          <a:off x="0" y="0"/>
+          <a:ext cx="0" cy="0"/>
+          <a:chOff x="0" y="0"/>
+          <a:chExt cx="0" cy="0"/>
+        </a:xfrm>
+      </p:grpSpPr>
+      <p:sp>
+        <p:nvSpPr>
+          <p:cNvPr id="2" name="Slide Image Placeholder 1"/>
+          <p:cNvSpPr>
+            <a:spLocks noGrp="1"/>
+          </p:cNvSpPr>
+          <p:nvPr>
+            <p:ph type="sldImg" idx="2"/>
+          </p:nvPr>
+        </p:nvSpPr>
+        <p:spPr/>
+      </p:sp>
+      <p:sp>
+        <p:nvSpPr>
+          <p:cNvPr id="3" name="Notes Placeholder 2"/>
+          <p:cNvSpPr>
+            <a:spLocks noGrp="1"/>
+          </p:cNvSpPr>
+          <p:nvPr>
+            <p:ph type="body" idx="3" sz="quarter"/>
+          </p:nvPr>
+        </p:nvSpPr>
+        <p:spPr/>
+        <p:txBody>
+          <a:bodyPr/>
+          <a:lstStyle/>
+          <a:p>
+            <a:r>
+              <a:t>Presenta los Objetivos del Lab 4 Capstone y los 3 componentes que construirán.</a:t>
+            </a:r>
+          </a:p>
+        </p:txBody>
+      </p:sp>
+      <p:sp>
+        <p:nvSpPr>
+          <p:cNvPr id="4" name="Slide Number Placeholder 3"/>
+          <p:cNvSpPr>
+            <a:spLocks noGrp="1"/>
+          </p:cNvSpPr>
+          <p:nvPr>
+            <p:ph type="sldNum" idx="5" sz="quarter"/>
+          </p:nvPr>
+        </p:nvSpPr>
+        <p:spPr/>
+      </p:sp>
+    </p:spTree>
+  </p:cSld>
+  <p:clrMapOvr>
+    <a:masterClrMapping/>
+  </p:clrMapOvr>
+</p:notes>
+</file>
+
+<file path=ppt/notesSlides/notesSlide15.xml><?xml version="1.0" encoding="utf-8"?>
+<p:notes xmlns:a="http://schemas.openxmlformats.org/drawingml/2006/main" xmlns:p="http://schemas.openxmlformats.org/presentationml/2006/main" xmlns:r="http://schemas.openxmlformats.org/officeDocument/2006/relationships">
+  <p:cSld>
+    <p:spTree>
+      <p:nvGrpSpPr>
+        <p:cNvPr id="1" name=""/>
+        <p:cNvGrpSpPr/>
+        <p:nvPr/>
+      </p:nvGrpSpPr>
+      <p:grpSpPr>
+        <a:xfrm>
+          <a:off x="0" y="0"/>
+          <a:ext cx="0" cy="0"/>
+          <a:chOff x="0" y="0"/>
+          <a:chExt cx="0" cy="0"/>
+        </a:xfrm>
+      </p:grpSpPr>
+      <p:sp>
+        <p:nvSpPr>
+          <p:cNvPr id="2" name="Slide Image Placeholder 1"/>
+          <p:cNvSpPr>
+            <a:spLocks noGrp="1"/>
+          </p:cNvSpPr>
+          <p:nvPr>
+            <p:ph type="sldImg" idx="2"/>
+          </p:nvPr>
+        </p:nvSpPr>
+        <p:spPr/>
+      </p:sp>
+      <p:sp>
+        <p:nvSpPr>
+          <p:cNvPr id="3" name="Notes Placeholder 2"/>
+          <p:cNvSpPr>
+            <a:spLocks noGrp="1"/>
+          </p:cNvSpPr>
+          <p:nvPr>
+            <p:ph type="body" idx="3" sz="quarter"/>
+          </p:nvPr>
+        </p:nvSpPr>
+        <p:spPr/>
+        <p:txBody>
+          <a:bodyPr/>
+          <a:lstStyle/>
+          <a:p>
+            <a:r>
+              <a:t>Mantén esta diapositiva proyectada durante el Lab 4 Capstone.</a:t>
             </a:r>
           </a:p>
         </p:txBody>
@@ -722,7 +1006,7 @@
           <a:lstStyle/>
           <a:p>
             <a:r>
-              <a:t>Explica la agenda de 4 horas y cómo los participantes usarán Antigravity con los prompts optimizados de PROMPTS.es.md.</a:t>
+              <a:t>Explica la agenda de 4 horas y cómo los participantes usarán Antigravity con los prompts optimizados de PROMPTS.es.md y las guías en PDF.</a:t>
             </a:r>
           </a:p>
         </p:txBody>
@@ -932,7 +1216,7 @@
           <a:lstStyle/>
           <a:p>
             <a:r>
-              <a:t>Inicia el Lab 1. Pide a los asistentes ejecutar install.sh, abrir el dashboard web local y usar los prompts de PROMPTS.es.md.</a:t>
+              <a:t>Revisa los Objetivos del Lab 1 y los dos servicios que los asistentes repararán.</a:t>
             </a:r>
           </a:p>
         </p:txBody>
@@ -1002,7 +1286,7 @@
           <a:lstStyle/>
           <a:p>
             <a:r>
-              <a:t>Explica el mecanismo interno de divulgación progresiva (progressive disclosure) y por qué permite tener decenas de skills sin consumir tokens innecesarios.</a:t>
+              <a:t>Mantén esta diapositiva proyectada durante el Lab 1.</a:t>
             </a:r>
           </a:p>
         </p:txBody>
@@ -1072,7 +1356,7 @@
           <a:lstStyle/>
           <a:p>
             <a:r>
-              <a:t>Guía a los participantes durante el Lab 2 para crear GEMINI.md, reglas de dominio y su primer Skill ejecutable.</a:t>
+              <a:t>Explica el mecanismo interno de divulgación progresiva (progressive disclosure) y por qué permite tener decenas de skills sin consumir tokens innecesarios.</a:t>
             </a:r>
           </a:p>
         </p:txBody>
@@ -1142,7 +1426,7 @@
           <a:lstStyle/>
           <a:p>
             <a:r>
-              <a:t>Módulo clave de seguridad y gobernanza: muestra en la consola de Google Cloud cómo se auditan las licencias Gemini Enterprise y cómo los Hooks locales bloquean acciones riesgosas.</a:t>
+              <a:t>Explica los Objetivos del Lab 2 y los archivos de personalización que construirán.</a:t>
             </a:r>
           </a:p>
         </p:txBody>
@@ -1212,7 +1496,7 @@
           <a:lstStyle/>
           <a:p>
             <a:r>
-              <a:t>Los asistentes implementan su servidor FastMCP, configuran mcp_config.json y hooks.json, y verifican el bloqueo determinista de violaciones.</a:t>
+              <a:t>Mantén esta diapositiva en pantalla durante el Lab 2.</a:t>
             </a:r>
           </a:p>
         </p:txBody>
@@ -4387,7 +4671,7 @@
           <a:lstStyle/>
           <a:p>
             <a:pPr>
-              <a:defRPr sz="2400" b="1">
+              <a:defRPr sz="2250" b="1">
                 <a:solidFill>
                   <a:srgbClr val="F0F6FC"/>
                 </a:solidFill>
@@ -4423,7 +4707,7 @@
           <a:lstStyle/>
           <a:p>
             <a:pPr>
-              <a:defRPr sz="1350">
+              <a:defRPr sz="1300">
                 <a:solidFill>
                   <a:srgbClr val="8B949E"/>
                 </a:solidFill>
@@ -4556,8 +4840,8 @@
         </p:nvSpPr>
         <p:spPr>
           <a:xfrm>
-            <a:off x="6537960" y="1920240"/>
-            <a:ext cx="4919472" cy="3886200"/>
+            <a:off x="6510528" y="1901952"/>
+            <a:ext cx="4974336" cy="3922776"/>
           </a:xfrm>
           <a:prstGeom prst="rect">
             <a:avLst/>
@@ -4572,25 +4856,25 @@
           <a:p>
             <a:pPr>
               <a:spcAft>
-                <a:spcPts val="1000"/>
-              </a:spcAft>
-              <a:defRPr sz="1600" b="1">
-                <a:solidFill>
-                  <a:srgbClr val="20E3B2"/>
-                </a:solidFill>
-                <a:latin typeface="Arial"/>
-              </a:defRPr>
-            </a:pPr>
-            <a:r>
-              <a:t>Misión del Taller y Arquitectura de Datos</a:t>
-            </a:r>
-          </a:p>
-          <a:p>
-            <a:pPr>
-              <a:spcAft>
                 <a:spcPts val="800"/>
               </a:spcAft>
-              <a:defRPr sz="1220">
+              <a:defRPr sz="1500" b="1">
+                <a:solidFill>
+                  <a:srgbClr val="20E3B2"/>
+                </a:solidFill>
+                <a:latin typeface="Arial"/>
+              </a:defRPr>
+            </a:pPr>
+            <a:r>
+              <a:t>Misión del Taller y Arquitectura de Datos</a:t>
+            </a:r>
+          </a:p>
+          <a:p>
+            <a:pPr>
+              <a:spcAft>
+                <a:spcPts val="650"/>
+              </a:spcAft>
+              <a:defRPr sz="1130">
                 <a:solidFill>
                   <a:srgbClr val="F0F6FC"/>
                 </a:solidFill>
@@ -4604,9 +4888,9 @@
           <a:p>
             <a:pPr>
               <a:spcAft>
-                <a:spcPts val="800"/>
+                <a:spcPts val="650"/>
               </a:spcAft>
-              <a:defRPr sz="1220">
+              <a:defRPr sz="1130">
                 <a:solidFill>
                   <a:srgbClr val="F0F6FC"/>
                 </a:solidFill>
@@ -4620,9 +4904,9 @@
           <a:p>
             <a:pPr>
               <a:spcAft>
-                <a:spcPts val="800"/>
+                <a:spcPts val="650"/>
               </a:spcAft>
-              <a:defRPr sz="1220">
+              <a:defRPr sz="1130">
                 <a:solidFill>
                   <a:srgbClr val="F0F6FC"/>
                 </a:solidFill>
@@ -4636,9 +4920,9 @@
           <a:p>
             <a:pPr>
               <a:spcAft>
-                <a:spcPts val="800"/>
+                <a:spcPts val="650"/>
               </a:spcAft>
-              <a:defRPr sz="1220">
+              <a:defRPr sz="1130">
                 <a:solidFill>
                   <a:srgbClr val="F0F6FC"/>
                 </a:solidFill>
@@ -4652,9 +4936,9 @@
           <a:p>
             <a:pPr>
               <a:spcAft>
-                <a:spcPts val="800"/>
+                <a:spcPts val="650"/>
               </a:spcAft>
-              <a:defRPr sz="1220">
+              <a:defRPr sz="1130">
                 <a:solidFill>
                   <a:srgbClr val="F0F6FC"/>
                 </a:solidFill>
@@ -4743,7 +5027,7 @@
               </a:defRPr>
             </a:pPr>
             <a:r>
-              <a:t>Impartido por Tryolabs • Ejecución 100% Local en Laptop + Despliegue Terraform a Cloud Run y Gemini Enterprise    |    Slide 1/11</a:t>
+              <a:t>Impartido por Tryolabs • Ejecución 100% Local en Laptop + Despliegue Terraform a Cloud Run y Gemini Enterprise    |    Slide 1/15</a:t>
             </a:r>
           </a:p>
         </p:txBody>
@@ -4907,7 +5191,7 @@
               </a:defRPr>
             </a:pPr>
             <a:r>
-              <a:t>MÓDULO TEÓRICO 4 (6 MINUTOS) • SUBAGENTES, GOOGLE ADK, A2A Y TERRAFORM</a:t>
+              <a:t>MÓDULO TEÓRICO 3 (6 MINUTOS) • MCP, HOOKS Y GOBERNANZA EMPRESARIAL</a:t>
             </a:r>
           </a:p>
         </p:txBody>
@@ -4935,7 +5219,7 @@
           <a:lstStyle/>
           <a:p>
             <a:pPr>
-              <a:defRPr sz="2400" b="1">
+              <a:defRPr sz="2250" b="1">
                 <a:solidFill>
                   <a:srgbClr val="F0F6FC"/>
                 </a:solidFill>
@@ -4943,7 +5227,7 @@
               </a:defRPr>
             </a:pPr>
             <a:r>
-              <a:t>Sistemas Multi-Agente con Google ADK, Protocolo A2A y Terraform</a:t>
+              <a:t>Puente MCP en Vivo, Hooks Deterministas y Gobernanza Gemini Enterprise</a:t>
             </a:r>
           </a:p>
         </p:txBody>
@@ -4971,7 +5255,7 @@
           <a:lstStyle/>
           <a:p>
             <a:pPr>
-              <a:defRPr sz="1350">
+              <a:defRPr sz="1300">
                 <a:solidFill>
                   <a:srgbClr val="8B949E"/>
                 </a:solidFill>
@@ -4979,14 +5263,14 @@
               </a:defRPr>
             </a:pPr>
             <a:r>
-              <a:t>Diseñando arquitecturas multi-agente localmente con `adk web` y desplegando a Cloud Run y Gemini Enterprise</a:t>
+              <a:t>Conectando bases de datos en tiempo real con seguridad empresarial demostrable en Google Cloud</a:t>
             </a:r>
           </a:p>
         </p:txBody>
       </p:sp>
       <p:pic>
         <p:nvPicPr>
-          <p:cNvPr id="8" name="Picture 7" descr="adk_a2a_cloud_es.png"/>
+          <p:cNvPr id="8" name="Picture 7" descr="governance_es.png"/>
           <p:cNvPicPr>
             <a:picLocks noChangeAspect="1"/>
           </p:cNvPicPr>
@@ -5068,7 +5352,7 @@
             <a:avLst/>
           </a:prstGeom>
           <a:solidFill>
-            <a:srgbClr val="20E3B2"/>
+            <a:srgbClr val="D29922"/>
           </a:solidFill>
           <a:ln>
             <a:noFill/>
@@ -5104,8 +5388,8 @@
         </p:nvSpPr>
         <p:spPr>
           <a:xfrm>
-            <a:off x="6537960" y="1920240"/>
-            <a:ext cx="4919472" cy="3886200"/>
+            <a:off x="6510528" y="1901952"/>
+            <a:ext cx="4974336" cy="3922776"/>
           </a:xfrm>
           <a:prstGeom prst="rect">
             <a:avLst/>
@@ -5120,25 +5404,25 @@
           <a:p>
             <a:pPr>
               <a:spcAft>
-                <a:spcPts val="1000"/>
-              </a:spcAft>
-              <a:defRPr sz="1600" b="1">
-                <a:solidFill>
-                  <a:srgbClr val="20E3B2"/>
-                </a:solidFill>
-                <a:latin typeface="Arial"/>
-              </a:defRPr>
-            </a:pPr>
-            <a:r>
-              <a:t>Arquitectura Multi-Agente de Punta a Punta</a:t>
-            </a:r>
-          </a:p>
-          <a:p>
-            <a:pPr>
-              <a:spcAft>
                 <a:spcPts val="800"/>
               </a:spcAft>
-              <a:defRPr sz="1220">
+              <a:defRPr sz="1500" b="1">
+                <a:solidFill>
+                  <a:srgbClr val="D29922"/>
+                </a:solidFill>
+                <a:latin typeface="Arial"/>
+              </a:defRPr>
+            </a:pPr>
+            <a:r>
+              <a:t>Seguridad y Gobernanza en 2 Capas</a:t>
+            </a:r>
+          </a:p>
+          <a:p>
+            <a:pPr>
+              <a:spcAft>
+                <a:spcPts val="650"/>
+              </a:spcAft>
+              <a:defRPr sz="1130">
                 <a:solidFill>
                   <a:srgbClr val="F0F6FC"/>
                 </a:solidFill>
@@ -5146,15 +5430,15 @@
               </a:defRPr>
             </a:pPr>
             <a:r>
-              <a:t>▸  Subagentes de Antigravity (/teamwork, /boost, /grill-me): Delega tareas paralelas de investigación y programación dentro de Antigravity</a:t>
+              <a:t>▸  Capa 1 — Google Cloud y Gemini Enterprise (Demo en Vivo del Instructor): Cloud IAM (roles/cloudaicompanion.user), Cloud Audit Logs (cloudaicompanion.googleapis.com), perímetros VPC-SC, Cero Retención y Cero Entrenamiento con código del cliente</a:t>
             </a:r>
           </a:p>
           <a:p>
             <a:pPr>
               <a:spcAft>
-                <a:spcPts val="800"/>
+                <a:spcPts val="650"/>
               </a:spcAft>
-              <a:defRPr sz="1220">
+              <a:defRPr sz="1130">
                 <a:solidFill>
                   <a:srgbClr val="F0F6FC"/>
                 </a:solidFill>
@@ -5162,15 +5446,15 @@
               </a:defRPr>
             </a:pPr>
             <a:r>
-              <a:t>▸  Google ADK (Agent Development Kit): Construye jerarquías multi-agente de dominio (`root_agent` coordinando agentes especialistas Técnico y Comercial con herramientas tipadas)</a:t>
+              <a:t>▸  Capa 2 — Seguridad Local en Antigravity: Política de Ejecución (strict / request-review / proceed-in-sandbox), Sandbox de Terminal SO, bloqueo de archivos fuera del workspace y listas permitidas/bloqueadas</a:t>
             </a:r>
           </a:p>
           <a:p>
             <a:pPr>
               <a:spcAft>
-                <a:spcPts val="800"/>
+                <a:spcPts val="650"/>
               </a:spcAft>
-              <a:defRPr sz="1220">
+              <a:defRPr sz="1130">
                 <a:solidFill>
                   <a:srgbClr val="F0F6FC"/>
                 </a:solidFill>
@@ -5178,15 +5462,15 @@
               </a:defRPr>
             </a:pPr>
             <a:r>
-              <a:t>▸  Pruebas Locales con ADK Dev UI (`adk web`): Ejecuta `./scripts/run_adk_web.sh` (http://localhost:8080) para inspeccionar trazas de eventos multi-agente, llamadas a herramientas y estado</a:t>
+              <a:t>▸  Contexto en Vivo vía FastMCP (.agents/mcp_config.json): Expone herramientas Python tipadas sobre SQLite y telemetría vía stdio/SSE</a:t>
             </a:r>
           </a:p>
           <a:p>
             <a:pPr>
               <a:spcAft>
-                <a:spcPts val="800"/>
+                <a:spcPts val="650"/>
               </a:spcAft>
-              <a:defRPr sz="1220">
+              <a:defRPr sz="1130">
                 <a:solidFill>
                   <a:srgbClr val="F0F6FC"/>
                 </a:solidFill>
@@ -5194,23 +5478,7 @@
               </a:defRPr>
             </a:pPr>
             <a:r>
-              <a:t>▸  Protocolo A2A (Agent2Agent): Publica `GET /.well-known/agent.json` (Agent Card) y `POST /api/v1/a2a` (JSON-RPC 2.0 `tasks/send`) para interoperabilidad entre agentes</a:t>
-            </a:r>
-          </a:p>
-          <a:p>
-            <a:pPr>
-              <a:spcAft>
-                <a:spcPts val="800"/>
-              </a:spcAft>
-              <a:defRPr sz="1220">
-                <a:solidFill>
-                  <a:srgbClr val="F0F6FC"/>
-                </a:solidFill>
-                <a:latin typeface="Arial"/>
-              </a:defRPr>
-            </a:pPr>
-            <a:r>
-              <a:t>▸  Terraform + Gemini Enterprise: Aprovisiona Cloud Run v2 e IAM vía `infra/terraform/` (`deploy_gcp.sh`) y registra tu agente A2A en Gemini Enterprise (`register_gemini_enterprise_agent.sh`)</a:t>
+              <a:t>▸  Hooks Deterministas (.agents/hooks.json): El script PreToolUse inspecciona el JSON en stdin; devolver código 2 bloquea violaciones e imprime un registro de auditoría inmutable</a:t>
             </a:r>
           </a:p>
         </p:txBody>
@@ -5291,7 +5559,7 @@
               </a:defRPr>
             </a:pPr>
             <a:r>
-              <a:t>¡Desarrolla y prueba 100% localmente con `adk web` + `pytest`, y despliega a Google Cloud y Gemini Enterprise con Terraform!    |    Slide 10/11</a:t>
+              <a:t>Demo del Instructor: Mostrar Cloud Audit Logs en GCP Console + disparar un bloqueo PreToolUse con código 2 localmente.    |    Slide 10/15</a:t>
             </a:r>
           </a:p>
         </p:txBody>
@@ -5455,7 +5723,7 @@
               </a:defRPr>
             </a:pPr>
             <a:r>
-              <a:t>LABORATORIO PRÁCTICO 4 CAPSTONE (55 MINUTOS) • ADK, A2A Y DESPLIEGUE CLOUD</a:t>
+              <a:t>LABORATORIO PRÁCTICO 3 (PARTE 1/2) • OBJETIVOS Y QUÉ CONSTRUIRÁS</a:t>
             </a:r>
           </a:p>
         </p:txBody>
@@ -5483,7 +5751,7 @@
           <a:lstStyle/>
           <a:p>
             <a:pPr>
-              <a:defRPr sz="2400" b="1">
+              <a:defRPr sz="2250" b="1">
                 <a:solidFill>
                   <a:srgbClr val="F0F6FC"/>
                 </a:solidFill>
@@ -5491,7 +5759,7 @@
               </a:defRPr>
             </a:pPr>
             <a:r>
-              <a:t>Lab 4 Capstone: Construye el Sistema Multi-Agente ADK + A2A</a:t>
+              <a:t>Lab 3: Servidor FastMCP y Hooks Deterministas — Objetivos y Diseño</a:t>
             </a:r>
           </a:p>
         </p:txBody>
@@ -5519,7 +5787,7 @@
           <a:lstStyle/>
           <a:p>
             <a:pPr>
-              <a:defRPr sz="1350">
+              <a:defRPr sz="1300">
                 <a:solidFill>
                   <a:srgbClr val="8B949E"/>
                 </a:solidFill>
@@ -5527,14 +5795,14 @@
               </a:defRPr>
             </a:pPr>
             <a:r>
-              <a:t>Usa Antigravity (/grill-me, /boost, Subagentes) para construir, probar en `adk web` y validar Terraform</a:t>
+              <a:t>55 Minutos • Guía PDF Imprimible: labs/lab-03-mcp-and-hooks/LAB_03_INSTRUCTIONS_ES.pdf</a:t>
             </a:r>
           </a:p>
         </p:txBody>
       </p:sp>
       <p:pic>
         <p:nvPicPr>
-          <p:cNvPr id="8" name="Picture 7" descr="adk_a2a_cloud_es.png"/>
+          <p:cNvPr id="8" name="Picture 7" descr="governance_es.png"/>
           <p:cNvPicPr>
             <a:picLocks noChangeAspect="1"/>
           </p:cNvPicPr>
@@ -5616,7 +5884,7 @@
             <a:avLst/>
           </a:prstGeom>
           <a:solidFill>
-            <a:srgbClr val="20E3B2"/>
+            <a:srgbClr val="BC8CFF"/>
           </a:solidFill>
           <a:ln>
             <a:noFill/>
@@ -5652,8 +5920,8 @@
         </p:nvSpPr>
         <p:spPr>
           <a:xfrm>
-            <a:off x="6537960" y="1920240"/>
-            <a:ext cx="4919472" cy="3886200"/>
+            <a:off x="6510528" y="1901952"/>
+            <a:ext cx="4974336" cy="3922776"/>
           </a:xfrm>
           <a:prstGeom prst="rect">
             <a:avLst/>
@@ -5668,25 +5936,25 @@
           <a:p>
             <a:pPr>
               <a:spcAft>
-                <a:spcPts val="1000"/>
-              </a:spcAft>
-              <a:defRPr sz="1600" b="1">
-                <a:solidFill>
-                  <a:srgbClr val="20E3B2"/>
-                </a:solidFill>
-                <a:latin typeface="Arial"/>
-              </a:defRPr>
-            </a:pPr>
-            <a:r>
-              <a:t>Guía del Lab 4 y Prompts Optimizados</a:t>
-            </a:r>
-          </a:p>
-          <a:p>
-            <a:pPr>
-              <a:spcAft>
                 <a:spcPts val="800"/>
               </a:spcAft>
-              <a:defRPr sz="1220">
+              <a:defRPr sz="1500" b="1">
+                <a:solidFill>
+                  <a:srgbClr val="BC8CFF"/>
+                </a:solidFill>
+                <a:latin typeface="Arial"/>
+              </a:defRPr>
+            </a:pPr>
+            <a:r>
+              <a:t>Objetivos del Lab 3 y Qué Construirás</a:t>
+            </a:r>
+          </a:p>
+          <a:p>
+            <a:pPr>
+              <a:spcAft>
+                <a:spcPts val="650"/>
+              </a:spcAft>
+              <a:defRPr sz="1130">
                 <a:solidFill>
                   <a:srgbClr val="F0F6FC"/>
                 </a:solidFill>
@@ -5694,15 +5962,15 @@
               </a:defRPr>
             </a:pPr>
             <a:r>
-              <a:t>▸  Setup: Ejecuta ./labs/lab-04-multi-agent-capstone/install.sh</a:t>
+              <a:t>▸  Objetivo 1 (Conexión a Datos en Vivo vía MCP): Exponer herramientas SQLite OSS/BSS tipadas a Antigravity mediante un servidor `FastMCP`.</a:t>
             </a:r>
           </a:p>
           <a:p>
             <a:pPr>
               <a:spcAft>
-                <a:spcPts val="800"/>
+                <a:spcPts val="650"/>
               </a:spcAft>
-              <a:defRPr sz="1220">
+              <a:defRPr sz="1130">
                 <a:solidFill>
                   <a:srgbClr val="F0F6FC"/>
                 </a:solidFill>
@@ -5710,15 +5978,15 @@
               </a:defRPr>
             </a:pPr>
             <a:r>
-              <a:t>▸  Tarea 1 (Jerarquía Google ADK): Implementa @src/agents/adk_a2a_orchestrator.py y @adk_agents/telecom_nexus/agent.py (RANSliceCapacityAgent + BSSCommercialSLAAgent -&gt; TelecomNexusOrchestratorAgent)</a:t>
+              <a:t>▸  Objetivo 2 (Seguridad Determinista y Privacidad CPNI): Enmascarar `IMSI`/`MSISDN` (`3104***0001`) y bloquear SQL destructivo (`DROP`/`DELETE`) con código de salida `2` mediante hooks `PreToolUse`.</a:t>
             </a:r>
           </a:p>
           <a:p>
             <a:pPr>
               <a:spcAft>
-                <a:spcPts val="800"/>
+                <a:spcPts val="650"/>
               </a:spcAft>
-              <a:defRPr sz="1220">
+              <a:defRPr sz="1130">
                 <a:solidFill>
                   <a:srgbClr val="F0F6FC"/>
                 </a:solidFill>
@@ -5726,15 +5994,15 @@
               </a:defRPr>
             </a:pPr>
             <a:r>
-              <a:t>▸  Tarea 2 (Protocolo A2A): Expón GET /.well-known/agent.json y POST /api/v1/a2a (JSON-RPC 2.0 tasks/send) + rutas de factibilidad TMF622 y remediación de slices</a:t>
+              <a:t>▸  Qué Construirás #1 (`mcp_server/telecom_mcp.py` y `.agents/mcp_config.json`): 4 herramientas `@mcp.tool()` (`query_ran_cell_health`, `calculate_contract_penalty_exposure`, `inspect_unbilled_cdrs`, `evaluate_slice_capacity`).</a:t>
             </a:r>
           </a:p>
           <a:p>
             <a:pPr>
               <a:spcAft>
-                <a:spcPts val="800"/>
+                <a:spcPts val="650"/>
               </a:spcAft>
-              <a:defRPr sz="1220">
+              <a:defRPr sz="1130">
                 <a:solidFill>
                   <a:srgbClr val="F0F6FC"/>
                 </a:solidFill>
@@ -5742,15 +6010,15 @@
               </a:defRPr>
             </a:pPr>
             <a:r>
-              <a:t>▸  Tarea 3 (ADK Dev UI Local): Ejecuta ./scripts/run_adk_web.sh para probar en `adk web` (http://localhost:8080) y corre ./labs/lab-04-multi-agent-capstone/verify.sh</a:t>
+              <a:t>▸  Qué Construirás #2 (`.agents/hooks.json` y `scripts/audit_hook.py`): Compuerta determinista `PreToolUse` y `PostToolUse` que bloquea violaciones con código `2` y audita en `data/logs/hook_audit.log`.</a:t>
             </a:r>
           </a:p>
           <a:p>
             <a:pPr>
               <a:spcAft>
-                <a:spcPts val="800"/>
+                <a:spcPts val="650"/>
               </a:spcAft>
-              <a:defRPr sz="1220">
+              <a:defRPr sz="1130">
                 <a:solidFill>
                   <a:srgbClr val="F0F6FC"/>
                 </a:solidFill>
@@ -5758,7 +6026,7 @@
               </a:defRPr>
             </a:pPr>
             <a:r>
-              <a:t>▸  Tarea 4 (Terraform y Gemini Enterprise): Valida con ./deploy/deploy_gcp.sh --dry-run, despliega a Cloud Run con Terraform y registra en Gemini Enterprise con ./deploy/register_gemini_enterprise_agent.sh</a:t>
+              <a:t>▸  Entregable y Verificación: Pasar los 6 tests de MCP y Hooks en `./labs/lab-03-mcp-and-hooks/verify.sh`.</a:t>
             </a:r>
           </a:p>
         </p:txBody>
@@ -5839,7 +6107,2533 @@
               </a:defRPr>
             </a:pPr>
             <a:r>
-              <a:t>¡Felicidades! Ejecuta ./labs/lab-04-multi-agent-capstone/verify.sh para validar el 100% de la suite de pruebas.    |    Slide 11/11</a:t>
+              <a:t>Impartido por Tryolabs • Guía imprimible completa: LAB_03_INSTRUCTIONS_ES.pdf    |    Slide 11/15</a:t>
+            </a:r>
+          </a:p>
+        </p:txBody>
+      </p:sp>
+    </p:spTree>
+  </p:cSld>
+  <p:clrMapOvr>
+    <a:masterClrMapping/>
+  </p:clrMapOvr>
+</p:sld>
+</file>
+
+<file path=ppt/slides/slide12.xml><?xml version="1.0" encoding="utf-8"?>
+<p:sld xmlns:a="http://schemas.openxmlformats.org/drawingml/2006/main" xmlns:p="http://schemas.openxmlformats.org/presentationml/2006/main" xmlns:r="http://schemas.openxmlformats.org/officeDocument/2006/relationships">
+  <p:cSld>
+    <p:spTree>
+      <p:nvGrpSpPr>
+        <p:cNvPr id="1" name=""/>
+        <p:cNvGrpSpPr/>
+        <p:nvPr/>
+      </p:nvGrpSpPr>
+      <p:grpSpPr/>
+      <p:sp>
+        <p:nvSpPr>
+          <p:cNvPr id="2" name="Rectangle 1"/>
+          <p:cNvSpPr/>
+          <p:nvPr/>
+        </p:nvSpPr>
+        <p:spPr>
+          <a:xfrm>
+            <a:off x="0" y="0"/>
+            <a:ext cx="12191695" cy="6858000"/>
+          </a:xfrm>
+          <a:prstGeom prst="rect">
+            <a:avLst/>
+          </a:prstGeom>
+          <a:solidFill>
+            <a:srgbClr val="0D1117"/>
+          </a:solidFill>
+          <a:ln>
+            <a:noFill/>
+          </a:ln>
+        </p:spPr>
+        <p:style>
+          <a:lnRef idx="1">
+            <a:schemeClr val="accent1"/>
+          </a:lnRef>
+          <a:fillRef idx="3">
+            <a:schemeClr val="accent1"/>
+          </a:fillRef>
+          <a:effectRef idx="2">
+            <a:schemeClr val="accent1"/>
+          </a:effectRef>
+          <a:fontRef idx="minor">
+            <a:schemeClr val="lt1"/>
+          </a:fontRef>
+        </p:style>
+        <p:txBody>
+          <a:bodyPr rtlCol="0" anchor="ctr"/>
+          <a:lstStyle/>
+          <a:p>
+            <a:pPr algn="ctr"/>
+          </a:p>
+        </p:txBody>
+      </p:sp>
+      <p:sp>
+        <p:nvSpPr>
+          <p:cNvPr id="3" name="Rectangle 2"/>
+          <p:cNvSpPr/>
+          <p:nvPr/>
+        </p:nvSpPr>
+        <p:spPr>
+          <a:xfrm>
+            <a:off x="0" y="0"/>
+            <a:ext cx="12191695" cy="73152"/>
+          </a:xfrm>
+          <a:prstGeom prst="rect">
+            <a:avLst/>
+          </a:prstGeom>
+          <a:solidFill>
+            <a:srgbClr val="20E3B2"/>
+          </a:solidFill>
+          <a:ln>
+            <a:noFill/>
+          </a:ln>
+        </p:spPr>
+        <p:style>
+          <a:lnRef idx="1">
+            <a:schemeClr val="accent1"/>
+          </a:lnRef>
+          <a:fillRef idx="3">
+            <a:schemeClr val="accent1"/>
+          </a:fillRef>
+          <a:effectRef idx="2">
+            <a:schemeClr val="accent1"/>
+          </a:effectRef>
+          <a:fontRef idx="minor">
+            <a:schemeClr val="lt1"/>
+          </a:fontRef>
+        </p:style>
+        <p:txBody>
+          <a:bodyPr rtlCol="0" anchor="ctr"/>
+          <a:lstStyle/>
+          <a:p>
+            <a:pPr algn="ctr"/>
+          </a:p>
+        </p:txBody>
+      </p:sp>
+      <p:pic>
+        <p:nvPicPr>
+          <p:cNvPr id="4" name="Picture 3" descr="tryolabs-logo-dark-bg.png"/>
+          <p:cNvPicPr>
+            <a:picLocks noChangeAspect="1"/>
+          </p:cNvPicPr>
+          <p:nvPr/>
+        </p:nvPicPr>
+        <p:blipFill>
+          <a:blip r:embed="rId2"/>
+          <a:stretch>
+            <a:fillRect/>
+          </a:stretch>
+        </p:blipFill>
+        <p:spPr>
+          <a:xfrm>
+            <a:off x="9829800" y="256032"/>
+            <a:ext cx="1874519" cy="417876"/>
+          </a:xfrm>
+          <a:prstGeom prst="rect">
+            <a:avLst/>
+          </a:prstGeom>
+        </p:spPr>
+      </p:pic>
+      <p:sp>
+        <p:nvSpPr>
+          <p:cNvPr id="5" name="TextBox 4"/>
+          <p:cNvSpPr txBox="1"/>
+          <p:nvPr/>
+        </p:nvSpPr>
+        <p:spPr>
+          <a:xfrm>
+            <a:off x="502920" y="256032"/>
+            <a:ext cx="9144000" cy="320040"/>
+          </a:xfrm>
+          <a:prstGeom prst="rect">
+            <a:avLst/>
+          </a:prstGeom>
+          <a:noFill/>
+        </p:spPr>
+        <p:txBody>
+          <a:bodyPr wrap="square">
+            <a:spAutoFit/>
+          </a:bodyPr>
+          <a:lstStyle/>
+          <a:p>
+            <a:pPr>
+              <a:defRPr sz="1050" b="1">
+                <a:solidFill>
+                  <a:srgbClr val="20E3B2"/>
+                </a:solidFill>
+                <a:latin typeface="Arial"/>
+              </a:defRPr>
+            </a:pPr>
+            <a:r>
+              <a:t>LABORATORIO PRÁCTICO 3 (PARTE 2/2) • INSTRUCCIONES PASO A PASO Y PROMPTS</a:t>
+            </a:r>
+          </a:p>
+        </p:txBody>
+      </p:sp>
+      <p:sp>
+        <p:nvSpPr>
+          <p:cNvPr id="6" name="TextBox 5"/>
+          <p:cNvSpPr txBox="1"/>
+          <p:nvPr/>
+        </p:nvSpPr>
+        <p:spPr>
+          <a:xfrm>
+            <a:off x="502920" y="566928"/>
+            <a:ext cx="9235440" cy="594360"/>
+          </a:xfrm>
+          <a:prstGeom prst="rect">
+            <a:avLst/>
+          </a:prstGeom>
+          <a:noFill/>
+        </p:spPr>
+        <p:txBody>
+          <a:bodyPr wrap="square">
+            <a:spAutoFit/>
+          </a:bodyPr>
+          <a:lstStyle/>
+          <a:p>
+            <a:pPr>
+              <a:defRPr sz="2250" b="1">
+                <a:solidFill>
+                  <a:srgbClr val="F0F6FC"/>
+                </a:solidFill>
+                <a:latin typeface="Arial"/>
+              </a:defRPr>
+            </a:pPr>
+            <a:r>
+              <a:t>Instrucciones del Lab 3 y Prompts para Copiar y Pegar</a:t>
+            </a:r>
+          </a:p>
+        </p:txBody>
+      </p:sp>
+      <p:sp>
+        <p:nvSpPr>
+          <p:cNvPr id="7" name="TextBox 6"/>
+          <p:cNvSpPr txBox="1"/>
+          <p:nvPr/>
+        </p:nvSpPr>
+        <p:spPr>
+          <a:xfrm>
+            <a:off x="502920" y="1207008"/>
+            <a:ext cx="11155680" cy="411480"/>
+          </a:xfrm>
+          <a:prstGeom prst="rect">
+            <a:avLst/>
+          </a:prstGeom>
+          <a:noFill/>
+        </p:spPr>
+        <p:txBody>
+          <a:bodyPr wrap="square">
+            <a:spAutoFit/>
+          </a:bodyPr>
+          <a:lstStyle/>
+          <a:p>
+            <a:pPr>
+              <a:defRPr sz="1300">
+                <a:solidFill>
+                  <a:srgbClr val="8B949E"/>
+                </a:solidFill>
+                <a:latin typeface="Arial"/>
+              </a:defRPr>
+            </a:pPr>
+            <a:r>
+              <a:t>Sigue los Pasos 1–5 a la izquierda y copia los prompts desde labs/lab-03-mcp-and-hooks/PROMPTS.es.md</a:t>
+            </a:r>
+          </a:p>
+        </p:txBody>
+      </p:sp>
+      <p:sp>
+        <p:nvSpPr>
+          <p:cNvPr id="8" name="Rounded Rectangle 7"/>
+          <p:cNvSpPr/>
+          <p:nvPr/>
+        </p:nvSpPr>
+        <p:spPr>
+          <a:xfrm>
+            <a:off x="502920" y="1755648"/>
+            <a:ext cx="5504688" cy="4160520"/>
+          </a:xfrm>
+          <a:prstGeom prst="roundRect">
+            <a:avLst/>
+          </a:prstGeom>
+          <a:solidFill>
+            <a:srgbClr val="161B22"/>
+          </a:solidFill>
+          <a:ln w="19050">
+            <a:solidFill>
+              <a:srgbClr val="30363D"/>
+            </a:solidFill>
+          </a:ln>
+        </p:spPr>
+        <p:style>
+          <a:lnRef idx="1">
+            <a:schemeClr val="accent1"/>
+          </a:lnRef>
+          <a:fillRef idx="3">
+            <a:schemeClr val="accent1"/>
+          </a:fillRef>
+          <a:effectRef idx="2">
+            <a:schemeClr val="accent1"/>
+          </a:effectRef>
+          <a:fontRef idx="minor">
+            <a:schemeClr val="lt1"/>
+          </a:fontRef>
+        </p:style>
+        <p:txBody>
+          <a:bodyPr rtlCol="0" anchor="ctr"/>
+          <a:lstStyle/>
+          <a:p>
+            <a:pPr algn="ctr"/>
+          </a:p>
+        </p:txBody>
+      </p:sp>
+      <p:sp>
+        <p:nvSpPr>
+          <p:cNvPr id="9" name="Rectangle 8"/>
+          <p:cNvSpPr/>
+          <p:nvPr/>
+        </p:nvSpPr>
+        <p:spPr>
+          <a:xfrm>
+            <a:off x="502920" y="1755648"/>
+            <a:ext cx="5504688" cy="64008"/>
+          </a:xfrm>
+          <a:prstGeom prst="rect">
+            <a:avLst/>
+          </a:prstGeom>
+          <a:solidFill>
+            <a:srgbClr val="BC8CFF"/>
+          </a:solidFill>
+          <a:ln>
+            <a:noFill/>
+          </a:ln>
+        </p:spPr>
+        <p:style>
+          <a:lnRef idx="1">
+            <a:schemeClr val="accent1"/>
+          </a:lnRef>
+          <a:fillRef idx="3">
+            <a:schemeClr val="accent1"/>
+          </a:fillRef>
+          <a:effectRef idx="2">
+            <a:schemeClr val="accent1"/>
+          </a:effectRef>
+          <a:fontRef idx="minor">
+            <a:schemeClr val="lt1"/>
+          </a:fontRef>
+        </p:style>
+        <p:txBody>
+          <a:bodyPr rtlCol="0" anchor="ctr"/>
+          <a:lstStyle/>
+          <a:p>
+            <a:pPr algn="ctr"/>
+          </a:p>
+        </p:txBody>
+      </p:sp>
+      <p:sp>
+        <p:nvSpPr>
+          <p:cNvPr id="10" name="TextBox 9"/>
+          <p:cNvSpPr txBox="1"/>
+          <p:nvPr/>
+        </p:nvSpPr>
+        <p:spPr>
+          <a:xfrm>
+            <a:off x="704088" y="1901952"/>
+            <a:ext cx="5102352" cy="3922776"/>
+          </a:xfrm>
+          <a:prstGeom prst="rect">
+            <a:avLst/>
+          </a:prstGeom>
+          <a:noFill/>
+        </p:spPr>
+        <p:txBody>
+          <a:bodyPr wrap="square">
+            <a:spAutoFit/>
+          </a:bodyPr>
+          <a:lstStyle/>
+          <a:p>
+            <a:pPr>
+              <a:spcAft>
+                <a:spcPts val="800"/>
+              </a:spcAft>
+              <a:defRPr sz="1500" b="1">
+                <a:solidFill>
+                  <a:srgbClr val="BC8CFF"/>
+                </a:solidFill>
+                <a:latin typeface="Arial"/>
+              </a:defRPr>
+            </a:pPr>
+            <a:r>
+              <a:t>Instrucciones Paso a Paso del Lab 3</a:t>
+            </a:r>
+          </a:p>
+          <a:p>
+            <a:pPr>
+              <a:spcAft>
+                <a:spcPts val="650"/>
+              </a:spcAft>
+              <a:defRPr sz="1130">
+                <a:solidFill>
+                  <a:srgbClr val="F0F6FC"/>
+                </a:solidFill>
+                <a:latin typeface="Arial"/>
+              </a:defRPr>
+            </a:pPr>
+            <a:r>
+              <a:t>▸  Paso 1 (Inicializar Lab 03): Ejecuta `./labs/lab-03-mcp-and-hooks/install.sh` (aplica Labs 01–02 automáticamente).</a:t>
+            </a:r>
+          </a:p>
+          <a:p>
+            <a:pPr>
+              <a:spcAft>
+                <a:spcPts val="650"/>
+              </a:spcAft>
+              <a:defRPr sz="1130">
+                <a:solidFill>
+                  <a:srgbClr val="F0F6FC"/>
+                </a:solidFill>
+                <a:latin typeface="Arial"/>
+              </a:defRPr>
+            </a:pPr>
+            <a:r>
+              <a:t>▸  Paso 2 (Completar `mcp_server/telecom_mcp.py`): Implementa `calculate_contract_penalty_exposure`, `inspect_unbilled_cdrs` (enmascarando `imsi`/`msisdn` con `_mask_cpni`) y `evaluate_slice_capacity`.</a:t>
+            </a:r>
+          </a:p>
+          <a:p>
+            <a:pPr>
+              <a:spcAft>
+                <a:spcPts val="650"/>
+              </a:spcAft>
+              <a:defRPr sz="1130">
+                <a:solidFill>
+                  <a:srgbClr val="F0F6FC"/>
+                </a:solidFill>
+                <a:latin typeface="Arial"/>
+              </a:defRPr>
+            </a:pPr>
+            <a:r>
+              <a:t>▸  Paso 3 (Registrar `.agents/mcp_config.json`): Configura `telecom-nexus-mcp` invocando `./.venv/bin/python mcp_server/telecom_mcp.py`.</a:t>
+            </a:r>
+          </a:p>
+          <a:p>
+            <a:pPr>
+              <a:spcAft>
+                <a:spcPts val="650"/>
+              </a:spcAft>
+              <a:defRPr sz="1130">
+                <a:solidFill>
+                  <a:srgbClr val="F0F6FC"/>
+                </a:solidFill>
+                <a:latin typeface="Arial"/>
+              </a:defRPr>
+            </a:pPr>
+            <a:r>
+              <a:t>▸  Paso 4 (Configurar `.agents/hooks.json`): Conecta `PreToolUse` y `PostToolUse` a `scripts/audit_hook.py` (bloquea `DROP`/`TRUNCATE`/`DELETE` con código `2`).</a:t>
+            </a:r>
+          </a:p>
+          <a:p>
+            <a:pPr>
+              <a:spcAft>
+                <a:spcPts val="650"/>
+              </a:spcAft>
+              <a:defRPr sz="1130">
+                <a:solidFill>
+                  <a:srgbClr val="F0F6FC"/>
+                </a:solidFill>
+                <a:latin typeface="Arial"/>
+              </a:defRPr>
+            </a:pPr>
+            <a:r>
+              <a:t>▸  Paso 5 (Verificar): Ejecuta `./labs/lab-03-mcp-and-hooks/verify.sh` (`6 passed` + bitácora de auditoría).</a:t>
+            </a:r>
+          </a:p>
+        </p:txBody>
+      </p:sp>
+      <p:sp>
+        <p:nvSpPr>
+          <p:cNvPr id="11" name="Rounded Rectangle 10"/>
+          <p:cNvSpPr/>
+          <p:nvPr/>
+        </p:nvSpPr>
+        <p:spPr>
+          <a:xfrm>
+            <a:off x="6199632" y="1755648"/>
+            <a:ext cx="5486400" cy="4160520"/>
+          </a:xfrm>
+          <a:prstGeom prst="roundRect">
+            <a:avLst/>
+          </a:prstGeom>
+          <a:solidFill>
+            <a:srgbClr val="161B22"/>
+          </a:solidFill>
+          <a:ln w="19050">
+            <a:solidFill>
+              <a:srgbClr val="30363D"/>
+            </a:solidFill>
+          </a:ln>
+        </p:spPr>
+        <p:style>
+          <a:lnRef idx="1">
+            <a:schemeClr val="accent1"/>
+          </a:lnRef>
+          <a:fillRef idx="3">
+            <a:schemeClr val="accent1"/>
+          </a:fillRef>
+          <a:effectRef idx="2">
+            <a:schemeClr val="accent1"/>
+          </a:effectRef>
+          <a:fontRef idx="minor">
+            <a:schemeClr val="lt1"/>
+          </a:fontRef>
+        </p:style>
+        <p:txBody>
+          <a:bodyPr rtlCol="0" anchor="ctr"/>
+          <a:lstStyle/>
+          <a:p>
+            <a:pPr algn="ctr"/>
+          </a:p>
+        </p:txBody>
+      </p:sp>
+      <p:sp>
+        <p:nvSpPr>
+          <p:cNvPr id="12" name="Rectangle 11"/>
+          <p:cNvSpPr/>
+          <p:nvPr/>
+        </p:nvSpPr>
+        <p:spPr>
+          <a:xfrm>
+            <a:off x="6199632" y="1755648"/>
+            <a:ext cx="5486400" cy="64008"/>
+          </a:xfrm>
+          <a:prstGeom prst="rect">
+            <a:avLst/>
+          </a:prstGeom>
+          <a:solidFill>
+            <a:srgbClr val="D29922"/>
+          </a:solidFill>
+          <a:ln>
+            <a:noFill/>
+          </a:ln>
+        </p:spPr>
+        <p:style>
+          <a:lnRef idx="1">
+            <a:schemeClr val="accent1"/>
+          </a:lnRef>
+          <a:fillRef idx="3">
+            <a:schemeClr val="accent1"/>
+          </a:fillRef>
+          <a:effectRef idx="2">
+            <a:schemeClr val="accent1"/>
+          </a:effectRef>
+          <a:fontRef idx="minor">
+            <a:schemeClr val="lt1"/>
+          </a:fontRef>
+        </p:style>
+        <p:txBody>
+          <a:bodyPr rtlCol="0" anchor="ctr"/>
+          <a:lstStyle/>
+          <a:p>
+            <a:pPr algn="ctr"/>
+          </a:p>
+        </p:txBody>
+      </p:sp>
+      <p:sp>
+        <p:nvSpPr>
+          <p:cNvPr id="13" name="TextBox 12"/>
+          <p:cNvSpPr txBox="1"/>
+          <p:nvPr/>
+        </p:nvSpPr>
+        <p:spPr>
+          <a:xfrm>
+            <a:off x="6400800" y="1901952"/>
+            <a:ext cx="5084064" cy="3922776"/>
+          </a:xfrm>
+          <a:prstGeom prst="rect">
+            <a:avLst/>
+          </a:prstGeom>
+          <a:noFill/>
+        </p:spPr>
+        <p:txBody>
+          <a:bodyPr wrap="square">
+            <a:spAutoFit/>
+          </a:bodyPr>
+          <a:lstStyle/>
+          <a:p>
+            <a:pPr>
+              <a:spcAft>
+                <a:spcPts val="800"/>
+              </a:spcAft>
+              <a:defRPr sz="1500" b="1">
+                <a:solidFill>
+                  <a:srgbClr val="D29922"/>
+                </a:solidFill>
+                <a:latin typeface="Arial"/>
+              </a:defRPr>
+            </a:pPr>
+            <a:r>
+              <a:t>Prompts Optimizados (PROMPTS.es.md) y Verificación</a:t>
+            </a:r>
+          </a:p>
+          <a:p>
+            <a:pPr>
+              <a:spcAft>
+                <a:spcPts val="650"/>
+              </a:spcAft>
+              <a:defRPr sz="1130">
+                <a:solidFill>
+                  <a:srgbClr val="F0F6FC"/>
+                </a:solidFill>
+                <a:latin typeface="Arial"/>
+              </a:defRPr>
+            </a:pPr>
+            <a:r>
+              <a:t>▸  Prompt 1 — Completar Servidor FastMCP: '/plan Implementa las 3 funciones @mcp.tool() restantes en @mcp_server/telecom_mcp.py (calculate_contract_penalty_exposure, inspect_unbilled_cdrs con máscara CPNI y evaluate_slice_capacity) según @tests/test_lab03_mcp_hooks.py.'</a:t>
+            </a:r>
+          </a:p>
+          <a:p>
+            <a:pPr>
+              <a:spcAft>
+                <a:spcPts val="650"/>
+              </a:spcAft>
+              <a:defRPr sz="1130">
+                <a:solidFill>
+                  <a:srgbClr val="F0F6FC"/>
+                </a:solidFill>
+                <a:latin typeface="Arial"/>
+              </a:defRPr>
+            </a:pPr>
+            <a:r>
+              <a:t>▸  Prompt 2 — Configurar MCP y Hooks: 'Crea @.agents/mcp_config.json para telecom-nexus-mcp y @.agents/hooks.json conectando PreToolUse y PostToolUse a ./scripts/audit_hook.py.'</a:t>
+            </a:r>
+          </a:p>
+          <a:p>
+            <a:pPr>
+              <a:spcAft>
+                <a:spcPts val="650"/>
+              </a:spcAft>
+              <a:defRPr sz="1130">
+                <a:solidFill>
+                  <a:srgbClr val="F0F6FC"/>
+                </a:solidFill>
+                <a:latin typeface="Arial"/>
+              </a:defRPr>
+            </a:pPr>
+            <a:r>
+              <a:t>▸  Prompt 3 — Probar Bloqueo del Hook (Código 2): Ejecuta `echo '{"command":"sqlite3 data/telecom_nexus.db \"DROP TABLE b2b_contracts;\""}' | ./.venv/bin/python scripts/audit_hook.py --phase pre`</a:t>
+            </a:r>
+          </a:p>
+          <a:p>
+            <a:pPr>
+              <a:spcAft>
+                <a:spcPts val="650"/>
+              </a:spcAft>
+              <a:defRPr sz="1130">
+                <a:solidFill>
+                  <a:srgbClr val="F0F6FC"/>
+                </a:solidFill>
+                <a:latin typeface="Arial"/>
+              </a:defRPr>
+            </a:pPr>
+            <a:r>
+              <a:t>▸  Comando de Verificación: Ejecuta `./labs/lab-03-mcp-and-hooks/verify.sh` y revisa `data/logs/hook_audit.log`.</a:t>
+            </a:r>
+          </a:p>
+        </p:txBody>
+      </p:sp>
+      <p:sp>
+        <p:nvSpPr>
+          <p:cNvPr id="14" name="Rectangle 13"/>
+          <p:cNvSpPr/>
+          <p:nvPr/>
+        </p:nvSpPr>
+        <p:spPr>
+          <a:xfrm>
+            <a:off x="502920" y="6108192"/>
+            <a:ext cx="11183112" cy="475488"/>
+          </a:xfrm>
+          <a:prstGeom prst="rect">
+            <a:avLst/>
+          </a:prstGeom>
+          <a:solidFill>
+            <a:srgbClr val="161B22"/>
+          </a:solidFill>
+          <a:ln w="12700">
+            <a:solidFill>
+              <a:srgbClr val="30363D"/>
+            </a:solidFill>
+          </a:ln>
+        </p:spPr>
+        <p:style>
+          <a:lnRef idx="1">
+            <a:schemeClr val="accent1"/>
+          </a:lnRef>
+          <a:fillRef idx="3">
+            <a:schemeClr val="accent1"/>
+          </a:fillRef>
+          <a:effectRef idx="2">
+            <a:schemeClr val="accent1"/>
+          </a:effectRef>
+          <a:fontRef idx="minor">
+            <a:schemeClr val="lt1"/>
+          </a:fontRef>
+        </p:style>
+        <p:txBody>
+          <a:bodyPr rtlCol="0" anchor="ctr"/>
+          <a:lstStyle/>
+          <a:p>
+            <a:pPr algn="ctr"/>
+          </a:p>
+        </p:txBody>
+      </p:sp>
+      <p:sp>
+        <p:nvSpPr>
+          <p:cNvPr id="15" name="TextBox 14"/>
+          <p:cNvSpPr txBox="1"/>
+          <p:nvPr/>
+        </p:nvSpPr>
+        <p:spPr>
+          <a:xfrm>
+            <a:off x="685800" y="6172200"/>
+            <a:ext cx="10789920" cy="347472"/>
+          </a:xfrm>
+          <a:prstGeom prst="rect">
+            <a:avLst/>
+          </a:prstGeom>
+          <a:noFill/>
+        </p:spPr>
+        <p:txBody>
+          <a:bodyPr wrap="square">
+            <a:spAutoFit/>
+          </a:bodyPr>
+          <a:lstStyle/>
+          <a:p>
+            <a:pPr>
+              <a:defRPr sz="1150" b="1">
+                <a:solidFill>
+                  <a:srgbClr val="20E3B2"/>
+                </a:solidFill>
+                <a:latin typeface="Arial"/>
+              </a:defRPr>
+            </a:pPr>
+            <a:r>
+              <a:t>Impartido por Tryolabs • Solución de Referencia: ./labs/lab-03-mcp-and-hooks/apply_solution.sh    |    Slide 12/15</a:t>
+            </a:r>
+          </a:p>
+        </p:txBody>
+      </p:sp>
+    </p:spTree>
+  </p:cSld>
+  <p:clrMapOvr>
+    <a:masterClrMapping/>
+  </p:clrMapOvr>
+</p:sld>
+</file>
+
+<file path=ppt/slides/slide13.xml><?xml version="1.0" encoding="utf-8"?>
+<p:sld xmlns:a="http://schemas.openxmlformats.org/drawingml/2006/main" xmlns:p="http://schemas.openxmlformats.org/presentationml/2006/main" xmlns:r="http://schemas.openxmlformats.org/officeDocument/2006/relationships">
+  <p:cSld>
+    <p:spTree>
+      <p:nvGrpSpPr>
+        <p:cNvPr id="1" name=""/>
+        <p:cNvGrpSpPr/>
+        <p:nvPr/>
+      </p:nvGrpSpPr>
+      <p:grpSpPr/>
+      <p:sp>
+        <p:nvSpPr>
+          <p:cNvPr id="2" name="Rectangle 1"/>
+          <p:cNvSpPr/>
+          <p:nvPr/>
+        </p:nvSpPr>
+        <p:spPr>
+          <a:xfrm>
+            <a:off x="0" y="0"/>
+            <a:ext cx="12191695" cy="6858000"/>
+          </a:xfrm>
+          <a:prstGeom prst="rect">
+            <a:avLst/>
+          </a:prstGeom>
+          <a:solidFill>
+            <a:srgbClr val="0D1117"/>
+          </a:solidFill>
+          <a:ln>
+            <a:noFill/>
+          </a:ln>
+        </p:spPr>
+        <p:style>
+          <a:lnRef idx="1">
+            <a:schemeClr val="accent1"/>
+          </a:lnRef>
+          <a:fillRef idx="3">
+            <a:schemeClr val="accent1"/>
+          </a:fillRef>
+          <a:effectRef idx="2">
+            <a:schemeClr val="accent1"/>
+          </a:effectRef>
+          <a:fontRef idx="minor">
+            <a:schemeClr val="lt1"/>
+          </a:fontRef>
+        </p:style>
+        <p:txBody>
+          <a:bodyPr rtlCol="0" anchor="ctr"/>
+          <a:lstStyle/>
+          <a:p>
+            <a:pPr algn="ctr"/>
+          </a:p>
+        </p:txBody>
+      </p:sp>
+      <p:sp>
+        <p:nvSpPr>
+          <p:cNvPr id="3" name="Rectangle 2"/>
+          <p:cNvSpPr/>
+          <p:nvPr/>
+        </p:nvSpPr>
+        <p:spPr>
+          <a:xfrm>
+            <a:off x="0" y="0"/>
+            <a:ext cx="12191695" cy="73152"/>
+          </a:xfrm>
+          <a:prstGeom prst="rect">
+            <a:avLst/>
+          </a:prstGeom>
+          <a:solidFill>
+            <a:srgbClr val="20E3B2"/>
+          </a:solidFill>
+          <a:ln>
+            <a:noFill/>
+          </a:ln>
+        </p:spPr>
+        <p:style>
+          <a:lnRef idx="1">
+            <a:schemeClr val="accent1"/>
+          </a:lnRef>
+          <a:fillRef idx="3">
+            <a:schemeClr val="accent1"/>
+          </a:fillRef>
+          <a:effectRef idx="2">
+            <a:schemeClr val="accent1"/>
+          </a:effectRef>
+          <a:fontRef idx="minor">
+            <a:schemeClr val="lt1"/>
+          </a:fontRef>
+        </p:style>
+        <p:txBody>
+          <a:bodyPr rtlCol="0" anchor="ctr"/>
+          <a:lstStyle/>
+          <a:p>
+            <a:pPr algn="ctr"/>
+          </a:p>
+        </p:txBody>
+      </p:sp>
+      <p:pic>
+        <p:nvPicPr>
+          <p:cNvPr id="4" name="Picture 3" descr="tryolabs-logo-dark-bg.png"/>
+          <p:cNvPicPr>
+            <a:picLocks noChangeAspect="1"/>
+          </p:cNvPicPr>
+          <p:nvPr/>
+        </p:nvPicPr>
+        <p:blipFill>
+          <a:blip r:embed="rId2"/>
+          <a:stretch>
+            <a:fillRect/>
+          </a:stretch>
+        </p:blipFill>
+        <p:spPr>
+          <a:xfrm>
+            <a:off x="9829800" y="256032"/>
+            <a:ext cx="1874519" cy="417876"/>
+          </a:xfrm>
+          <a:prstGeom prst="rect">
+            <a:avLst/>
+          </a:prstGeom>
+        </p:spPr>
+      </p:pic>
+      <p:sp>
+        <p:nvSpPr>
+          <p:cNvPr id="5" name="TextBox 4"/>
+          <p:cNvSpPr txBox="1"/>
+          <p:nvPr/>
+        </p:nvSpPr>
+        <p:spPr>
+          <a:xfrm>
+            <a:off x="502920" y="256032"/>
+            <a:ext cx="9144000" cy="320040"/>
+          </a:xfrm>
+          <a:prstGeom prst="rect">
+            <a:avLst/>
+          </a:prstGeom>
+          <a:noFill/>
+        </p:spPr>
+        <p:txBody>
+          <a:bodyPr wrap="square">
+            <a:spAutoFit/>
+          </a:bodyPr>
+          <a:lstStyle/>
+          <a:p>
+            <a:pPr>
+              <a:defRPr sz="1050" b="1">
+                <a:solidFill>
+                  <a:srgbClr val="20E3B2"/>
+                </a:solidFill>
+                <a:latin typeface="Arial"/>
+              </a:defRPr>
+            </a:pPr>
+            <a:r>
+              <a:t>MÓDULO TEÓRICO 4 (6 MINUTOS) • SUBAGENTES, GOOGLE ADK, A2A Y TERRAFORM</a:t>
+            </a:r>
+          </a:p>
+        </p:txBody>
+      </p:sp>
+      <p:sp>
+        <p:nvSpPr>
+          <p:cNvPr id="6" name="TextBox 5"/>
+          <p:cNvSpPr txBox="1"/>
+          <p:nvPr/>
+        </p:nvSpPr>
+        <p:spPr>
+          <a:xfrm>
+            <a:off x="502920" y="566928"/>
+            <a:ext cx="9235440" cy="594360"/>
+          </a:xfrm>
+          <a:prstGeom prst="rect">
+            <a:avLst/>
+          </a:prstGeom>
+          <a:noFill/>
+        </p:spPr>
+        <p:txBody>
+          <a:bodyPr wrap="square">
+            <a:spAutoFit/>
+          </a:bodyPr>
+          <a:lstStyle/>
+          <a:p>
+            <a:pPr>
+              <a:defRPr sz="2250" b="1">
+                <a:solidFill>
+                  <a:srgbClr val="F0F6FC"/>
+                </a:solidFill>
+                <a:latin typeface="Arial"/>
+              </a:defRPr>
+            </a:pPr>
+            <a:r>
+              <a:t>Sistemas Multi-Agente con Google ADK, Protocolo A2A y Terraform</a:t>
+            </a:r>
+          </a:p>
+        </p:txBody>
+      </p:sp>
+      <p:sp>
+        <p:nvSpPr>
+          <p:cNvPr id="7" name="TextBox 6"/>
+          <p:cNvSpPr txBox="1"/>
+          <p:nvPr/>
+        </p:nvSpPr>
+        <p:spPr>
+          <a:xfrm>
+            <a:off x="502920" y="1207008"/>
+            <a:ext cx="11155680" cy="411480"/>
+          </a:xfrm>
+          <a:prstGeom prst="rect">
+            <a:avLst/>
+          </a:prstGeom>
+          <a:noFill/>
+        </p:spPr>
+        <p:txBody>
+          <a:bodyPr wrap="square">
+            <a:spAutoFit/>
+          </a:bodyPr>
+          <a:lstStyle/>
+          <a:p>
+            <a:pPr>
+              <a:defRPr sz="1300">
+                <a:solidFill>
+                  <a:srgbClr val="8B949E"/>
+                </a:solidFill>
+                <a:latin typeface="Arial"/>
+              </a:defRPr>
+            </a:pPr>
+            <a:r>
+              <a:t>Diseñando arquitecturas multi-agente localmente con `adk web` y desplegando a Cloud Run y Gemini Enterprise</a:t>
+            </a:r>
+          </a:p>
+        </p:txBody>
+      </p:sp>
+      <p:pic>
+        <p:nvPicPr>
+          <p:cNvPr id="8" name="Picture 7" descr="adk_a2a_cloud_es.png"/>
+          <p:cNvPicPr>
+            <a:picLocks noChangeAspect="1"/>
+          </p:cNvPicPr>
+          <p:nvPr/>
+        </p:nvPicPr>
+        <p:blipFill>
+          <a:blip r:embed="rId3"/>
+          <a:stretch>
+            <a:fillRect/>
+          </a:stretch>
+        </p:blipFill>
+        <p:spPr>
+          <a:xfrm>
+            <a:off x="502920" y="1755648"/>
+            <a:ext cx="5623560" cy="3186684"/>
+          </a:xfrm>
+          <a:prstGeom prst="rect">
+            <a:avLst/>
+          </a:prstGeom>
+        </p:spPr>
+      </p:pic>
+      <p:sp>
+        <p:nvSpPr>
+          <p:cNvPr id="9" name="Rounded Rectangle 8"/>
+          <p:cNvSpPr/>
+          <p:nvPr/>
+        </p:nvSpPr>
+        <p:spPr>
+          <a:xfrm>
+            <a:off x="6309360" y="1755648"/>
+            <a:ext cx="5376672" cy="4160520"/>
+          </a:xfrm>
+          <a:prstGeom prst="roundRect">
+            <a:avLst/>
+          </a:prstGeom>
+          <a:solidFill>
+            <a:srgbClr val="161B22"/>
+          </a:solidFill>
+          <a:ln w="19050">
+            <a:solidFill>
+              <a:srgbClr val="30363D"/>
+            </a:solidFill>
+          </a:ln>
+        </p:spPr>
+        <p:style>
+          <a:lnRef idx="1">
+            <a:schemeClr val="accent1"/>
+          </a:lnRef>
+          <a:fillRef idx="3">
+            <a:schemeClr val="accent1"/>
+          </a:fillRef>
+          <a:effectRef idx="2">
+            <a:schemeClr val="accent1"/>
+          </a:effectRef>
+          <a:fontRef idx="minor">
+            <a:schemeClr val="lt1"/>
+          </a:fontRef>
+        </p:style>
+        <p:txBody>
+          <a:bodyPr rtlCol="0" anchor="ctr"/>
+          <a:lstStyle/>
+          <a:p>
+            <a:pPr algn="ctr"/>
+          </a:p>
+        </p:txBody>
+      </p:sp>
+      <p:sp>
+        <p:nvSpPr>
+          <p:cNvPr id="10" name="Rectangle 9"/>
+          <p:cNvSpPr/>
+          <p:nvPr/>
+        </p:nvSpPr>
+        <p:spPr>
+          <a:xfrm>
+            <a:off x="6309360" y="1755648"/>
+            <a:ext cx="5376672" cy="64008"/>
+          </a:xfrm>
+          <a:prstGeom prst="rect">
+            <a:avLst/>
+          </a:prstGeom>
+          <a:solidFill>
+            <a:srgbClr val="20E3B2"/>
+          </a:solidFill>
+          <a:ln>
+            <a:noFill/>
+          </a:ln>
+        </p:spPr>
+        <p:style>
+          <a:lnRef idx="1">
+            <a:schemeClr val="accent1"/>
+          </a:lnRef>
+          <a:fillRef idx="3">
+            <a:schemeClr val="accent1"/>
+          </a:fillRef>
+          <a:effectRef idx="2">
+            <a:schemeClr val="accent1"/>
+          </a:effectRef>
+          <a:fontRef idx="minor">
+            <a:schemeClr val="lt1"/>
+          </a:fontRef>
+        </p:style>
+        <p:txBody>
+          <a:bodyPr rtlCol="0" anchor="ctr"/>
+          <a:lstStyle/>
+          <a:p>
+            <a:pPr algn="ctr"/>
+          </a:p>
+        </p:txBody>
+      </p:sp>
+      <p:sp>
+        <p:nvSpPr>
+          <p:cNvPr id="11" name="TextBox 10"/>
+          <p:cNvSpPr txBox="1"/>
+          <p:nvPr/>
+        </p:nvSpPr>
+        <p:spPr>
+          <a:xfrm>
+            <a:off x="6510528" y="1901952"/>
+            <a:ext cx="4974336" cy="3922776"/>
+          </a:xfrm>
+          <a:prstGeom prst="rect">
+            <a:avLst/>
+          </a:prstGeom>
+          <a:noFill/>
+        </p:spPr>
+        <p:txBody>
+          <a:bodyPr wrap="square">
+            <a:spAutoFit/>
+          </a:bodyPr>
+          <a:lstStyle/>
+          <a:p>
+            <a:pPr>
+              <a:spcAft>
+                <a:spcPts val="800"/>
+              </a:spcAft>
+              <a:defRPr sz="1500" b="1">
+                <a:solidFill>
+                  <a:srgbClr val="20E3B2"/>
+                </a:solidFill>
+                <a:latin typeface="Arial"/>
+              </a:defRPr>
+            </a:pPr>
+            <a:r>
+              <a:t>Arquitectura Multi-Agente de Punta a Punta</a:t>
+            </a:r>
+          </a:p>
+          <a:p>
+            <a:pPr>
+              <a:spcAft>
+                <a:spcPts val="650"/>
+              </a:spcAft>
+              <a:defRPr sz="1130">
+                <a:solidFill>
+                  <a:srgbClr val="F0F6FC"/>
+                </a:solidFill>
+                <a:latin typeface="Arial"/>
+              </a:defRPr>
+            </a:pPr>
+            <a:r>
+              <a:t>▸  Subagentes de Antigravity (/teamwork, /boost, /grill-me): Delega tareas paralelas de investigación y programación dentro de Antigravity</a:t>
+            </a:r>
+          </a:p>
+          <a:p>
+            <a:pPr>
+              <a:spcAft>
+                <a:spcPts val="650"/>
+              </a:spcAft>
+              <a:defRPr sz="1130">
+                <a:solidFill>
+                  <a:srgbClr val="F0F6FC"/>
+                </a:solidFill>
+                <a:latin typeface="Arial"/>
+              </a:defRPr>
+            </a:pPr>
+            <a:r>
+              <a:t>▸  Google ADK (Agent Development Kit): Construye jerarquías multi-agente de dominio (`root_agent` coordinando agentes especialistas Técnico y Comercial con herramientas tipadas)</a:t>
+            </a:r>
+          </a:p>
+          <a:p>
+            <a:pPr>
+              <a:spcAft>
+                <a:spcPts val="650"/>
+              </a:spcAft>
+              <a:defRPr sz="1130">
+                <a:solidFill>
+                  <a:srgbClr val="F0F6FC"/>
+                </a:solidFill>
+                <a:latin typeface="Arial"/>
+              </a:defRPr>
+            </a:pPr>
+            <a:r>
+              <a:t>▸  Pruebas Locales con ADK Dev UI (`adk web`): Ejecuta `./scripts/run_adk_web.sh` (http://localhost:8080) para inspeccionar trazas de eventos multi-agente, llamadas a herramientas y estado</a:t>
+            </a:r>
+          </a:p>
+          <a:p>
+            <a:pPr>
+              <a:spcAft>
+                <a:spcPts val="650"/>
+              </a:spcAft>
+              <a:defRPr sz="1130">
+                <a:solidFill>
+                  <a:srgbClr val="F0F6FC"/>
+                </a:solidFill>
+                <a:latin typeface="Arial"/>
+              </a:defRPr>
+            </a:pPr>
+            <a:r>
+              <a:t>▸  Protocolo A2A (Agent2Agent): Publica `GET /.well-known/agent.json` (Agent Card) y `POST /api/v1/a2a` (JSON-RPC 2.0 `tasks/send`) para interoperabilidad entre agentes</a:t>
+            </a:r>
+          </a:p>
+          <a:p>
+            <a:pPr>
+              <a:spcAft>
+                <a:spcPts val="650"/>
+              </a:spcAft>
+              <a:defRPr sz="1130">
+                <a:solidFill>
+                  <a:srgbClr val="F0F6FC"/>
+                </a:solidFill>
+                <a:latin typeface="Arial"/>
+              </a:defRPr>
+            </a:pPr>
+            <a:r>
+              <a:t>▸  Terraform + Gemini Enterprise: Aprovisiona Cloud Run v2 e IAM vía `infra/terraform/` (`deploy_gcp.sh`) y registra tu agente A2A en Gemini Enterprise (`register_gemini_enterprise_agent.sh`)</a:t>
+            </a:r>
+          </a:p>
+        </p:txBody>
+      </p:sp>
+      <p:sp>
+        <p:nvSpPr>
+          <p:cNvPr id="12" name="Rectangle 11"/>
+          <p:cNvSpPr/>
+          <p:nvPr/>
+        </p:nvSpPr>
+        <p:spPr>
+          <a:xfrm>
+            <a:off x="502920" y="6108192"/>
+            <a:ext cx="11183112" cy="475488"/>
+          </a:xfrm>
+          <a:prstGeom prst="rect">
+            <a:avLst/>
+          </a:prstGeom>
+          <a:solidFill>
+            <a:srgbClr val="161B22"/>
+          </a:solidFill>
+          <a:ln w="12700">
+            <a:solidFill>
+              <a:srgbClr val="30363D"/>
+            </a:solidFill>
+          </a:ln>
+        </p:spPr>
+        <p:style>
+          <a:lnRef idx="1">
+            <a:schemeClr val="accent1"/>
+          </a:lnRef>
+          <a:fillRef idx="3">
+            <a:schemeClr val="accent1"/>
+          </a:fillRef>
+          <a:effectRef idx="2">
+            <a:schemeClr val="accent1"/>
+          </a:effectRef>
+          <a:fontRef idx="minor">
+            <a:schemeClr val="lt1"/>
+          </a:fontRef>
+        </p:style>
+        <p:txBody>
+          <a:bodyPr rtlCol="0" anchor="ctr"/>
+          <a:lstStyle/>
+          <a:p>
+            <a:pPr algn="ctr"/>
+          </a:p>
+        </p:txBody>
+      </p:sp>
+      <p:sp>
+        <p:nvSpPr>
+          <p:cNvPr id="13" name="TextBox 12"/>
+          <p:cNvSpPr txBox="1"/>
+          <p:nvPr/>
+        </p:nvSpPr>
+        <p:spPr>
+          <a:xfrm>
+            <a:off x="685800" y="6172200"/>
+            <a:ext cx="10789920" cy="347472"/>
+          </a:xfrm>
+          <a:prstGeom prst="rect">
+            <a:avLst/>
+          </a:prstGeom>
+          <a:noFill/>
+        </p:spPr>
+        <p:txBody>
+          <a:bodyPr wrap="square">
+            <a:spAutoFit/>
+          </a:bodyPr>
+          <a:lstStyle/>
+          <a:p>
+            <a:pPr>
+              <a:defRPr sz="1150" b="1">
+                <a:solidFill>
+                  <a:srgbClr val="20E3B2"/>
+                </a:solidFill>
+                <a:latin typeface="Arial"/>
+              </a:defRPr>
+            </a:pPr>
+            <a:r>
+              <a:t>¡Desarrolla y prueba 100% localmente con `adk web` + `pytest`, y despliega a Google Cloud y Gemini Enterprise con Terraform!    |    Slide 13/15</a:t>
+            </a:r>
+          </a:p>
+        </p:txBody>
+      </p:sp>
+    </p:spTree>
+  </p:cSld>
+  <p:clrMapOvr>
+    <a:masterClrMapping/>
+  </p:clrMapOvr>
+</p:sld>
+</file>
+
+<file path=ppt/slides/slide14.xml><?xml version="1.0" encoding="utf-8"?>
+<p:sld xmlns:a="http://schemas.openxmlformats.org/drawingml/2006/main" xmlns:p="http://schemas.openxmlformats.org/presentationml/2006/main" xmlns:r="http://schemas.openxmlformats.org/officeDocument/2006/relationships">
+  <p:cSld>
+    <p:spTree>
+      <p:nvGrpSpPr>
+        <p:cNvPr id="1" name=""/>
+        <p:cNvGrpSpPr/>
+        <p:nvPr/>
+      </p:nvGrpSpPr>
+      <p:grpSpPr/>
+      <p:sp>
+        <p:nvSpPr>
+          <p:cNvPr id="2" name="Rectangle 1"/>
+          <p:cNvSpPr/>
+          <p:nvPr/>
+        </p:nvSpPr>
+        <p:spPr>
+          <a:xfrm>
+            <a:off x="0" y="0"/>
+            <a:ext cx="12191695" cy="6858000"/>
+          </a:xfrm>
+          <a:prstGeom prst="rect">
+            <a:avLst/>
+          </a:prstGeom>
+          <a:solidFill>
+            <a:srgbClr val="0D1117"/>
+          </a:solidFill>
+          <a:ln>
+            <a:noFill/>
+          </a:ln>
+        </p:spPr>
+        <p:style>
+          <a:lnRef idx="1">
+            <a:schemeClr val="accent1"/>
+          </a:lnRef>
+          <a:fillRef idx="3">
+            <a:schemeClr val="accent1"/>
+          </a:fillRef>
+          <a:effectRef idx="2">
+            <a:schemeClr val="accent1"/>
+          </a:effectRef>
+          <a:fontRef idx="minor">
+            <a:schemeClr val="lt1"/>
+          </a:fontRef>
+        </p:style>
+        <p:txBody>
+          <a:bodyPr rtlCol="0" anchor="ctr"/>
+          <a:lstStyle/>
+          <a:p>
+            <a:pPr algn="ctr"/>
+          </a:p>
+        </p:txBody>
+      </p:sp>
+      <p:sp>
+        <p:nvSpPr>
+          <p:cNvPr id="3" name="Rectangle 2"/>
+          <p:cNvSpPr/>
+          <p:nvPr/>
+        </p:nvSpPr>
+        <p:spPr>
+          <a:xfrm>
+            <a:off x="0" y="0"/>
+            <a:ext cx="12191695" cy="73152"/>
+          </a:xfrm>
+          <a:prstGeom prst="rect">
+            <a:avLst/>
+          </a:prstGeom>
+          <a:solidFill>
+            <a:srgbClr val="20E3B2"/>
+          </a:solidFill>
+          <a:ln>
+            <a:noFill/>
+          </a:ln>
+        </p:spPr>
+        <p:style>
+          <a:lnRef idx="1">
+            <a:schemeClr val="accent1"/>
+          </a:lnRef>
+          <a:fillRef idx="3">
+            <a:schemeClr val="accent1"/>
+          </a:fillRef>
+          <a:effectRef idx="2">
+            <a:schemeClr val="accent1"/>
+          </a:effectRef>
+          <a:fontRef idx="minor">
+            <a:schemeClr val="lt1"/>
+          </a:fontRef>
+        </p:style>
+        <p:txBody>
+          <a:bodyPr rtlCol="0" anchor="ctr"/>
+          <a:lstStyle/>
+          <a:p>
+            <a:pPr algn="ctr"/>
+          </a:p>
+        </p:txBody>
+      </p:sp>
+      <p:pic>
+        <p:nvPicPr>
+          <p:cNvPr id="4" name="Picture 3" descr="tryolabs-logo-dark-bg.png"/>
+          <p:cNvPicPr>
+            <a:picLocks noChangeAspect="1"/>
+          </p:cNvPicPr>
+          <p:nvPr/>
+        </p:nvPicPr>
+        <p:blipFill>
+          <a:blip r:embed="rId2"/>
+          <a:stretch>
+            <a:fillRect/>
+          </a:stretch>
+        </p:blipFill>
+        <p:spPr>
+          <a:xfrm>
+            <a:off x="9829800" y="256032"/>
+            <a:ext cx="1874519" cy="417876"/>
+          </a:xfrm>
+          <a:prstGeom prst="rect">
+            <a:avLst/>
+          </a:prstGeom>
+        </p:spPr>
+      </p:pic>
+      <p:sp>
+        <p:nvSpPr>
+          <p:cNvPr id="5" name="TextBox 4"/>
+          <p:cNvSpPr txBox="1"/>
+          <p:nvPr/>
+        </p:nvSpPr>
+        <p:spPr>
+          <a:xfrm>
+            <a:off x="502920" y="256032"/>
+            <a:ext cx="9144000" cy="320040"/>
+          </a:xfrm>
+          <a:prstGeom prst="rect">
+            <a:avLst/>
+          </a:prstGeom>
+          <a:noFill/>
+        </p:spPr>
+        <p:txBody>
+          <a:bodyPr wrap="square">
+            <a:spAutoFit/>
+          </a:bodyPr>
+          <a:lstStyle/>
+          <a:p>
+            <a:pPr>
+              <a:defRPr sz="1050" b="1">
+                <a:solidFill>
+                  <a:srgbClr val="20E3B2"/>
+                </a:solidFill>
+                <a:latin typeface="Arial"/>
+              </a:defRPr>
+            </a:pPr>
+            <a:r>
+              <a:t>LABORATORIO PRÁCTICO 4 CAPSTONE (PARTE 1/2) • OBJETIVOS Y QUÉ CONSTRUIRÁS</a:t>
+            </a:r>
+          </a:p>
+        </p:txBody>
+      </p:sp>
+      <p:sp>
+        <p:nvSpPr>
+          <p:cNvPr id="6" name="TextBox 5"/>
+          <p:cNvSpPr txBox="1"/>
+          <p:nvPr/>
+        </p:nvSpPr>
+        <p:spPr>
+          <a:xfrm>
+            <a:off x="502920" y="566928"/>
+            <a:ext cx="9235440" cy="594360"/>
+          </a:xfrm>
+          <a:prstGeom prst="rect">
+            <a:avLst/>
+          </a:prstGeom>
+          <a:noFill/>
+        </p:spPr>
+        <p:txBody>
+          <a:bodyPr wrap="square">
+            <a:spAutoFit/>
+          </a:bodyPr>
+          <a:lstStyle/>
+          <a:p>
+            <a:pPr>
+              <a:defRPr sz="2250" b="1">
+                <a:solidFill>
+                  <a:srgbClr val="F0F6FC"/>
+                </a:solidFill>
+                <a:latin typeface="Arial"/>
+              </a:defRPr>
+            </a:pPr>
+            <a:r>
+              <a:t>Lab 4 Capstone: Sistemas Multi-Agente ADK, A2A y Terraform — Objetivos</a:t>
+            </a:r>
+          </a:p>
+        </p:txBody>
+      </p:sp>
+      <p:sp>
+        <p:nvSpPr>
+          <p:cNvPr id="7" name="TextBox 6"/>
+          <p:cNvSpPr txBox="1"/>
+          <p:nvPr/>
+        </p:nvSpPr>
+        <p:spPr>
+          <a:xfrm>
+            <a:off x="502920" y="1207008"/>
+            <a:ext cx="11155680" cy="411480"/>
+          </a:xfrm>
+          <a:prstGeom prst="rect">
+            <a:avLst/>
+          </a:prstGeom>
+          <a:noFill/>
+        </p:spPr>
+        <p:txBody>
+          <a:bodyPr wrap="square">
+            <a:spAutoFit/>
+          </a:bodyPr>
+          <a:lstStyle/>
+          <a:p>
+            <a:pPr>
+              <a:defRPr sz="1300">
+                <a:solidFill>
+                  <a:srgbClr val="8B949E"/>
+                </a:solidFill>
+                <a:latin typeface="Arial"/>
+              </a:defRPr>
+            </a:pPr>
+            <a:r>
+              <a:t>55 Minutos • Guía PDF Imprimible: labs/lab-04-multi-agent-capstone/LAB_04_INSTRUCTIONS_ES.pdf</a:t>
+            </a:r>
+          </a:p>
+        </p:txBody>
+      </p:sp>
+      <p:pic>
+        <p:nvPicPr>
+          <p:cNvPr id="8" name="Picture 7" descr="adk_a2a_cloud_es.png"/>
+          <p:cNvPicPr>
+            <a:picLocks noChangeAspect="1"/>
+          </p:cNvPicPr>
+          <p:nvPr/>
+        </p:nvPicPr>
+        <p:blipFill>
+          <a:blip r:embed="rId3"/>
+          <a:stretch>
+            <a:fillRect/>
+          </a:stretch>
+        </p:blipFill>
+        <p:spPr>
+          <a:xfrm>
+            <a:off x="502920" y="1755648"/>
+            <a:ext cx="5623560" cy="3186684"/>
+          </a:xfrm>
+          <a:prstGeom prst="rect">
+            <a:avLst/>
+          </a:prstGeom>
+        </p:spPr>
+      </p:pic>
+      <p:sp>
+        <p:nvSpPr>
+          <p:cNvPr id="9" name="Rounded Rectangle 8"/>
+          <p:cNvSpPr/>
+          <p:nvPr/>
+        </p:nvSpPr>
+        <p:spPr>
+          <a:xfrm>
+            <a:off x="6309360" y="1755648"/>
+            <a:ext cx="5376672" cy="4160520"/>
+          </a:xfrm>
+          <a:prstGeom prst="roundRect">
+            <a:avLst/>
+          </a:prstGeom>
+          <a:solidFill>
+            <a:srgbClr val="161B22"/>
+          </a:solidFill>
+          <a:ln w="19050">
+            <a:solidFill>
+              <a:srgbClr val="30363D"/>
+            </a:solidFill>
+          </a:ln>
+        </p:spPr>
+        <p:style>
+          <a:lnRef idx="1">
+            <a:schemeClr val="accent1"/>
+          </a:lnRef>
+          <a:fillRef idx="3">
+            <a:schemeClr val="accent1"/>
+          </a:fillRef>
+          <a:effectRef idx="2">
+            <a:schemeClr val="accent1"/>
+          </a:effectRef>
+          <a:fontRef idx="minor">
+            <a:schemeClr val="lt1"/>
+          </a:fontRef>
+        </p:style>
+        <p:txBody>
+          <a:bodyPr rtlCol="0" anchor="ctr"/>
+          <a:lstStyle/>
+          <a:p>
+            <a:pPr algn="ctr"/>
+          </a:p>
+        </p:txBody>
+      </p:sp>
+      <p:sp>
+        <p:nvSpPr>
+          <p:cNvPr id="10" name="Rectangle 9"/>
+          <p:cNvSpPr/>
+          <p:nvPr/>
+        </p:nvSpPr>
+        <p:spPr>
+          <a:xfrm>
+            <a:off x="6309360" y="1755648"/>
+            <a:ext cx="5376672" cy="64008"/>
+          </a:xfrm>
+          <a:prstGeom prst="rect">
+            <a:avLst/>
+          </a:prstGeom>
+          <a:solidFill>
+            <a:srgbClr val="20E3B2"/>
+          </a:solidFill>
+          <a:ln>
+            <a:noFill/>
+          </a:ln>
+        </p:spPr>
+        <p:style>
+          <a:lnRef idx="1">
+            <a:schemeClr val="accent1"/>
+          </a:lnRef>
+          <a:fillRef idx="3">
+            <a:schemeClr val="accent1"/>
+          </a:fillRef>
+          <a:effectRef idx="2">
+            <a:schemeClr val="accent1"/>
+          </a:effectRef>
+          <a:fontRef idx="minor">
+            <a:schemeClr val="lt1"/>
+          </a:fontRef>
+        </p:style>
+        <p:txBody>
+          <a:bodyPr rtlCol="0" anchor="ctr"/>
+          <a:lstStyle/>
+          <a:p>
+            <a:pPr algn="ctr"/>
+          </a:p>
+        </p:txBody>
+      </p:sp>
+      <p:sp>
+        <p:nvSpPr>
+          <p:cNvPr id="11" name="TextBox 10"/>
+          <p:cNvSpPr txBox="1"/>
+          <p:nvPr/>
+        </p:nvSpPr>
+        <p:spPr>
+          <a:xfrm>
+            <a:off x="6510528" y="1901952"/>
+            <a:ext cx="4974336" cy="3922776"/>
+          </a:xfrm>
+          <a:prstGeom prst="rect">
+            <a:avLst/>
+          </a:prstGeom>
+          <a:noFill/>
+        </p:spPr>
+        <p:txBody>
+          <a:bodyPr wrap="square">
+            <a:spAutoFit/>
+          </a:bodyPr>
+          <a:lstStyle/>
+          <a:p>
+            <a:pPr>
+              <a:spcAft>
+                <a:spcPts val="800"/>
+              </a:spcAft>
+              <a:defRPr sz="1500" b="1">
+                <a:solidFill>
+                  <a:srgbClr val="20E3B2"/>
+                </a:solidFill>
+                <a:latin typeface="Arial"/>
+              </a:defRPr>
+            </a:pPr>
+            <a:r>
+              <a:t>Objetivos del Lab 4 y Qué Construirás</a:t>
+            </a:r>
+          </a:p>
+          <a:p>
+            <a:pPr>
+              <a:spcAft>
+                <a:spcPts val="650"/>
+              </a:spcAft>
+              <a:defRPr sz="1130">
+                <a:solidFill>
+                  <a:srgbClr val="F0F6FC"/>
+                </a:solidFill>
+                <a:latin typeface="Arial"/>
+              </a:defRPr>
+            </a:pPr>
+            <a:r>
+              <a:t>▸  Objetivo 1 (Diseño Multi-Agente con Google ADK y A2A): Construir una jerarquía coordinador + especialistas usando Google ADK (`LlmAgent`) y exponerla mediante el protocolo A2A JSON-RPC 2.0.</a:t>
+            </a:r>
+          </a:p>
+          <a:p>
+            <a:pPr>
+              <a:spcAft>
+                <a:spcPts val="650"/>
+              </a:spcAft>
+              <a:defRPr sz="1130">
+                <a:solidFill>
+                  <a:srgbClr val="F0F6FC"/>
+                </a:solidFill>
+                <a:latin typeface="Arial"/>
+              </a:defRPr>
+            </a:pPr>
+            <a:r>
+              <a:t>▸  Objetivo 2 (Prueba Local en `adk web` y Despliegue Cloud con Terraform): Probar trazas multi-agente en `adk web` (`http://localhost:8080`) y aprovisionar Cloud Run + Gemini Enterprise vía Terraform.</a:t>
+            </a:r>
+          </a:p>
+          <a:p>
+            <a:pPr>
+              <a:spcAft>
+                <a:spcPts val="650"/>
+              </a:spcAft>
+              <a:defRPr sz="1130">
+                <a:solidFill>
+                  <a:srgbClr val="F0F6FC"/>
+                </a:solidFill>
+                <a:latin typeface="Arial"/>
+              </a:defRPr>
+            </a:pPr>
+            <a:r>
+              <a:t>▸  Qué Construirás #1 (`src/services/order_feasibility.py`): Evaluador de factibilidad TMF622 (`PRB &lt; 80%`) y motor autónomo de balanceo hacia celdas vecinas (`remediate_slice_for_order`).</a:t>
+            </a:r>
+          </a:p>
+          <a:p>
+            <a:pPr>
+              <a:spcAft>
+                <a:spcPts val="650"/>
+              </a:spcAft>
+              <a:defRPr sz="1130">
+                <a:solidFill>
+                  <a:srgbClr val="F0F6FC"/>
+                </a:solidFill>
+                <a:latin typeface="Arial"/>
+              </a:defRPr>
+            </a:pPr>
+            <a:r>
+              <a:t>▸  Qué Construirás #2 (`src/agents/adk_a2a_orchestrator.py` y `adk_agents/telecom_nexus/`): `RANSliceCapacityAgent` + `BSSCommercialSLAAgent` coordinados por `TelecomNexusOrchestratorAgent`, más `GET /.well-known/agent.json` y `POST /api/v1/a2a`.</a:t>
+            </a:r>
+          </a:p>
+          <a:p>
+            <a:pPr>
+              <a:spcAft>
+                <a:spcPts val="650"/>
+              </a:spcAft>
+              <a:defRPr sz="1130">
+                <a:solidFill>
+                  <a:srgbClr val="F0F6FC"/>
+                </a:solidFill>
+                <a:latin typeface="Arial"/>
+              </a:defRPr>
+            </a:pPr>
+            <a:r>
+              <a:t>▸  Qué Construirás #3 (Infraestructura Cloud): Validar `infra/terraform/main.tf` y el registro en Gemini Enterprise con `./labs/lab-04-multi-agent-capstone/deploy_gcp.sh --dry-run`.</a:t>
+            </a:r>
+          </a:p>
+        </p:txBody>
+      </p:sp>
+      <p:sp>
+        <p:nvSpPr>
+          <p:cNvPr id="12" name="Rectangle 11"/>
+          <p:cNvSpPr/>
+          <p:nvPr/>
+        </p:nvSpPr>
+        <p:spPr>
+          <a:xfrm>
+            <a:off x="502920" y="6108192"/>
+            <a:ext cx="11183112" cy="475488"/>
+          </a:xfrm>
+          <a:prstGeom prst="rect">
+            <a:avLst/>
+          </a:prstGeom>
+          <a:solidFill>
+            <a:srgbClr val="161B22"/>
+          </a:solidFill>
+          <a:ln w="12700">
+            <a:solidFill>
+              <a:srgbClr val="30363D"/>
+            </a:solidFill>
+          </a:ln>
+        </p:spPr>
+        <p:style>
+          <a:lnRef idx="1">
+            <a:schemeClr val="accent1"/>
+          </a:lnRef>
+          <a:fillRef idx="3">
+            <a:schemeClr val="accent1"/>
+          </a:fillRef>
+          <a:effectRef idx="2">
+            <a:schemeClr val="accent1"/>
+          </a:effectRef>
+          <a:fontRef idx="minor">
+            <a:schemeClr val="lt1"/>
+          </a:fontRef>
+        </p:style>
+        <p:txBody>
+          <a:bodyPr rtlCol="0" anchor="ctr"/>
+          <a:lstStyle/>
+          <a:p>
+            <a:pPr algn="ctr"/>
+          </a:p>
+        </p:txBody>
+      </p:sp>
+      <p:sp>
+        <p:nvSpPr>
+          <p:cNvPr id="13" name="TextBox 12"/>
+          <p:cNvSpPr txBox="1"/>
+          <p:nvPr/>
+        </p:nvSpPr>
+        <p:spPr>
+          <a:xfrm>
+            <a:off x="685800" y="6172200"/>
+            <a:ext cx="10789920" cy="347472"/>
+          </a:xfrm>
+          <a:prstGeom prst="rect">
+            <a:avLst/>
+          </a:prstGeom>
+          <a:noFill/>
+        </p:spPr>
+        <p:txBody>
+          <a:bodyPr wrap="square">
+            <a:spAutoFit/>
+          </a:bodyPr>
+          <a:lstStyle/>
+          <a:p>
+            <a:pPr>
+              <a:defRPr sz="1150" b="1">
+                <a:solidFill>
+                  <a:srgbClr val="20E3B2"/>
+                </a:solidFill>
+                <a:latin typeface="Arial"/>
+              </a:defRPr>
+            </a:pPr>
+            <a:r>
+              <a:t>Impartido por Tryolabs • Guía imprimible completa: LAB_04_INSTRUCTIONS_ES.pdf    |    Slide 14/15</a:t>
+            </a:r>
+          </a:p>
+        </p:txBody>
+      </p:sp>
+    </p:spTree>
+  </p:cSld>
+  <p:clrMapOvr>
+    <a:masterClrMapping/>
+  </p:clrMapOvr>
+</p:sld>
+</file>
+
+<file path=ppt/slides/slide15.xml><?xml version="1.0" encoding="utf-8"?>
+<p:sld xmlns:a="http://schemas.openxmlformats.org/drawingml/2006/main" xmlns:p="http://schemas.openxmlformats.org/presentationml/2006/main" xmlns:r="http://schemas.openxmlformats.org/officeDocument/2006/relationships">
+  <p:cSld>
+    <p:spTree>
+      <p:nvGrpSpPr>
+        <p:cNvPr id="1" name=""/>
+        <p:cNvGrpSpPr/>
+        <p:nvPr/>
+      </p:nvGrpSpPr>
+      <p:grpSpPr/>
+      <p:sp>
+        <p:nvSpPr>
+          <p:cNvPr id="2" name="Rectangle 1"/>
+          <p:cNvSpPr/>
+          <p:nvPr/>
+        </p:nvSpPr>
+        <p:spPr>
+          <a:xfrm>
+            <a:off x="0" y="0"/>
+            <a:ext cx="12191695" cy="6858000"/>
+          </a:xfrm>
+          <a:prstGeom prst="rect">
+            <a:avLst/>
+          </a:prstGeom>
+          <a:solidFill>
+            <a:srgbClr val="0D1117"/>
+          </a:solidFill>
+          <a:ln>
+            <a:noFill/>
+          </a:ln>
+        </p:spPr>
+        <p:style>
+          <a:lnRef idx="1">
+            <a:schemeClr val="accent1"/>
+          </a:lnRef>
+          <a:fillRef idx="3">
+            <a:schemeClr val="accent1"/>
+          </a:fillRef>
+          <a:effectRef idx="2">
+            <a:schemeClr val="accent1"/>
+          </a:effectRef>
+          <a:fontRef idx="minor">
+            <a:schemeClr val="lt1"/>
+          </a:fontRef>
+        </p:style>
+        <p:txBody>
+          <a:bodyPr rtlCol="0" anchor="ctr"/>
+          <a:lstStyle/>
+          <a:p>
+            <a:pPr algn="ctr"/>
+          </a:p>
+        </p:txBody>
+      </p:sp>
+      <p:sp>
+        <p:nvSpPr>
+          <p:cNvPr id="3" name="Rectangle 2"/>
+          <p:cNvSpPr/>
+          <p:nvPr/>
+        </p:nvSpPr>
+        <p:spPr>
+          <a:xfrm>
+            <a:off x="0" y="0"/>
+            <a:ext cx="12191695" cy="73152"/>
+          </a:xfrm>
+          <a:prstGeom prst="rect">
+            <a:avLst/>
+          </a:prstGeom>
+          <a:solidFill>
+            <a:srgbClr val="20E3B2"/>
+          </a:solidFill>
+          <a:ln>
+            <a:noFill/>
+          </a:ln>
+        </p:spPr>
+        <p:style>
+          <a:lnRef idx="1">
+            <a:schemeClr val="accent1"/>
+          </a:lnRef>
+          <a:fillRef idx="3">
+            <a:schemeClr val="accent1"/>
+          </a:fillRef>
+          <a:effectRef idx="2">
+            <a:schemeClr val="accent1"/>
+          </a:effectRef>
+          <a:fontRef idx="minor">
+            <a:schemeClr val="lt1"/>
+          </a:fontRef>
+        </p:style>
+        <p:txBody>
+          <a:bodyPr rtlCol="0" anchor="ctr"/>
+          <a:lstStyle/>
+          <a:p>
+            <a:pPr algn="ctr"/>
+          </a:p>
+        </p:txBody>
+      </p:sp>
+      <p:pic>
+        <p:nvPicPr>
+          <p:cNvPr id="4" name="Picture 3" descr="tryolabs-logo-dark-bg.png"/>
+          <p:cNvPicPr>
+            <a:picLocks noChangeAspect="1"/>
+          </p:cNvPicPr>
+          <p:nvPr/>
+        </p:nvPicPr>
+        <p:blipFill>
+          <a:blip r:embed="rId2"/>
+          <a:stretch>
+            <a:fillRect/>
+          </a:stretch>
+        </p:blipFill>
+        <p:spPr>
+          <a:xfrm>
+            <a:off x="9829800" y="256032"/>
+            <a:ext cx="1874519" cy="417876"/>
+          </a:xfrm>
+          <a:prstGeom prst="rect">
+            <a:avLst/>
+          </a:prstGeom>
+        </p:spPr>
+      </p:pic>
+      <p:sp>
+        <p:nvSpPr>
+          <p:cNvPr id="5" name="TextBox 4"/>
+          <p:cNvSpPr txBox="1"/>
+          <p:nvPr/>
+        </p:nvSpPr>
+        <p:spPr>
+          <a:xfrm>
+            <a:off x="502920" y="256032"/>
+            <a:ext cx="9144000" cy="320040"/>
+          </a:xfrm>
+          <a:prstGeom prst="rect">
+            <a:avLst/>
+          </a:prstGeom>
+          <a:noFill/>
+        </p:spPr>
+        <p:txBody>
+          <a:bodyPr wrap="square">
+            <a:spAutoFit/>
+          </a:bodyPr>
+          <a:lstStyle/>
+          <a:p>
+            <a:pPr>
+              <a:defRPr sz="1050" b="1">
+                <a:solidFill>
+                  <a:srgbClr val="20E3B2"/>
+                </a:solidFill>
+                <a:latin typeface="Arial"/>
+              </a:defRPr>
+            </a:pPr>
+            <a:r>
+              <a:t>LABORATORIO PRÁCTICO 4 CAPSTONE (PARTE 2/2) • INSTRUCCIONES PASO A PASO Y PROMPTS</a:t>
+            </a:r>
+          </a:p>
+        </p:txBody>
+      </p:sp>
+      <p:sp>
+        <p:nvSpPr>
+          <p:cNvPr id="6" name="TextBox 5"/>
+          <p:cNvSpPr txBox="1"/>
+          <p:nvPr/>
+        </p:nvSpPr>
+        <p:spPr>
+          <a:xfrm>
+            <a:off x="502920" y="566928"/>
+            <a:ext cx="9235440" cy="594360"/>
+          </a:xfrm>
+          <a:prstGeom prst="rect">
+            <a:avLst/>
+          </a:prstGeom>
+          <a:noFill/>
+        </p:spPr>
+        <p:txBody>
+          <a:bodyPr wrap="square">
+            <a:spAutoFit/>
+          </a:bodyPr>
+          <a:lstStyle/>
+          <a:p>
+            <a:pPr>
+              <a:defRPr sz="2250" b="1">
+                <a:solidFill>
+                  <a:srgbClr val="F0F6FC"/>
+                </a:solidFill>
+                <a:latin typeface="Arial"/>
+              </a:defRPr>
+            </a:pPr>
+            <a:r>
+              <a:t>Instrucciones del Lab 4, Prueba en `adk web` y Despliegue Terraform</a:t>
+            </a:r>
+          </a:p>
+        </p:txBody>
+      </p:sp>
+      <p:sp>
+        <p:nvSpPr>
+          <p:cNvPr id="7" name="TextBox 6"/>
+          <p:cNvSpPr txBox="1"/>
+          <p:nvPr/>
+        </p:nvSpPr>
+        <p:spPr>
+          <a:xfrm>
+            <a:off x="502920" y="1207008"/>
+            <a:ext cx="11155680" cy="411480"/>
+          </a:xfrm>
+          <a:prstGeom prst="rect">
+            <a:avLst/>
+          </a:prstGeom>
+          <a:noFill/>
+        </p:spPr>
+        <p:txBody>
+          <a:bodyPr wrap="square">
+            <a:spAutoFit/>
+          </a:bodyPr>
+          <a:lstStyle/>
+          <a:p>
+            <a:pPr>
+              <a:defRPr sz="1300">
+                <a:solidFill>
+                  <a:srgbClr val="8B949E"/>
+                </a:solidFill>
+                <a:latin typeface="Arial"/>
+              </a:defRPr>
+            </a:pPr>
+            <a:r>
+              <a:t>Sigue los Pasos 1–5 a la izquierda y copia los prompts desde labs/lab-04-multi-agent-capstone/PROMPTS.es.md</a:t>
+            </a:r>
+          </a:p>
+        </p:txBody>
+      </p:sp>
+      <p:sp>
+        <p:nvSpPr>
+          <p:cNvPr id="8" name="Rounded Rectangle 7"/>
+          <p:cNvSpPr/>
+          <p:nvPr/>
+        </p:nvSpPr>
+        <p:spPr>
+          <a:xfrm>
+            <a:off x="502920" y="1755648"/>
+            <a:ext cx="5504688" cy="4160520"/>
+          </a:xfrm>
+          <a:prstGeom prst="roundRect">
+            <a:avLst/>
+          </a:prstGeom>
+          <a:solidFill>
+            <a:srgbClr val="161B22"/>
+          </a:solidFill>
+          <a:ln w="19050">
+            <a:solidFill>
+              <a:srgbClr val="30363D"/>
+            </a:solidFill>
+          </a:ln>
+        </p:spPr>
+        <p:style>
+          <a:lnRef idx="1">
+            <a:schemeClr val="accent1"/>
+          </a:lnRef>
+          <a:fillRef idx="3">
+            <a:schemeClr val="accent1"/>
+          </a:fillRef>
+          <a:effectRef idx="2">
+            <a:schemeClr val="accent1"/>
+          </a:effectRef>
+          <a:fontRef idx="minor">
+            <a:schemeClr val="lt1"/>
+          </a:fontRef>
+        </p:style>
+        <p:txBody>
+          <a:bodyPr rtlCol="0" anchor="ctr"/>
+          <a:lstStyle/>
+          <a:p>
+            <a:pPr algn="ctr"/>
+          </a:p>
+        </p:txBody>
+      </p:sp>
+      <p:sp>
+        <p:nvSpPr>
+          <p:cNvPr id="9" name="Rectangle 8"/>
+          <p:cNvSpPr/>
+          <p:nvPr/>
+        </p:nvSpPr>
+        <p:spPr>
+          <a:xfrm>
+            <a:off x="502920" y="1755648"/>
+            <a:ext cx="5504688" cy="64008"/>
+          </a:xfrm>
+          <a:prstGeom prst="rect">
+            <a:avLst/>
+          </a:prstGeom>
+          <a:solidFill>
+            <a:srgbClr val="20E3B2"/>
+          </a:solidFill>
+          <a:ln>
+            <a:noFill/>
+          </a:ln>
+        </p:spPr>
+        <p:style>
+          <a:lnRef idx="1">
+            <a:schemeClr val="accent1"/>
+          </a:lnRef>
+          <a:fillRef idx="3">
+            <a:schemeClr val="accent1"/>
+          </a:fillRef>
+          <a:effectRef idx="2">
+            <a:schemeClr val="accent1"/>
+          </a:effectRef>
+          <a:fontRef idx="minor">
+            <a:schemeClr val="lt1"/>
+          </a:fontRef>
+        </p:style>
+        <p:txBody>
+          <a:bodyPr rtlCol="0" anchor="ctr"/>
+          <a:lstStyle/>
+          <a:p>
+            <a:pPr algn="ctr"/>
+          </a:p>
+        </p:txBody>
+      </p:sp>
+      <p:sp>
+        <p:nvSpPr>
+          <p:cNvPr id="10" name="TextBox 9"/>
+          <p:cNvSpPr txBox="1"/>
+          <p:nvPr/>
+        </p:nvSpPr>
+        <p:spPr>
+          <a:xfrm>
+            <a:off x="704088" y="1901952"/>
+            <a:ext cx="5102352" cy="3922776"/>
+          </a:xfrm>
+          <a:prstGeom prst="rect">
+            <a:avLst/>
+          </a:prstGeom>
+          <a:noFill/>
+        </p:spPr>
+        <p:txBody>
+          <a:bodyPr wrap="square">
+            <a:spAutoFit/>
+          </a:bodyPr>
+          <a:lstStyle/>
+          <a:p>
+            <a:pPr>
+              <a:spcAft>
+                <a:spcPts val="800"/>
+              </a:spcAft>
+              <a:defRPr sz="1500" b="1">
+                <a:solidFill>
+                  <a:srgbClr val="20E3B2"/>
+                </a:solidFill>
+                <a:latin typeface="Arial"/>
+              </a:defRPr>
+            </a:pPr>
+            <a:r>
+              <a:t>Instrucciones Paso a Paso del Lab 4</a:t>
+            </a:r>
+          </a:p>
+          <a:p>
+            <a:pPr>
+              <a:spcAft>
+                <a:spcPts val="650"/>
+              </a:spcAft>
+              <a:defRPr sz="1130">
+                <a:solidFill>
+                  <a:srgbClr val="F0F6FC"/>
+                </a:solidFill>
+                <a:latin typeface="Arial"/>
+              </a:defRPr>
+            </a:pPr>
+            <a:r>
+              <a:t>▸  Paso 1 (Inicializar Lab 04): Ejecuta `./labs/lab-04-multi-agent-capstone/install.sh`.</a:t>
+            </a:r>
+          </a:p>
+          <a:p>
+            <a:pPr>
+              <a:spcAft>
+                <a:spcPts val="650"/>
+              </a:spcAft>
+              <a:defRPr sz="1130">
+                <a:solidFill>
+                  <a:srgbClr val="F0F6FC"/>
+                </a:solidFill>
+                <a:latin typeface="Arial"/>
+              </a:defRPr>
+            </a:pPr>
+            <a:r>
+              <a:t>▸  Paso 2 (Motor de Factibilidad TMF622): Implementa `evaluate_order_feasibility()` y `remediate_slice_for_order()` en `src/services/order_feasibility.py` (balanceo PRB hacia celdas vecinas).</a:t>
+            </a:r>
+          </a:p>
+          <a:p>
+            <a:pPr>
+              <a:spcAft>
+                <a:spcPts val="650"/>
+              </a:spcAft>
+              <a:defRPr sz="1130">
+                <a:solidFill>
+                  <a:srgbClr val="F0F6FC"/>
+                </a:solidFill>
+                <a:latin typeface="Arial"/>
+              </a:defRPr>
+            </a:pPr>
+            <a:r>
+              <a:t>▸  Paso 3 (Orquestador Google ADK y A2A): Completa `src/agents/adk_a2a_orchestrator.py` (`RANSliceCapacityAgent`, `BSSCommercialSLAAgent`, `TelecomNexusOrchestratorAgent`, `GET /.well-known/agent.json`, `POST /api/v1/a2a`).</a:t>
+            </a:r>
+          </a:p>
+          <a:p>
+            <a:pPr>
+              <a:spcAft>
+                <a:spcPts val="650"/>
+              </a:spcAft>
+              <a:defRPr sz="1130">
+                <a:solidFill>
+                  <a:srgbClr val="F0F6FC"/>
+                </a:solidFill>
+                <a:latin typeface="Arial"/>
+              </a:defRPr>
+            </a:pPr>
+            <a:r>
+              <a:t>▸  Paso 4 (Interfaz Local `adk web`): Ejecuta `./scripts/run_adk_web.sh` y prueba `telecom_nexus` en `http://localhost:8080`.</a:t>
+            </a:r>
+          </a:p>
+          <a:p>
+            <a:pPr>
+              <a:spcAft>
+                <a:spcPts val="650"/>
+              </a:spcAft>
+              <a:defRPr sz="1130">
+                <a:solidFill>
+                  <a:srgbClr val="F0F6FC"/>
+                </a:solidFill>
+                <a:latin typeface="Arial"/>
+              </a:defRPr>
+            </a:pPr>
+            <a:r>
+              <a:t>▸  Paso 5 (Terraform y Verificación Total): Ejecuta `./labs/lab-04-multi-agent-capstone/deploy_gcp.sh --dry-run` y `./labs/lab-04-multi-agent-capstone/verify.sh` (**¡21/21 tests pasando!**).</a:t>
+            </a:r>
+          </a:p>
+        </p:txBody>
+      </p:sp>
+      <p:sp>
+        <p:nvSpPr>
+          <p:cNvPr id="11" name="Rounded Rectangle 10"/>
+          <p:cNvSpPr/>
+          <p:nvPr/>
+        </p:nvSpPr>
+        <p:spPr>
+          <a:xfrm>
+            <a:off x="6199632" y="1755648"/>
+            <a:ext cx="5486400" cy="4160520"/>
+          </a:xfrm>
+          <a:prstGeom prst="roundRect">
+            <a:avLst/>
+          </a:prstGeom>
+          <a:solidFill>
+            <a:srgbClr val="161B22"/>
+          </a:solidFill>
+          <a:ln w="19050">
+            <a:solidFill>
+              <a:srgbClr val="30363D"/>
+            </a:solidFill>
+          </a:ln>
+        </p:spPr>
+        <p:style>
+          <a:lnRef idx="1">
+            <a:schemeClr val="accent1"/>
+          </a:lnRef>
+          <a:fillRef idx="3">
+            <a:schemeClr val="accent1"/>
+          </a:fillRef>
+          <a:effectRef idx="2">
+            <a:schemeClr val="accent1"/>
+          </a:effectRef>
+          <a:fontRef idx="minor">
+            <a:schemeClr val="lt1"/>
+          </a:fontRef>
+        </p:style>
+        <p:txBody>
+          <a:bodyPr rtlCol="0" anchor="ctr"/>
+          <a:lstStyle/>
+          <a:p>
+            <a:pPr algn="ctr"/>
+          </a:p>
+        </p:txBody>
+      </p:sp>
+      <p:sp>
+        <p:nvSpPr>
+          <p:cNvPr id="12" name="Rectangle 11"/>
+          <p:cNvSpPr/>
+          <p:nvPr/>
+        </p:nvSpPr>
+        <p:spPr>
+          <a:xfrm>
+            <a:off x="6199632" y="1755648"/>
+            <a:ext cx="5486400" cy="64008"/>
+          </a:xfrm>
+          <a:prstGeom prst="rect">
+            <a:avLst/>
+          </a:prstGeom>
+          <a:solidFill>
+            <a:srgbClr val="3FB950"/>
+          </a:solidFill>
+          <a:ln>
+            <a:noFill/>
+          </a:ln>
+        </p:spPr>
+        <p:style>
+          <a:lnRef idx="1">
+            <a:schemeClr val="accent1"/>
+          </a:lnRef>
+          <a:fillRef idx="3">
+            <a:schemeClr val="accent1"/>
+          </a:fillRef>
+          <a:effectRef idx="2">
+            <a:schemeClr val="accent1"/>
+          </a:effectRef>
+          <a:fontRef idx="minor">
+            <a:schemeClr val="lt1"/>
+          </a:fontRef>
+        </p:style>
+        <p:txBody>
+          <a:bodyPr rtlCol="0" anchor="ctr"/>
+          <a:lstStyle/>
+          <a:p>
+            <a:pPr algn="ctr"/>
+          </a:p>
+        </p:txBody>
+      </p:sp>
+      <p:sp>
+        <p:nvSpPr>
+          <p:cNvPr id="13" name="TextBox 12"/>
+          <p:cNvSpPr txBox="1"/>
+          <p:nvPr/>
+        </p:nvSpPr>
+        <p:spPr>
+          <a:xfrm>
+            <a:off x="6400800" y="1901952"/>
+            <a:ext cx="5084064" cy="3922776"/>
+          </a:xfrm>
+          <a:prstGeom prst="rect">
+            <a:avLst/>
+          </a:prstGeom>
+          <a:noFill/>
+        </p:spPr>
+        <p:txBody>
+          <a:bodyPr wrap="square">
+            <a:spAutoFit/>
+          </a:bodyPr>
+          <a:lstStyle/>
+          <a:p>
+            <a:pPr>
+              <a:spcAft>
+                <a:spcPts val="800"/>
+              </a:spcAft>
+              <a:defRPr sz="1500" b="1">
+                <a:solidFill>
+                  <a:srgbClr val="3FB950"/>
+                </a:solidFill>
+                <a:latin typeface="Arial"/>
+              </a:defRPr>
+            </a:pPr>
+            <a:r>
+              <a:t>Prompts Optimizados, `adk web` y Comandos Cloud</a:t>
+            </a:r>
+          </a:p>
+          <a:p>
+            <a:pPr>
+              <a:spcAft>
+                <a:spcPts val="650"/>
+              </a:spcAft>
+              <a:defRPr sz="1130">
+                <a:solidFill>
+                  <a:srgbClr val="F0F6FC"/>
+                </a:solidFill>
+                <a:latin typeface="Arial"/>
+              </a:defRPr>
+            </a:pPr>
+            <a:r>
+              <a:t>▸  Prompt 1 — Motor de Factibilidad: '/plan Implementa evaluate_order_feasibility y remediate_slice_for_order en @src/services/order_feasibility.py según 3GPP TS 28.552 PRB &lt; 80% y desvío a celda vecina.'</a:t>
+            </a:r>
+          </a:p>
+          <a:p>
+            <a:pPr>
+              <a:spcAft>
+                <a:spcPts val="650"/>
+              </a:spcAft>
+              <a:defRPr sz="1130">
+                <a:solidFill>
+                  <a:srgbClr val="F0F6FC"/>
+                </a:solidFill>
+                <a:latin typeface="Arial"/>
+              </a:defRPr>
+            </a:pPr>
+            <a:r>
+              <a:t>▸  Prompt 2 — Orquestador ADK + A2A: '/teamwork Implementa RANSliceCapacityAgent, BSSCommercialSLAAgent, TelecomNexusOrchestratorAgent, get_a2a_agent_card y handle_a2a_jsonrpc_request en @src/agents/adk_a2a_orchestrator.py.'</a:t>
+            </a:r>
+          </a:p>
+          <a:p>
+            <a:pPr>
+              <a:spcAft>
+                <a:spcPts val="650"/>
+              </a:spcAft>
+              <a:defRPr sz="1130">
+                <a:solidFill>
+                  <a:srgbClr val="F0F6FC"/>
+                </a:solidFill>
+                <a:latin typeface="Arial"/>
+              </a:defRPr>
+            </a:pPr>
+            <a:r>
+              <a:t>▸  Prompt 3 — Interactivo en `adk web` (http://localhost:8080): 'Evalúa la orden ORD-TMF622-9001, ejecuta remediación autónoma de slice 5G y calcula el ACV protegido.'</a:t>
+            </a:r>
+          </a:p>
+          <a:p>
+            <a:pPr>
+              <a:spcAft>
+                <a:spcPts val="650"/>
+              </a:spcAft>
+              <a:defRPr sz="1130">
+                <a:solidFill>
+                  <a:srgbClr val="F0F6FC"/>
+                </a:solidFill>
+                <a:latin typeface="Arial"/>
+              </a:defRPr>
+            </a:pPr>
+            <a:r>
+              <a:t>▸  Despliegue y Verificación: Ejecuta `./labs/lab-04-multi-agent-capstone/deploy_gcp.sh --dry-run` y `./labs/lab-04-multi-agent-capstone/verify.sh`.</a:t>
+            </a:r>
+          </a:p>
+        </p:txBody>
+      </p:sp>
+      <p:sp>
+        <p:nvSpPr>
+          <p:cNvPr id="14" name="Rectangle 13"/>
+          <p:cNvSpPr/>
+          <p:nvPr/>
+        </p:nvSpPr>
+        <p:spPr>
+          <a:xfrm>
+            <a:off x="502920" y="6108192"/>
+            <a:ext cx="11183112" cy="475488"/>
+          </a:xfrm>
+          <a:prstGeom prst="rect">
+            <a:avLst/>
+          </a:prstGeom>
+          <a:solidFill>
+            <a:srgbClr val="161B22"/>
+          </a:solidFill>
+          <a:ln w="12700">
+            <a:solidFill>
+              <a:srgbClr val="30363D"/>
+            </a:solidFill>
+          </a:ln>
+        </p:spPr>
+        <p:style>
+          <a:lnRef idx="1">
+            <a:schemeClr val="accent1"/>
+          </a:lnRef>
+          <a:fillRef idx="3">
+            <a:schemeClr val="accent1"/>
+          </a:fillRef>
+          <a:effectRef idx="2">
+            <a:schemeClr val="accent1"/>
+          </a:effectRef>
+          <a:fontRef idx="minor">
+            <a:schemeClr val="lt1"/>
+          </a:fontRef>
+        </p:style>
+        <p:txBody>
+          <a:bodyPr rtlCol="0" anchor="ctr"/>
+          <a:lstStyle/>
+          <a:p>
+            <a:pPr algn="ctr"/>
+          </a:p>
+        </p:txBody>
+      </p:sp>
+      <p:sp>
+        <p:nvSpPr>
+          <p:cNvPr id="15" name="TextBox 14"/>
+          <p:cNvSpPr txBox="1"/>
+          <p:nvPr/>
+        </p:nvSpPr>
+        <p:spPr>
+          <a:xfrm>
+            <a:off x="685800" y="6172200"/>
+            <a:ext cx="10789920" cy="347472"/>
+          </a:xfrm>
+          <a:prstGeom prst="rect">
+            <a:avLst/>
+          </a:prstGeom>
+          <a:noFill/>
+        </p:spPr>
+        <p:txBody>
+          <a:bodyPr wrap="square">
+            <a:spAutoFit/>
+          </a:bodyPr>
+          <a:lstStyle/>
+          <a:p>
+            <a:pPr>
+              <a:defRPr sz="1150" b="1">
+                <a:solidFill>
+                  <a:srgbClr val="20E3B2"/>
+                </a:solidFill>
+                <a:latin typeface="Arial"/>
+              </a:defRPr>
+            </a:pPr>
+            <a:r>
+              <a:t>Impartido por Tryolabs • Solución de Referencia: ./labs/lab-04-multi-agent-capstone/apply_solution.sh    |    Slide 15/15</a:t>
             </a:r>
           </a:p>
         </p:txBody>
@@ -6031,7 +8825,7 @@
           <a:lstStyle/>
           <a:p>
             <a:pPr>
-              <a:defRPr sz="2400" b="1">
+              <a:defRPr sz="2250" b="1">
                 <a:solidFill>
                   <a:srgbClr val="F0F6FC"/>
                 </a:solidFill>
@@ -6067,7 +8861,7 @@
           <a:lstStyle/>
           <a:p>
             <a:pPr>
-              <a:defRPr sz="1350">
+              <a:defRPr sz="1300">
                 <a:solidFill>
                   <a:srgbClr val="8B949E"/>
                 </a:solidFill>
@@ -6200,8 +8994,8 @@
         </p:nvSpPr>
         <p:spPr>
           <a:xfrm>
-            <a:off x="6537960" y="1920240"/>
-            <a:ext cx="4919472" cy="3886200"/>
+            <a:off x="6510528" y="1901952"/>
+            <a:ext cx="4974336" cy="3922776"/>
           </a:xfrm>
           <a:prstGeom prst="rect">
             <a:avLst/>
@@ -6216,25 +9010,25 @@
           <a:p>
             <a:pPr>
               <a:spcAft>
-                <a:spcPts val="1000"/>
-              </a:spcAft>
-              <a:defRPr sz="1600" b="1">
-                <a:solidFill>
-                  <a:srgbClr val="58A6FF"/>
-                </a:solidFill>
-                <a:latin typeface="Arial"/>
-              </a:defRPr>
-            </a:pPr>
-            <a:r>
-              <a:t>Cronograma Minuto a Minuto</a:t>
-            </a:r>
-          </a:p>
-          <a:p>
-            <a:pPr>
-              <a:spcAft>
                 <a:spcPts val="800"/>
               </a:spcAft>
-              <a:defRPr sz="1220">
+              <a:defRPr sz="1500" b="1">
+                <a:solidFill>
+                  <a:srgbClr val="58A6FF"/>
+                </a:solidFill>
+                <a:latin typeface="Arial"/>
+              </a:defRPr>
+            </a:pPr>
+            <a:r>
+              <a:t>Cronograma Minuto a Minuto</a:t>
+            </a:r>
+          </a:p>
+          <a:p>
+            <a:pPr>
+              <a:spcAft>
+                <a:spcPts val="650"/>
+              </a:spcAft>
+              <a:defRPr sz="1130">
                 <a:solidFill>
                   <a:srgbClr val="F0F6FC"/>
                 </a:solidFill>
@@ -6248,9 +9042,9 @@
           <a:p>
             <a:pPr>
               <a:spcAft>
-                <a:spcPts val="800"/>
+                <a:spcPts val="650"/>
               </a:spcAft>
-              <a:defRPr sz="1220">
+              <a:defRPr sz="1130">
                 <a:solidFill>
                   <a:srgbClr val="F0F6FC"/>
                 </a:solidFill>
@@ -6264,9 +9058,9 @@
           <a:p>
             <a:pPr>
               <a:spcAft>
-                <a:spcPts val="800"/>
+                <a:spcPts val="650"/>
               </a:spcAft>
-              <a:defRPr sz="1220">
+              <a:defRPr sz="1130">
                 <a:solidFill>
                   <a:srgbClr val="F0F6FC"/>
                 </a:solidFill>
@@ -6280,9 +9074,9 @@
           <a:p>
             <a:pPr>
               <a:spcAft>
-                <a:spcPts val="800"/>
+                <a:spcPts val="650"/>
               </a:spcAft>
-              <a:defRPr sz="1220">
+              <a:defRPr sz="1130">
                 <a:solidFill>
                   <a:srgbClr val="F0F6FC"/>
                 </a:solidFill>
@@ -6296,9 +9090,9 @@
           <a:p>
             <a:pPr>
               <a:spcAft>
-                <a:spcPts val="800"/>
+                <a:spcPts val="650"/>
               </a:spcAft>
-              <a:defRPr sz="1220">
+              <a:defRPr sz="1130">
                 <a:solidFill>
                   <a:srgbClr val="F0F6FC"/>
                 </a:solidFill>
@@ -6387,7 +9181,7 @@
               </a:defRPr>
             </a:pPr>
             <a:r>
-              <a:t>Cada laboratorio incluye README.es.md, PROMPTS.es.md (prompts optimizados), install.sh y verify.sh.    |    Slide 2/11</a:t>
+              <a:t>Cada laboratorio incluye LAB_0X_INSTRUCTIONS_ES.pdf, README.es.md, PROMPTS.es.md, install.sh y verify.sh.    |    Slide 2/15</a:t>
             </a:r>
           </a:p>
         </p:txBody>
@@ -6579,7 +9373,7 @@
           <a:lstStyle/>
           <a:p>
             <a:pPr>
-              <a:defRPr sz="2400" b="1">
+              <a:defRPr sz="2250" b="1">
                 <a:solidFill>
                   <a:srgbClr val="F0F6FC"/>
                 </a:solidFill>
@@ -6615,7 +9409,7 @@
           <a:lstStyle/>
           <a:p>
             <a:pPr>
-              <a:defRPr sz="1350">
+              <a:defRPr sz="1300">
                 <a:solidFill>
                   <a:srgbClr val="8B949E"/>
                 </a:solidFill>
@@ -6748,8 +9542,8 @@
         </p:nvSpPr>
         <p:spPr>
           <a:xfrm>
-            <a:off x="6537960" y="1920240"/>
-            <a:ext cx="4919472" cy="3886200"/>
+            <a:off x="6510528" y="1901952"/>
+            <a:ext cx="4974336" cy="3922776"/>
           </a:xfrm>
           <a:prstGeom prst="rect">
             <a:avLst/>
@@ -6764,25 +9558,25 @@
           <a:p>
             <a:pPr>
               <a:spcAft>
-                <a:spcPts val="1000"/>
-              </a:spcAft>
-              <a:defRPr sz="1600" b="1">
-                <a:solidFill>
-                  <a:srgbClr val="BC8CFF"/>
-                </a:solidFill>
-                <a:latin typeface="Arial"/>
-              </a:defRPr>
-            </a:pPr>
-            <a:r>
-              <a:t>El Ciclo Interno de Ejecución en 5 Etapas</a:t>
-            </a:r>
-          </a:p>
-          <a:p>
-            <a:pPr>
-              <a:spcAft>
                 <a:spcPts val="800"/>
               </a:spcAft>
-              <a:defRPr sz="1220">
+              <a:defRPr sz="1500" b="1">
+                <a:solidFill>
+                  <a:srgbClr val="BC8CFF"/>
+                </a:solidFill>
+                <a:latin typeface="Arial"/>
+              </a:defRPr>
+            </a:pPr>
+            <a:r>
+              <a:t>El Ciclo Interno de Ejecución en 5 Etapas</a:t>
+            </a:r>
+          </a:p>
+          <a:p>
+            <a:pPr>
+              <a:spcAft>
+                <a:spcPts val="650"/>
+              </a:spcAft>
+              <a:defRPr sz="1130">
                 <a:solidFill>
                   <a:srgbClr val="F0F6FC"/>
                 </a:solidFill>
@@ -6796,9 +9590,9 @@
           <a:p>
             <a:pPr>
               <a:spcAft>
-                <a:spcPts val="800"/>
+                <a:spcPts val="650"/>
               </a:spcAft>
-              <a:defRPr sz="1220">
+              <a:defRPr sz="1130">
                 <a:solidFill>
                   <a:srgbClr val="F0F6FC"/>
                 </a:solidFill>
@@ -6812,9 +9606,9 @@
           <a:p>
             <a:pPr>
               <a:spcAft>
-                <a:spcPts val="800"/>
+                <a:spcPts val="650"/>
               </a:spcAft>
-              <a:defRPr sz="1220">
+              <a:defRPr sz="1130">
                 <a:solidFill>
                   <a:srgbClr val="F0F6FC"/>
                 </a:solidFill>
@@ -6828,9 +9622,9 @@
           <a:p>
             <a:pPr>
               <a:spcAft>
-                <a:spcPts val="800"/>
+                <a:spcPts val="650"/>
               </a:spcAft>
-              <a:defRPr sz="1220">
+              <a:defRPr sz="1130">
                 <a:solidFill>
                   <a:srgbClr val="F0F6FC"/>
                 </a:solidFill>
@@ -6844,9 +9638,9 @@
           <a:p>
             <a:pPr>
               <a:spcAft>
-                <a:spcPts val="800"/>
+                <a:spcPts val="650"/>
               </a:spcAft>
-              <a:defRPr sz="1220">
+              <a:defRPr sz="1130">
                 <a:solidFill>
                   <a:srgbClr val="F0F6FC"/>
                 </a:solidFill>
@@ -6935,7 +9729,7 @@
               </a:defRPr>
             </a:pPr>
             <a:r>
-              <a:t>Concepto Clave: Antigravity no es solo un chat, sino un motor de ingeniería en bucle cerrado verificable.    |    Slide 3/11</a:t>
+              <a:t>Concepto Clave: Antigravity no es solo un chat, sino un motor de ingeniería en bucle cerrado verificable.    |    Slide 3/15</a:t>
             </a:r>
           </a:p>
         </p:txBody>
@@ -7127,7 +9921,7 @@
           <a:lstStyle/>
           <a:p>
             <a:pPr>
-              <a:defRPr sz="2400" b="1">
+              <a:defRPr sz="2250" b="1">
                 <a:solidFill>
                   <a:srgbClr val="F0F6FC"/>
                 </a:solidFill>
@@ -7163,7 +9957,7 @@
           <a:lstStyle/>
           <a:p>
             <a:pPr>
-              <a:defRPr sz="1350">
+              <a:defRPr sz="1300">
                 <a:solidFill>
                   <a:srgbClr val="8B949E"/>
                 </a:solidFill>
@@ -7296,8 +10090,8 @@
         </p:nvSpPr>
         <p:spPr>
           <a:xfrm>
-            <a:off x="6537960" y="1920240"/>
-            <a:ext cx="4919472" cy="3886200"/>
+            <a:off x="6510528" y="1901952"/>
+            <a:ext cx="4974336" cy="3922776"/>
           </a:xfrm>
           <a:prstGeom prst="rect">
             <a:avLst/>
@@ -7312,25 +10106,25 @@
           <a:p>
             <a:pPr>
               <a:spcAft>
-                <a:spcPts val="1000"/>
-              </a:spcAft>
-              <a:defRPr sz="1600" b="1">
-                <a:solidFill>
-                  <a:srgbClr val="58A6FF"/>
-                </a:solidFill>
-                <a:latin typeface="Arial"/>
-              </a:defRPr>
-            </a:pPr>
-            <a:r>
-              <a:t>Funcionalidades que Explorarás Hoy</a:t>
-            </a:r>
-          </a:p>
-          <a:p>
-            <a:pPr>
-              <a:spcAft>
                 <a:spcPts val="800"/>
               </a:spcAft>
-              <a:defRPr sz="1220">
+              <a:defRPr sz="1500" b="1">
+                <a:solidFill>
+                  <a:srgbClr val="58A6FF"/>
+                </a:solidFill>
+                <a:latin typeface="Arial"/>
+              </a:defRPr>
+            </a:pPr>
+            <a:r>
+              <a:t>Funcionalidades que Explorarás Hoy</a:t>
+            </a:r>
+          </a:p>
+          <a:p>
+            <a:pPr>
+              <a:spcAft>
+                <a:spcPts val="650"/>
+              </a:spcAft>
+              <a:defRPr sz="1130">
                 <a:solidFill>
                   <a:srgbClr val="F0F6FC"/>
                 </a:solidFill>
@@ -7344,9 +10138,9 @@
           <a:p>
             <a:pPr>
               <a:spcAft>
-                <a:spcPts val="800"/>
+                <a:spcPts val="650"/>
               </a:spcAft>
-              <a:defRPr sz="1220">
+              <a:defRPr sz="1130">
                 <a:solidFill>
                   <a:srgbClr val="F0F6FC"/>
                 </a:solidFill>
@@ -7360,9 +10154,9 @@
           <a:p>
             <a:pPr>
               <a:spcAft>
-                <a:spcPts val="800"/>
+                <a:spcPts val="650"/>
               </a:spcAft>
-              <a:defRPr sz="1220">
+              <a:defRPr sz="1130">
                 <a:solidFill>
                   <a:srgbClr val="F0F6FC"/>
                 </a:solidFill>
@@ -7376,9 +10170,9 @@
           <a:p>
             <a:pPr>
               <a:spcAft>
-                <a:spcPts val="800"/>
+                <a:spcPts val="650"/>
               </a:spcAft>
-              <a:defRPr sz="1220">
+              <a:defRPr sz="1130">
                 <a:solidFill>
                   <a:srgbClr val="F0F6FC"/>
                 </a:solidFill>
@@ -7392,9 +10186,9 @@
           <a:p>
             <a:pPr>
               <a:spcAft>
-                <a:spcPts val="800"/>
+                <a:spcPts val="650"/>
               </a:spcAft>
-              <a:defRPr sz="1220">
+              <a:defRPr sz="1130">
                 <a:solidFill>
                   <a:srgbClr val="F0F6FC"/>
                 </a:solidFill>
@@ -7483,7 +10277,7 @@
               </a:defRPr>
             </a:pPr>
             <a:r>
-              <a:t>Tip Pro: Inicia tareas complejas con /plan y menciones @archivo; usa Cmd+I para ajustes puntuales de fórmulas.    |    Slide 4/11</a:t>
+              <a:t>Tip Pro: Inicia tareas complejas con /plan y menciones @archivo; usa Cmd+I para ajustes puntuales de fórmulas.    |    Slide 4/15</a:t>
             </a:r>
           </a:p>
         </p:txBody>
@@ -7647,7 +10441,7 @@
               </a:defRPr>
             </a:pPr>
             <a:r>
-              <a:t>LABORATORIO PRÁCTICO 1 (52 MINUTOS) • TRIAGE Y RECUPERACIÓN</a:t>
+              <a:t>LABORATORIO PRÁCTICO 1 (PARTE 1/2) • OBJETIVOS Y QUÉ CONSTRUIRÁS</a:t>
             </a:r>
           </a:p>
         </p:txBody>
@@ -7675,7 +10469,7 @@
           <a:lstStyle/>
           <a:p>
             <a:pPr>
-              <a:defRPr sz="2400" b="1">
+              <a:defRPr sz="2250" b="1">
                 <a:solidFill>
                   <a:srgbClr val="F0F6FC"/>
                 </a:solidFill>
@@ -7683,7 +10477,7 @@
               </a:defRPr>
             </a:pPr>
             <a:r>
-              <a:t>Lab 1: Diagnóstico de Causa Raíz y Recuperación de Ingresos/Márgenes</a:t>
+              <a:t>Lab 1: Triage de SLA 5G y Facturación CDR — Objetivos y Arquitectura</a:t>
             </a:r>
           </a:p>
         </p:txBody>
@@ -7711,7 +10505,7 @@
           <a:lstStyle/>
           <a:p>
             <a:pPr>
-              <a:defRPr sz="1350">
+              <a:defRPr sz="1300">
                 <a:solidFill>
                   <a:srgbClr val="8B949E"/>
                 </a:solidFill>
@@ -7719,7 +10513,7 @@
               </a:defRPr>
             </a:pPr>
             <a:r>
-              <a:t>Usa Antigravity (/plan, @menciones, Cmd+I, pytest) para corregir dos bugs críticos en producción</a:t>
+              <a:t>52 Minutos • Guía PDF Imprimible: labs/lab-01-revenue-sla-triage/LAB_01_INSTRUCTIONS_ES.pdf</a:t>
             </a:r>
           </a:p>
         </p:txBody>
@@ -7844,8 +10638,8 @@
         </p:nvSpPr>
         <p:spPr>
           <a:xfrm>
-            <a:off x="6537960" y="1920240"/>
-            <a:ext cx="4919472" cy="3886200"/>
+            <a:off x="6510528" y="1901952"/>
+            <a:ext cx="4974336" cy="3922776"/>
           </a:xfrm>
           <a:prstGeom prst="rect">
             <a:avLst/>
@@ -7860,25 +10654,25 @@
           <a:p>
             <a:pPr>
               <a:spcAft>
-                <a:spcPts val="1000"/>
-              </a:spcAft>
-              <a:defRPr sz="1600" b="1">
-                <a:solidFill>
-                  <a:srgbClr val="D29922"/>
-                </a:solidFill>
-                <a:latin typeface="Arial"/>
-              </a:defRPr>
-            </a:pPr>
-            <a:r>
-              <a:t>Guía del Lab 1 y Prompts Optimizados</a:t>
-            </a:r>
-          </a:p>
-          <a:p>
-            <a:pPr>
-              <a:spcAft>
                 <a:spcPts val="800"/>
               </a:spcAft>
-              <a:defRPr sz="1220">
+              <a:defRPr sz="1500" b="1">
+                <a:solidFill>
+                  <a:srgbClr val="D29922"/>
+                </a:solidFill>
+                <a:latin typeface="Arial"/>
+              </a:defRPr>
+            </a:pPr>
+            <a:r>
+              <a:t>Objetivos del Lab 1 y Qué Construirás</a:t>
+            </a:r>
+          </a:p>
+          <a:p>
+            <a:pPr>
+              <a:spcAft>
+                <a:spcPts val="650"/>
+              </a:spcAft>
+              <a:defRPr sz="1130">
                 <a:solidFill>
                   <a:srgbClr val="F0F6FC"/>
                 </a:solidFill>
@@ -7886,15 +10680,15 @@
               </a:defRPr>
             </a:pPr>
             <a:r>
-              <a:t>▸  Setup: Ejecuta ./labs/lab-01-revenue-sla-triage/install.sh y abre http://localhost:8001</a:t>
+              <a:t>▸  Objetivo 1 (Triage Agéntico Multi-Archivo): Dominar `@menciones`, `/plan` y edición en línea `Cmd/Ctrl+I` en Antigravity correlacionando alarmas RAN (`ran_alarms.jsonl`) con código BSS.</a:t>
             </a:r>
           </a:p>
           <a:p>
             <a:pPr>
               <a:spcAft>
-                <a:spcPts val="800"/>
+                <a:spcPts val="650"/>
               </a:spcAft>
-              <a:defRPr sz="1220">
+              <a:defRPr sz="1130">
                 <a:solidFill>
                   <a:srgbClr val="F0F6FC"/>
                 </a:solidFill>
@@ -7902,15 +10696,15 @@
               </a:defRPr>
             </a:pPr>
             <a:r>
-              <a:t>▸  Bug #1 (Fuga de Ingresos BSS): src/services/cdr_rating.py usa 1000^3 en vez de 1024^3 GiB y omite el multiplicador 1.50x de roaming NR_5G ($54,672.22 perdidos)</a:t>
+              <a:t>▸  Objetivo 2 (Aseguramiento de Ingresos y SLA): Recuperar `$54,672.22 USD` en CDRs 5G subfacturados y eliminar `$35,000 USD` en falsas alertas SLA sobre contratos no activos.</a:t>
             </a:r>
           </a:p>
           <a:p>
             <a:pPr>
               <a:spcAft>
-                <a:spcPts val="800"/>
+                <a:spcPts val="650"/>
               </a:spcAft>
-              <a:defRPr sz="1220">
+              <a:defRPr sz="1130">
                 <a:solidFill>
                   <a:srgbClr val="F0F6FC"/>
                 </a:solidFill>
@@ -7918,15 +10712,15 @@
               </a:defRPr>
             </a:pPr>
             <a:r>
-              <a:t>▸  Bug #2 (Riesgo SLA OSS/BSS): src/services/sla_monitor.py invierte la latencia (&lt; vs &gt;) e incluye el contrato SUSPENDED CTR-B2B-1007 ($35K de falsa alerta)</a:t>
+              <a:t>▸  Qué Construirás #1 (Motor de Tasación TAP3 3GPP): Refactorizarás `src/services/cdr_rating.py` imponiendo GiB binario (`Decimal(1024 ** 3)`) y recargo de roaming en toda red visitada (`NR_5G` y `EUTRAN_4G`).</a:t>
             </a:r>
           </a:p>
           <a:p>
             <a:pPr>
               <a:spcAft>
-                <a:spcPts val="800"/>
+                <a:spcPts val="650"/>
               </a:spcAft>
-              <a:defRPr sz="1220">
+              <a:defRPr sz="1130">
                 <a:solidFill>
                   <a:srgbClr val="F0F6FC"/>
                 </a:solidFill>
@@ -7934,15 +10728,15 @@
               </a:defRPr>
             </a:pPr>
             <a:r>
-              <a:t>▸  Prompt 1 (/plan): '/plan Analiza @src/services/cdr_rating.py, @src/services/sla_monitor.py y @tests/test_lab01_triage.py para diagnosticar los bugs de ingresos y SLA'</a:t>
+              <a:t>▸  Qué Construirás #2 (Monitor de SLA B2B): Refactorizarás `src/services/sla_monitor.py` filtrando `WHERE status = 'ACTIVE'` y evaluando `worst_latency &gt; committed_latency`.</a:t>
             </a:r>
           </a:p>
           <a:p>
             <a:pPr>
               <a:spcAft>
-                <a:spcPts val="800"/>
+                <a:spcPts val="650"/>
               </a:spcAft>
-              <a:defRPr sz="1220">
+              <a:defRPr sz="1130">
                 <a:solidFill>
                   <a:srgbClr val="F0F6FC"/>
                 </a:solidFill>
@@ -7950,7 +10744,7 @@
               </a:defRPr>
             </a:pPr>
             <a:r>
-              <a:t>▸  Prompt 2 (Cmd+I y Fix): Usa Cmd+I en línea para corregir con Decimal y ejecuta ./labs/lab-01-revenue-sla-triage/verify.sh</a:t>
+              <a:t>▸  Entregable y Verificación: Pasar los 5 tests en `tests/test_lab01_triage.py` (`./labs/lab-01-revenue-sla-triage/verify.sh`) y validar KPIs en `http://localhost:8001`.</a:t>
             </a:r>
           </a:p>
         </p:txBody>
@@ -8031,7 +10825,7 @@
               </a:defRPr>
             </a:pPr>
             <a:r>
-              <a:t>Abre PROMPTS.es.md dentro de labs/lab-01-* para copiar prompts optimizados de Diagnóstico, /plan, Cmd+I y Verificación.    |    Slide 5/11</a:t>
+              <a:t>Impartido por Tryolabs • Guía imprimible completa: LAB_01_INSTRUCTIONS_ES.pdf    |    Slide 5/15</a:t>
             </a:r>
           </a:p>
         </p:txBody>
@@ -8195,7 +10989,7 @@
               </a:defRPr>
             </a:pPr>
             <a:r>
-              <a:t>MÓDULO TEÓRICO 2 (6 MINUTOS) • ARQUITECTURA DE PERSONALIZACIÓN</a:t>
+              <a:t>LABORATORIO PRÁCTICO 1 (PARTE 2/2) • INSTRUCCIONES PASO A PASO Y PROMPTS</a:t>
             </a:r>
           </a:p>
         </p:txBody>
@@ -8223,7 +11017,7 @@
           <a:lstStyle/>
           <a:p>
             <a:pPr>
-              <a:defRPr sz="2400" b="1">
+              <a:defRPr sz="2250" b="1">
                 <a:solidFill>
                   <a:srgbClr val="F0F6FC"/>
                 </a:solidFill>
@@ -8231,7 +11025,7 @@
               </a:defRPr>
             </a:pPr>
             <a:r>
-              <a:t>Cómo Funcionan Internamente las Rules y Skills Progresivos</a:t>
+              <a:t>Instrucciones del Lab 1 y Prompts para Copiar y Pegar</a:t>
             </a:r>
           </a:p>
         </p:txBody>
@@ -8259,7 +11053,7 @@
           <a:lstStyle/>
           <a:p>
             <a:pPr>
-              <a:defRPr sz="1350">
+              <a:defRPr sz="1300">
                 <a:solidFill>
                   <a:srgbClr val="8B949E"/>
                 </a:solidFill>
@@ -8267,45 +11061,21 @@
               </a:defRPr>
             </a:pPr>
             <a:r>
-              <a:t>Especializando a Antigravity en tu industria sin saturar la ventana de contexto</a:t>
-            </a:r>
-          </a:p>
-        </p:txBody>
-      </p:sp>
-      <p:pic>
-        <p:nvPicPr>
-          <p:cNvPr id="8" name="Picture 7" descr="customizations_es.png"/>
-          <p:cNvPicPr>
-            <a:picLocks noChangeAspect="1"/>
-          </p:cNvPicPr>
-          <p:nvPr/>
-        </p:nvPicPr>
-        <p:blipFill>
-          <a:blip r:embed="rId3"/>
-          <a:stretch>
-            <a:fillRect/>
-          </a:stretch>
-        </p:blipFill>
+              <a:t>Sigue los Pasos 1–5 a la izquierda y copia los prompts desde labs/lab-01-revenue-sla-triage/PROMPTS.es.md</a:t>
+            </a:r>
+          </a:p>
+        </p:txBody>
+      </p:sp>
+      <p:sp>
+        <p:nvSpPr>
+          <p:cNvPr id="8" name="Rounded Rectangle 7"/>
+          <p:cNvSpPr/>
+          <p:nvPr/>
+        </p:nvSpPr>
         <p:spPr>
           <a:xfrm>
             <a:off x="502920" y="1755648"/>
-            <a:ext cx="5623560" cy="3186684"/>
-          </a:xfrm>
-          <a:prstGeom prst="rect">
-            <a:avLst/>
-          </a:prstGeom>
-        </p:spPr>
-      </p:pic>
-      <p:sp>
-        <p:nvSpPr>
-          <p:cNvPr id="9" name="Rounded Rectangle 8"/>
-          <p:cNvSpPr/>
-          <p:nvPr/>
-        </p:nvSpPr>
-        <p:spPr>
-          <a:xfrm>
-            <a:off x="6309360" y="1755648"/>
-            <a:ext cx="5376672" cy="4160520"/>
+            <a:ext cx="5504688" cy="4160520"/>
           </a:xfrm>
           <a:prstGeom prst="roundRect">
             <a:avLst/>
@@ -8343,20 +11113,20 @@
       </p:sp>
       <p:sp>
         <p:nvSpPr>
-          <p:cNvPr id="10" name="Rectangle 9"/>
+          <p:cNvPr id="9" name="Rectangle 8"/>
           <p:cNvSpPr/>
           <p:nvPr/>
         </p:nvSpPr>
         <p:spPr>
           <a:xfrm>
-            <a:off x="6309360" y="1755648"/>
-            <a:ext cx="5376672" cy="64008"/>
+            <a:off x="502920" y="1755648"/>
+            <a:ext cx="5504688" cy="64008"/>
           </a:xfrm>
           <a:prstGeom prst="rect">
             <a:avLst/>
           </a:prstGeom>
           <a:solidFill>
-            <a:srgbClr val="3FB950"/>
+            <a:srgbClr val="D29922"/>
           </a:solidFill>
           <a:ln>
             <a:noFill/>
@@ -8386,14 +11156,14 @@
       </p:sp>
       <p:sp>
         <p:nvSpPr>
-          <p:cNvPr id="11" name="TextBox 10"/>
+          <p:cNvPr id="10" name="TextBox 9"/>
           <p:cNvSpPr txBox="1"/>
           <p:nvPr/>
         </p:nvSpPr>
         <p:spPr>
           <a:xfrm>
-            <a:off x="6537960" y="1920240"/>
-            <a:ext cx="4919472" cy="3886200"/>
+            <a:off x="704088" y="1901952"/>
+            <a:ext cx="5102352" cy="3922776"/>
           </a:xfrm>
           <a:prstGeom prst="rect">
             <a:avLst/>
@@ -8408,25 +11178,232 @@
           <a:p>
             <a:pPr>
               <a:spcAft>
-                <a:spcPts val="1000"/>
+                <a:spcPts val="800"/>
               </a:spcAft>
-              <a:defRPr sz="1600" b="1">
-                <a:solidFill>
-                  <a:srgbClr val="3FB950"/>
-                </a:solidFill>
-                <a:latin typeface="Arial"/>
-              </a:defRPr>
-            </a:pPr>
-            <a:r>
-              <a:t>Rules vs. Skills vs. /learn</a:t>
-            </a:r>
-          </a:p>
+              <a:defRPr sz="1500" b="1">
+                <a:solidFill>
+                  <a:srgbClr val="D29922"/>
+                </a:solidFill>
+                <a:latin typeface="Arial"/>
+              </a:defRPr>
+            </a:pPr>
+            <a:r>
+              <a:t>Instrucciones Paso a Paso del Lab 1</a:t>
+            </a:r>
+          </a:p>
+          <a:p>
+            <a:pPr>
+              <a:spcAft>
+                <a:spcPts val="650"/>
+              </a:spcAft>
+              <a:defRPr sz="1130">
+                <a:solidFill>
+                  <a:srgbClr val="F0F6FC"/>
+                </a:solidFill>
+                <a:latin typeface="Arial"/>
+              </a:defRPr>
+            </a:pPr>
+            <a:r>
+              <a:t>▸  Paso 1 (Inicializar Lab 01): Ejecuta `./labs/lab-01-revenue-sla-triage/install.sh` para poblar `data/telecom_nexus.db`.</a:t>
+            </a:r>
+          </a:p>
+          <a:p>
+            <a:pPr>
+              <a:spcAft>
+                <a:spcPts val="650"/>
+              </a:spcAft>
+              <a:defRPr sz="1130">
+                <a:solidFill>
+                  <a:srgbClr val="F0F6FC"/>
+                </a:solidFill>
+                <a:latin typeface="Arial"/>
+              </a:defRPr>
+            </a:pPr>
+            <a:r>
+              <a:t>▸  Paso 2 (Reproducir Fallos): Ejecuta `./.venv/bin/pytest tests/test_lab01_triage.py` para observar los fallos de CDR y SLA.</a:t>
+            </a:r>
+          </a:p>
+          <a:p>
+            <a:pPr>
+              <a:spcAft>
+                <a:spcPts val="650"/>
+              </a:spcAft>
+              <a:defRPr sz="1130">
+                <a:solidFill>
+                  <a:srgbClr val="F0F6FC"/>
+                </a:solidFill>
+                <a:latin typeface="Arial"/>
+              </a:defRPr>
+            </a:pPr>
+            <a:r>
+              <a:t>▸  Paso 3 (Corregir `src/services/cdr_rating.py`): Usa `BYTES_DIVISOR = Decimal(1024 ** 3)` (GiB binario según 3GPP TS 32.298) y aplica `roaming_markup` cuando `roaming_plmn != HOME_PLMN`.</a:t>
+            </a:r>
+          </a:p>
+          <a:p>
+            <a:pPr>
+              <a:spcAft>
+                <a:spcPts val="650"/>
+              </a:spcAft>
+              <a:defRPr sz="1130">
+                <a:solidFill>
+                  <a:srgbClr val="F0F6FC"/>
+                </a:solidFill>
+                <a:latin typeface="Arial"/>
+              </a:defRPr>
+            </a:pPr>
+            <a:r>
+              <a:t>▸  Paso 4 (Corregir `src/services/sla_monitor.py`): Filtra `WHERE status = 'ACTIVE'` y cambia `latency_breach` a `worst_latency &gt; committed_latency`.</a:t>
+            </a:r>
+          </a:p>
+          <a:p>
+            <a:pPr>
+              <a:spcAft>
+                <a:spcPts val="650"/>
+              </a:spcAft>
+              <a:defRPr sz="1130">
+                <a:solidFill>
+                  <a:srgbClr val="F0F6FC"/>
+                </a:solidFill>
+                <a:latin typeface="Arial"/>
+              </a:defRPr>
+            </a:pPr>
+            <a:r>
+              <a:t>▸  Paso 5 (Verificar): Ejecuta `./labs/lab-01-revenue-sla-triage/verify.sh` (`5 passed`: `$54,672.22` recuperados; 5 contratos `ACTIVE` en alerta = `$224,500.00`).</a:t>
+            </a:r>
+          </a:p>
+        </p:txBody>
+      </p:sp>
+      <p:sp>
+        <p:nvSpPr>
+          <p:cNvPr id="11" name="Rounded Rectangle 10"/>
+          <p:cNvSpPr/>
+          <p:nvPr/>
+        </p:nvSpPr>
+        <p:spPr>
+          <a:xfrm>
+            <a:off x="6199632" y="1755648"/>
+            <a:ext cx="5486400" cy="4160520"/>
+          </a:xfrm>
+          <a:prstGeom prst="roundRect">
+            <a:avLst/>
+          </a:prstGeom>
+          <a:solidFill>
+            <a:srgbClr val="161B22"/>
+          </a:solidFill>
+          <a:ln w="19050">
+            <a:solidFill>
+              <a:srgbClr val="30363D"/>
+            </a:solidFill>
+          </a:ln>
+        </p:spPr>
+        <p:style>
+          <a:lnRef idx="1">
+            <a:schemeClr val="accent1"/>
+          </a:lnRef>
+          <a:fillRef idx="3">
+            <a:schemeClr val="accent1"/>
+          </a:fillRef>
+          <a:effectRef idx="2">
+            <a:schemeClr val="accent1"/>
+          </a:effectRef>
+          <a:fontRef idx="minor">
+            <a:schemeClr val="lt1"/>
+          </a:fontRef>
+        </p:style>
+        <p:txBody>
+          <a:bodyPr rtlCol="0" anchor="ctr"/>
+          <a:lstStyle/>
+          <a:p>
+            <a:pPr algn="ctr"/>
+          </a:p>
+        </p:txBody>
+      </p:sp>
+      <p:sp>
+        <p:nvSpPr>
+          <p:cNvPr id="12" name="Rectangle 11"/>
+          <p:cNvSpPr/>
+          <p:nvPr/>
+        </p:nvSpPr>
+        <p:spPr>
+          <a:xfrm>
+            <a:off x="6199632" y="1755648"/>
+            <a:ext cx="5486400" cy="64008"/>
+          </a:xfrm>
+          <a:prstGeom prst="rect">
+            <a:avLst/>
+          </a:prstGeom>
+          <a:solidFill>
+            <a:srgbClr val="58A6FF"/>
+          </a:solidFill>
+          <a:ln>
+            <a:noFill/>
+          </a:ln>
+        </p:spPr>
+        <p:style>
+          <a:lnRef idx="1">
+            <a:schemeClr val="accent1"/>
+          </a:lnRef>
+          <a:fillRef idx="3">
+            <a:schemeClr val="accent1"/>
+          </a:fillRef>
+          <a:effectRef idx="2">
+            <a:schemeClr val="accent1"/>
+          </a:effectRef>
+          <a:fontRef idx="minor">
+            <a:schemeClr val="lt1"/>
+          </a:fontRef>
+        </p:style>
+        <p:txBody>
+          <a:bodyPr rtlCol="0" anchor="ctr"/>
+          <a:lstStyle/>
+          <a:p>
+            <a:pPr algn="ctr"/>
+          </a:p>
+        </p:txBody>
+      </p:sp>
+      <p:sp>
+        <p:nvSpPr>
+          <p:cNvPr id="13" name="TextBox 12"/>
+          <p:cNvSpPr txBox="1"/>
+          <p:nvPr/>
+        </p:nvSpPr>
+        <p:spPr>
+          <a:xfrm>
+            <a:off x="6400800" y="1901952"/>
+            <a:ext cx="5084064" cy="3922776"/>
+          </a:xfrm>
+          <a:prstGeom prst="rect">
+            <a:avLst/>
+          </a:prstGeom>
+          <a:noFill/>
+        </p:spPr>
+        <p:txBody>
+          <a:bodyPr wrap="square">
+            <a:spAutoFit/>
+          </a:bodyPr>
+          <a:lstStyle/>
           <a:p>
             <a:pPr>
               <a:spcAft>
                 <a:spcPts val="800"/>
               </a:spcAft>
-              <a:defRPr sz="1220">
+              <a:defRPr sz="1500" b="1">
+                <a:solidFill>
+                  <a:srgbClr val="58A6FF"/>
+                </a:solidFill>
+                <a:latin typeface="Arial"/>
+              </a:defRPr>
+            </a:pPr>
+            <a:r>
+              <a:t>Prompts Optimizados (PROMPTS.es.md) y Verificación</a:t>
+            </a:r>
+          </a:p>
+          <a:p>
+            <a:pPr>
+              <a:spcAft>
+                <a:spcPts val="650"/>
+              </a:spcAft>
+              <a:defRPr sz="1130">
                 <a:solidFill>
                   <a:srgbClr val="F0F6FC"/>
                 </a:solidFill>
@@ -8434,15 +11411,15 @@
               </a:defRPr>
             </a:pPr>
             <a:r>
-              <a:t>▸  Reglas Jerárquicas (GEMINI.md y .agents/rules/*.md): Invariantes de dominio cargados desde la raíz del workspace hasta los subdirectorios (deduplicados automáticamente)</a:t>
+              <a:t>▸  Prompt 1 — Diagnóstico (@Menciones): '@data/logs/ran_alarms.jsonl @src/services/cdr_rating.py @src/services/sla_monitor.py @tests/test_lab01_triage.py Ejecuta pytest para reproducir ALM-BSS-8006 y ALM-3GPP-8001..8005 y explica la causa raíz exacta.'</a:t>
             </a:r>
           </a:p>
           <a:p>
             <a:pPr>
               <a:spcAft>
-                <a:spcPts val="800"/>
+                <a:spcPts val="650"/>
               </a:spcAft>
-              <a:defRPr sz="1220">
+              <a:defRPr sz="1130">
                 <a:solidFill>
                   <a:srgbClr val="F0F6FC"/>
                 </a:solidFill>
@@ -8450,15 +11427,15 @@
               </a:defRPr>
             </a:pPr>
             <a:r>
-              <a:t>▸  Skills con Divulgación Progresiva (.agents/skills/&lt;name&gt;/SKILL.md): Solo el frontmatter YAML (name, description) entra al prompt inicial; el cuerpo completo y scripts/ se cargan SOLO al activarse</a:t>
+              <a:t>▸  Prompt 2 — Planificación (/plan): '/plan Crea un plan paso a paso para corregir cdr_rating.py (GiB 1024**3 y roaming NR_5G) y sla_monitor.py (contratos ACTIVE y worst_latency &gt; committed_latency).'</a:t>
             </a:r>
           </a:p>
           <a:p>
             <a:pPr>
               <a:spcAft>
-                <a:spcPts val="800"/>
+                <a:spcPts val="650"/>
               </a:spcAft>
-              <a:defRPr sz="1220">
+              <a:defRPr sz="1130">
                 <a:solidFill>
                   <a:srgbClr val="F0F6FC"/>
                 </a:solidFill>
@@ -8466,15 +11443,15 @@
               </a:defRPr>
             </a:pPr>
             <a:r>
-              <a:t>▸  Memoria Auto-Mejorable (/learn): Pide a Antigravity codificar un patrón aprendido durante el debugging en una regla o skill permanente</a:t>
+              <a:t>▸  Prompt 3 — Edición en Línea (Cmd+I): Selecciona líneas 19–48 en `cdr_rating.py` -&gt; 'Usa Decimal(1024**3) y aplica recargo roaming a todo visiting_plmn != HOME_PLMN incluyendo NR_5G.'</a:t>
             </a:r>
           </a:p>
           <a:p>
             <a:pPr>
               <a:spcAft>
-                <a:spcPts val="800"/>
+                <a:spcPts val="650"/>
               </a:spcAft>
-              <a:defRPr sz="1220">
+              <a:defRPr sz="1130">
                 <a:solidFill>
                   <a:srgbClr val="F0F6FC"/>
                 </a:solidFill>
@@ -8482,14 +11459,14 @@
               </a:defRPr>
             </a:pPr>
             <a:r>
-              <a:t>▸  Jerarquía de Prioridad: Workspace (.agents/) &gt; JSON Declarado (skills.json) &gt; Global (~/.gemini/config/) &gt; Integrado</a:t>
-            </a:r>
-          </a:p>
-        </p:txBody>
-      </p:sp>
-      <p:sp>
-        <p:nvSpPr>
-          <p:cNvPr id="12" name="Rectangle 11"/>
+              <a:t>▸  Prompt 4 — Verificación Autónoma: 'Aplica las correcciones en @src/services/cdr_rating.py y @src/services/sla_monitor.py y ejecuta ./labs/lab-01-revenue-sla-triage/verify.sh.'</a:t>
+            </a:r>
+          </a:p>
+        </p:txBody>
+      </p:sp>
+      <p:sp>
+        <p:nvSpPr>
+          <p:cNvPr id="14" name="Rectangle 13"/>
           <p:cNvSpPr/>
           <p:nvPr/>
         </p:nvSpPr>
@@ -8534,7 +11511,7 @@
       </p:sp>
       <p:sp>
         <p:nvSpPr>
-          <p:cNvPr id="13" name="TextBox 12"/>
+          <p:cNvPr id="15" name="TextBox 14"/>
           <p:cNvSpPr txBox="1"/>
           <p:nvPr/>
         </p:nvSpPr>
@@ -8563,7 +11540,7 @@
               </a:defRPr>
             </a:pPr>
             <a:r>
-              <a:t>Regla Práctica: Coloca invariantes permanentes en GEMINI.md/rules y flujos multifase con scripts en SKILL.md.    |    Slide 6/11</a:t>
+              <a:t>Impartido por Tryolabs • Solución de Referencia: ./labs/lab-01-revenue-sla-triage/apply_solution.sh    |    Slide 6/15</a:t>
             </a:r>
           </a:p>
         </p:txBody>
@@ -8727,7 +11704,7 @@
               </a:defRPr>
             </a:pPr>
             <a:r>
-              <a:t>LABORATORIO PRÁCTICO 2 (54 MINUTOS) • CEREBRO DE DOMINIO</a:t>
+              <a:t>MÓDULO TEÓRICO 2 (6 MINUTOS) • ARQUITECTURA DE PERSONALIZACIÓN</a:t>
             </a:r>
           </a:p>
         </p:txBody>
@@ -8755,7 +11732,7 @@
           <a:lstStyle/>
           <a:p>
             <a:pPr>
-              <a:defRPr sz="2400" b="1">
+              <a:defRPr sz="2250" b="1">
                 <a:solidFill>
                   <a:srgbClr val="F0F6FC"/>
                 </a:solidFill>
@@ -8763,7 +11740,7 @@
               </a:defRPr>
             </a:pPr>
             <a:r>
-              <a:t>Lab 2: Reglas de Industria y Skill de Auditoría Ejecutiva</a:t>
+              <a:t>Cómo Funcionan Internamente las Rules y Skills Progresivos</a:t>
             </a:r>
           </a:p>
         </p:txBody>
@@ -8791,7 +11768,7 @@
           <a:lstStyle/>
           <a:p>
             <a:pPr>
-              <a:defRPr sz="1350">
+              <a:defRPr sz="1300">
                 <a:solidFill>
                   <a:srgbClr val="8B949E"/>
                 </a:solidFill>
@@ -8799,7 +11776,7 @@
               </a:defRPr>
             </a:pPr>
             <a:r>
-              <a:t>Enseña a Antigravity los estándares de tu industria y construye un Auditor Técnico + Comercial</a:t>
+              <a:t>Especializando a Antigravity en tu industria sin saturar la ventana de contexto</a:t>
             </a:r>
           </a:p>
         </p:txBody>
@@ -8924,8 +11901,8 @@
         </p:nvSpPr>
         <p:spPr>
           <a:xfrm>
-            <a:off x="6537960" y="1920240"/>
-            <a:ext cx="4919472" cy="3886200"/>
+            <a:off x="6510528" y="1901952"/>
+            <a:ext cx="4974336" cy="3922776"/>
           </a:xfrm>
           <a:prstGeom prst="rect">
             <a:avLst/>
@@ -8940,25 +11917,25 @@
           <a:p>
             <a:pPr>
               <a:spcAft>
-                <a:spcPts val="1000"/>
-              </a:spcAft>
-              <a:defRPr sz="1600" b="1">
-                <a:solidFill>
-                  <a:srgbClr val="3FB950"/>
-                </a:solidFill>
-                <a:latin typeface="Arial"/>
-              </a:defRPr>
-            </a:pPr>
-            <a:r>
-              <a:t>Guía del Lab 2 y Prompts Optimizados</a:t>
-            </a:r>
-          </a:p>
-          <a:p>
-            <a:pPr>
-              <a:spcAft>
                 <a:spcPts val="800"/>
               </a:spcAft>
-              <a:defRPr sz="1220">
+              <a:defRPr sz="1500" b="1">
+                <a:solidFill>
+                  <a:srgbClr val="3FB950"/>
+                </a:solidFill>
+                <a:latin typeface="Arial"/>
+              </a:defRPr>
+            </a:pPr>
+            <a:r>
+              <a:t>Rules vs. Skills vs. /learn</a:t>
+            </a:r>
+          </a:p>
+          <a:p>
+            <a:pPr>
+              <a:spcAft>
+                <a:spcPts val="650"/>
+              </a:spcAft>
+              <a:defRPr sz="1130">
                 <a:solidFill>
                   <a:srgbClr val="F0F6FC"/>
                 </a:solidFill>
@@ -8966,15 +11943,15 @@
               </a:defRPr>
             </a:pPr>
             <a:r>
-              <a:t>▸  Setup: Ejecuta ./labs/lab-02-rules-and-skills/install.sh (aplica la solución del Lab 1 automáticamente)</a:t>
+              <a:t>▸  Reglas Jerárquicas (GEMINI.md y .agents/rules/*.md): Invariantes de dominio cargados desde la raíz del workspace hasta los subdirectorios (deduplicados automáticamente)</a:t>
             </a:r>
           </a:p>
           <a:p>
             <a:pPr>
               <a:spcAft>
-                <a:spcPts val="800"/>
+                <a:spcPts val="650"/>
               </a:spcAft>
-              <a:defRPr sz="1220">
+              <a:defRPr sz="1130">
                 <a:solidFill>
                   <a:srgbClr val="F0F6FC"/>
                 </a:solidFill>
@@ -8982,15 +11959,15 @@
               </a:defRPr>
             </a:pPr>
             <a:r>
-              <a:t>▸  Tarea 1 (Reglas de Workspace): Crea GEMINI.md y .agents/rules/telecom-standards.md imponiendo Decimal(0.01), validación 3GPP S-NSSAI SST {1,2,3} y esquemas TMF622</a:t>
+              <a:t>▸  Skills con Divulgación Progresiva (.agents/skills/&lt;name&gt;/SKILL.md): Solo el frontmatter YAML (name, description) entra al prompt inicial; el cuerpo completo y scripts/ se cargan SOLO al activarse</a:t>
             </a:r>
           </a:p>
           <a:p>
             <a:pPr>
               <a:spcAft>
-                <a:spcPts val="800"/>
+                <a:spcPts val="650"/>
               </a:spcAft>
-              <a:defRPr sz="1220">
+              <a:defRPr sz="1130">
                 <a:solidFill>
                   <a:srgbClr val="F0F6FC"/>
                 </a:solidFill>
@@ -8998,15 +11975,15 @@
               </a:defRPr>
             </a:pPr>
             <a:r>
-              <a:t>▸  Tarea 2 (Skill Progresivo): Crea .agents/skills/sla-revenue-audit/SKILL.md con frontmatter YAML y procedimiento de auditoría ejecutiva</a:t>
+              <a:t>▸  Memoria Auto-Mejorable (/learn): Pide a Antigravity codificar un patrón aprendido durante el debugging en una regla o skill permanente</a:t>
             </a:r>
           </a:p>
           <a:p>
             <a:pPr>
               <a:spcAft>
-                <a:spcPts val="800"/>
+                <a:spcPts val="650"/>
               </a:spcAft>
-              <a:defRPr sz="1220">
+              <a:defRPr sz="1130">
                 <a:solidFill>
                   <a:srgbClr val="F0F6FC"/>
                 </a:solidFill>
@@ -9014,23 +11991,7 @@
               </a:defRPr>
             </a:pPr>
             <a:r>
-              <a:t>▸  Prompt Optimizado: 'Crea @GEMINI.md, @.agents/rules/telecom-standards.md y @.agents/skills/sla-revenue-audit/SKILL.md, y ejecuta @scripts/run_sla_audit.py'</a:t>
-            </a:r>
-          </a:p>
-          <a:p>
-            <a:pPr>
-              <a:spcAft>
-                <a:spcPts val="800"/>
-              </a:spcAft>
-              <a:defRPr sz="1220">
-                <a:solidFill>
-                  <a:srgbClr val="F0F6FC"/>
-                </a:solidFill>
-                <a:latin typeface="Arial"/>
-              </a:defRPr>
-            </a:pPr>
-            <a:r>
-              <a:t>▸  Verificación: Ejecuta ./labs/lab-02-rules-and-skills/verify.sh y prueba /learn para persistir reglas</a:t>
+              <a:t>▸  Jerarquía de Prioridad: Workspace (.agents/) &gt; JSON Declarado (skills.json) &gt; Global (~/.gemini/config/) &gt; Integrado</a:t>
             </a:r>
           </a:p>
         </p:txBody>
@@ -9111,7 +12072,7 @@
               </a:defRPr>
             </a:pPr>
             <a:r>
-              <a:t>Abre labs/lab-02-rules-and-skills/PROMPTS.es.md para seguir los prompts paso a paso.    |    Slide 7/11</a:t>
+              <a:t>Regla Práctica: Coloca invariantes permanentes en GEMINI.md/rules y flujos multifase con scripts en SKILL.md.    |    Slide 7/15</a:t>
             </a:r>
           </a:p>
         </p:txBody>
@@ -9275,7 +12236,7 @@
               </a:defRPr>
             </a:pPr>
             <a:r>
-              <a:t>MÓDULO TEÓRICO 3 (6 MINUTOS) • MCP, HOOKS Y GOBERNANZA EMPRESARIAL</a:t>
+              <a:t>LABORATORIO PRÁCTICO 2 (PARTE 1/2) • OBJETIVOS Y QUÉ CONSTRUIRÁS</a:t>
             </a:r>
           </a:p>
         </p:txBody>
@@ -9303,7 +12264,7 @@
           <a:lstStyle/>
           <a:p>
             <a:pPr>
-              <a:defRPr sz="2400" b="1">
+              <a:defRPr sz="2250" b="1">
                 <a:solidFill>
                   <a:srgbClr val="F0F6FC"/>
                 </a:solidFill>
@@ -9311,7 +12272,7 @@
               </a:defRPr>
             </a:pPr>
             <a:r>
-              <a:t>Puente MCP en Vivo, Hooks Deterministas y Gobernanza Gemini Enterprise</a:t>
+              <a:t>Lab 2: Rules de Workspace y Skills Progresivos — Objetivos y Diseño</a:t>
             </a:r>
           </a:p>
         </p:txBody>
@@ -9339,7 +12300,7 @@
           <a:lstStyle/>
           <a:p>
             <a:pPr>
-              <a:defRPr sz="1350">
+              <a:defRPr sz="1300">
                 <a:solidFill>
                   <a:srgbClr val="8B949E"/>
                 </a:solidFill>
@@ -9347,14 +12308,14 @@
               </a:defRPr>
             </a:pPr>
             <a:r>
-              <a:t>Conectando bases de datos en tiempo real con seguridad empresarial demostrable en Google Cloud</a:t>
+              <a:t>54 Minutos • Guía PDF Imprimible: labs/lab-02-rules-and-skills/LAB_02_INSTRUCTIONS_ES.pdf</a:t>
             </a:r>
           </a:p>
         </p:txBody>
       </p:sp>
       <p:pic>
         <p:nvPicPr>
-          <p:cNvPr id="8" name="Picture 7" descr="governance_es.png"/>
+          <p:cNvPr id="8" name="Picture 7" descr="customizations_es.png"/>
           <p:cNvPicPr>
             <a:picLocks noChangeAspect="1"/>
           </p:cNvPicPr>
@@ -9436,7 +12397,7 @@
             <a:avLst/>
           </a:prstGeom>
           <a:solidFill>
-            <a:srgbClr val="D29922"/>
+            <a:srgbClr val="3FB950"/>
           </a:solidFill>
           <a:ln>
             <a:noFill/>
@@ -9472,8 +12433,8 @@
         </p:nvSpPr>
         <p:spPr>
           <a:xfrm>
-            <a:off x="6537960" y="1920240"/>
-            <a:ext cx="4919472" cy="3886200"/>
+            <a:off x="6510528" y="1901952"/>
+            <a:ext cx="4974336" cy="3922776"/>
           </a:xfrm>
           <a:prstGeom prst="rect">
             <a:avLst/>
@@ -9488,25 +12449,25 @@
           <a:p>
             <a:pPr>
               <a:spcAft>
-                <a:spcPts val="1000"/>
-              </a:spcAft>
-              <a:defRPr sz="1600" b="1">
-                <a:solidFill>
-                  <a:srgbClr val="D29922"/>
-                </a:solidFill>
-                <a:latin typeface="Arial"/>
-              </a:defRPr>
-            </a:pPr>
-            <a:r>
-              <a:t>Seguridad y Gobernanza en 2 Capas</a:t>
-            </a:r>
-          </a:p>
-          <a:p>
-            <a:pPr>
-              <a:spcAft>
                 <a:spcPts val="800"/>
               </a:spcAft>
-              <a:defRPr sz="1220">
+              <a:defRPr sz="1500" b="1">
+                <a:solidFill>
+                  <a:srgbClr val="3FB950"/>
+                </a:solidFill>
+                <a:latin typeface="Arial"/>
+              </a:defRPr>
+            </a:pPr>
+            <a:r>
+              <a:t>Objetivos del Lab 2 y Qué Construirás</a:t>
+            </a:r>
+          </a:p>
+          <a:p>
+            <a:pPr>
+              <a:spcAft>
+                <a:spcPts val="650"/>
+              </a:spcAft>
+              <a:defRPr sz="1130">
                 <a:solidFill>
                   <a:srgbClr val="F0F6FC"/>
                 </a:solidFill>
@@ -9514,15 +12475,15 @@
               </a:defRPr>
             </a:pPr>
             <a:r>
-              <a:t>▸  Capa 1 — Google Cloud y Gemini Enterprise (Demo en Vivo del Instructor): Cloud IAM (roles/cloudaicompanion.user), Cloud Audit Logs (cloudaicompanion.googleapis.com), perímetros VPC-SC, Cero Retención y Cero Entrenamiento con código del cliente</a:t>
+              <a:t>▸  Objetivo 1 (Reglas Jerárquicas de Dominio): Codificar invariantes permanentes 3GPP, TAP3, TMF622 y privacidad CPNI para que Antigravity las respete siempre.</a:t>
             </a:r>
           </a:p>
           <a:p>
             <a:pPr>
               <a:spcAft>
-                <a:spcPts val="800"/>
+                <a:spcPts val="650"/>
               </a:spcAft>
-              <a:defRPr sz="1220">
+              <a:defRPr sz="1130">
                 <a:solidFill>
                   <a:srgbClr val="F0F6FC"/>
                 </a:solidFill>
@@ -9530,15 +12491,15 @@
               </a:defRPr>
             </a:pPr>
             <a:r>
-              <a:t>▸  Capa 2 — Seguridad Local en Antigravity: Política de Ejecución (strict / request-review / proceed-in-sandbox), Sandbox de Terminal SO, bloqueo de archivos fuera del workspace y listas permitidas/bloqueadas</a:t>
+              <a:t>▸  Objetivo 2 (Skills con Divulgación Progresiva): Empaquetar una auditoría ejecutiva en `.agents/skills/` cargando solo el frontmatter YAML hasta su activación.</a:t>
             </a:r>
           </a:p>
           <a:p>
             <a:pPr>
               <a:spcAft>
-                <a:spcPts val="800"/>
+                <a:spcPts val="650"/>
               </a:spcAft>
-              <a:defRPr sz="1220">
+              <a:defRPr sz="1130">
                 <a:solidFill>
                   <a:srgbClr val="F0F6FC"/>
                 </a:solidFill>
@@ -9546,15 +12507,15 @@
               </a:defRPr>
             </a:pPr>
             <a:r>
-              <a:t>▸  Contexto en Vivo vía FastMCP (.agents/mcp_config.json): Expone herramientas Python tipadas sobre SQLite y telemetría vía stdio/SSE</a:t>
+              <a:t>▸  Qué Construirás #1 (`GEMINI.md` y `.agents/rules/telecom-standards.md`): Memoria y reglas del workspace exigiendo `Decimal(ROUND_HALF_UP)`, GiB binario (`1024**3`), `PRB &lt; 80%` y máscara CPNI `IMSI`/`MSISDN`.</a:t>
             </a:r>
           </a:p>
           <a:p>
             <a:pPr>
               <a:spcAft>
-                <a:spcPts val="800"/>
+                <a:spcPts val="650"/>
               </a:spcAft>
-              <a:defRPr sz="1220">
+              <a:defRPr sz="1130">
                 <a:solidFill>
                   <a:srgbClr val="F0F6FC"/>
                 </a:solidFill>
@@ -9562,7 +12523,23 @@
               </a:defRPr>
             </a:pPr>
             <a:r>
-              <a:t>▸  Hooks Deterministas (.agents/hooks.json): El script PreToolUse inspecciona el JSON en stdin; devolver código 2 bloquea violaciones e imprime un registro de auditoría inmutable</a:t>
+              <a:t>▸  Qué Construirás #2 (`.agents/skills/sla-revenue-audit/SKILL.md`): Skill progresivo (`name: sla-revenue-audit`) que ejecuta `scripts/run_sla_audit.py`.</a:t>
+            </a:r>
+          </a:p>
+          <a:p>
+            <a:pPr>
+              <a:spcAft>
+                <a:spcPts val="650"/>
+              </a:spcAft>
+              <a:defRPr sz="1130">
+                <a:solidFill>
+                  <a:srgbClr val="F0F6FC"/>
+                </a:solidFill>
+                <a:latin typeface="Arial"/>
+              </a:defRPr>
+            </a:pPr>
+            <a:r>
+              <a:t>▸  Entregable y Verificación: Generar `data/exports/sla_revenue_audit_report.json` y `.md` y pasar los 4 tests de `./labs/lab-02-rules-and-skills/verify.sh`.</a:t>
             </a:r>
           </a:p>
         </p:txBody>
@@ -9643,7 +12620,7 @@
               </a:defRPr>
             </a:pPr>
             <a:r>
-              <a:t>Demo del Instructor: Mostrar Cloud Audit Logs en GCP Console + disparar un bloqueo PreToolUse con código 2 localmente.    |    Slide 8/11</a:t>
+              <a:t>Impartido por Tryolabs • Guía imprimible completa: LAB_02_INSTRUCTIONS_ES.pdf    |    Slide 8/15</a:t>
             </a:r>
           </a:p>
         </p:txBody>
@@ -9807,7 +12784,7 @@
               </a:defRPr>
             </a:pPr>
             <a:r>
-              <a:t>LABORATORIO PRÁCTICO 3 (55 MINUTOS) • SERVIDOR MCP Y HOOKS</a:t>
+              <a:t>LABORATORIO PRÁCTICO 2 (PARTE 2/2) • INSTRUCCIONES PASO A PASO Y PROMPTS</a:t>
             </a:r>
           </a:p>
         </p:txBody>
@@ -9835,7 +12812,7 @@
           <a:lstStyle/>
           <a:p>
             <a:pPr>
-              <a:defRPr sz="2400" b="1">
+              <a:defRPr sz="2250" b="1">
                 <a:solidFill>
                   <a:srgbClr val="F0F6FC"/>
                 </a:solidFill>
@@ -9843,7 +12820,7 @@
               </a:defRPr>
             </a:pPr>
             <a:r>
-              <a:t>Lab 3: Servidor FastMCP Local y Guardarraíles de Cumplimiento</a:t>
+              <a:t>Instrucciones del Lab 2 y Prompts para Copiar y Pegar</a:t>
             </a:r>
           </a:p>
         </p:txBody>
@@ -9871,7 +12848,7 @@
           <a:lstStyle/>
           <a:p>
             <a:pPr>
-              <a:defRPr sz="1350">
+              <a:defRPr sz="1300">
                 <a:solidFill>
                   <a:srgbClr val="8B949E"/>
                 </a:solidFill>
@@ -9879,45 +12856,21 @@
               </a:defRPr>
             </a:pPr>
             <a:r>
-              <a:t>Conecta Antigravity a bases de datos en vivo con protección determinista PreToolUse</a:t>
-            </a:r>
-          </a:p>
-        </p:txBody>
-      </p:sp>
-      <p:pic>
-        <p:nvPicPr>
-          <p:cNvPr id="8" name="Picture 7" descr="governance_es.png"/>
-          <p:cNvPicPr>
-            <a:picLocks noChangeAspect="1"/>
-          </p:cNvPicPr>
-          <p:nvPr/>
-        </p:nvPicPr>
-        <p:blipFill>
-          <a:blip r:embed="rId3"/>
-          <a:stretch>
-            <a:fillRect/>
-          </a:stretch>
-        </p:blipFill>
+              <a:t>Sigue los Pasos 1–5 a la izquierda y copia los prompts desde labs/lab-02-rules-and-skills/PROMPTS.es.md</a:t>
+            </a:r>
+          </a:p>
+        </p:txBody>
+      </p:sp>
+      <p:sp>
+        <p:nvSpPr>
+          <p:cNvPr id="8" name="Rounded Rectangle 7"/>
+          <p:cNvSpPr/>
+          <p:nvPr/>
+        </p:nvSpPr>
         <p:spPr>
           <a:xfrm>
             <a:off x="502920" y="1755648"/>
-            <a:ext cx="5623560" cy="3186684"/>
-          </a:xfrm>
-          <a:prstGeom prst="rect">
-            <a:avLst/>
-          </a:prstGeom>
-        </p:spPr>
-      </p:pic>
-      <p:sp>
-        <p:nvSpPr>
-          <p:cNvPr id="9" name="Rounded Rectangle 8"/>
-          <p:cNvSpPr/>
-          <p:nvPr/>
-        </p:nvSpPr>
-        <p:spPr>
-          <a:xfrm>
-            <a:off x="6309360" y="1755648"/>
-            <a:ext cx="5376672" cy="4160520"/>
+            <a:ext cx="5504688" cy="4160520"/>
           </a:xfrm>
           <a:prstGeom prst="roundRect">
             <a:avLst/>
@@ -9955,20 +12908,20 @@
       </p:sp>
       <p:sp>
         <p:nvSpPr>
-          <p:cNvPr id="10" name="Rectangle 9"/>
+          <p:cNvPr id="9" name="Rectangle 8"/>
           <p:cNvSpPr/>
           <p:nvPr/>
         </p:nvSpPr>
         <p:spPr>
           <a:xfrm>
-            <a:off x="6309360" y="1755648"/>
-            <a:ext cx="5376672" cy="64008"/>
+            <a:off x="502920" y="1755648"/>
+            <a:ext cx="5504688" cy="64008"/>
           </a:xfrm>
           <a:prstGeom prst="rect">
             <a:avLst/>
           </a:prstGeom>
           <a:solidFill>
-            <a:srgbClr val="BC8CFF"/>
+            <a:srgbClr val="3FB950"/>
           </a:solidFill>
           <a:ln>
             <a:noFill/>
@@ -9998,14 +12951,14 @@
       </p:sp>
       <p:sp>
         <p:nvSpPr>
-          <p:cNvPr id="11" name="TextBox 10"/>
+          <p:cNvPr id="10" name="TextBox 9"/>
           <p:cNvSpPr txBox="1"/>
           <p:nvPr/>
         </p:nvSpPr>
         <p:spPr>
           <a:xfrm>
-            <a:off x="6537960" y="1920240"/>
-            <a:ext cx="4919472" cy="3886200"/>
+            <a:off x="704088" y="1901952"/>
+            <a:ext cx="5102352" cy="3922776"/>
           </a:xfrm>
           <a:prstGeom prst="rect">
             <a:avLst/>
@@ -10020,25 +12973,232 @@
           <a:p>
             <a:pPr>
               <a:spcAft>
-                <a:spcPts val="1000"/>
+                <a:spcPts val="800"/>
               </a:spcAft>
-              <a:defRPr sz="1600" b="1">
-                <a:solidFill>
-                  <a:srgbClr val="BC8CFF"/>
-                </a:solidFill>
-                <a:latin typeface="Arial"/>
-              </a:defRPr>
-            </a:pPr>
-            <a:r>
-              <a:t>Guía del Lab 3 y Prompts Optimizados</a:t>
-            </a:r>
-          </a:p>
+              <a:defRPr sz="1500" b="1">
+                <a:solidFill>
+                  <a:srgbClr val="3FB950"/>
+                </a:solidFill>
+                <a:latin typeface="Arial"/>
+              </a:defRPr>
+            </a:pPr>
+            <a:r>
+              <a:t>Instrucciones Paso a Paso del Lab 2</a:t>
+            </a:r>
+          </a:p>
+          <a:p>
+            <a:pPr>
+              <a:spcAft>
+                <a:spcPts val="650"/>
+              </a:spcAft>
+              <a:defRPr sz="1130">
+                <a:solidFill>
+                  <a:srgbClr val="F0F6FC"/>
+                </a:solidFill>
+                <a:latin typeface="Arial"/>
+              </a:defRPr>
+            </a:pPr>
+            <a:r>
+              <a:t>▸  Paso 1 (Inicializar Lab 02): Ejecuta `./labs/lab-02-rules-and-skills/install.sh` (aplica Lab 01 automáticamente).</a:t>
+            </a:r>
+          </a:p>
+          <a:p>
+            <a:pPr>
+              <a:spcAft>
+                <a:spcPts val="650"/>
+              </a:spcAft>
+              <a:defRPr sz="1130">
+                <a:solidFill>
+                  <a:srgbClr val="F0F6FC"/>
+                </a:solidFill>
+                <a:latin typeface="Arial"/>
+              </a:defRPr>
+            </a:pPr>
+            <a:r>
+              <a:t>▸  Paso 2 (Crear `GEMINI.md` en la raíz): Define tablas OSS/BSS (`ran_telemetry`, `b2b_contracts`, `cdr_records`), `Decimal(ROUND_HALF_UP)` y GiB binario (`1024 ** 3`).</a:t>
+            </a:r>
+          </a:p>
+          <a:p>
+            <a:pPr>
+              <a:spcAft>
+                <a:spcPts val="650"/>
+              </a:spcAft>
+              <a:defRPr sz="1130">
+                <a:solidFill>
+                  <a:srgbClr val="F0F6FC"/>
+                </a:solidFill>
+                <a:latin typeface="Arial"/>
+              </a:defRPr>
+            </a:pPr>
+            <a:r>
+              <a:t>▸  Paso 3 (Crear `.agents/rules/telecom-standards.md`): Codifica estándares 3GPP TS 28.552 (`PRB &lt; 80%`), roaming TAP3 `NR_5G`, estados TMF622 y enmascaramiento CPNI de `IMSI`/`MSISDN`.</a:t>
+            </a:r>
+          </a:p>
+          <a:p>
+            <a:pPr>
+              <a:spcAft>
+                <a:spcPts val="650"/>
+              </a:spcAft>
+              <a:defRPr sz="1130">
+                <a:solidFill>
+                  <a:srgbClr val="F0F6FC"/>
+                </a:solidFill>
+                <a:latin typeface="Arial"/>
+              </a:defRPr>
+            </a:pPr>
+            <a:r>
+              <a:t>▸  Paso 4 (Crear `.agents/skills/sla-revenue-audit/SKILL.md`): Incluye frontmatter YAML (`name: sla-revenue-audit`, `description: ...`) e instrucciones para correr `./.venv/bin/python scripts/run_sla_audit.py`.</a:t>
+            </a:r>
+          </a:p>
+          <a:p>
+            <a:pPr>
+              <a:spcAft>
+                <a:spcPts val="650"/>
+              </a:spcAft>
+              <a:defRPr sz="1130">
+                <a:solidFill>
+                  <a:srgbClr val="F0F6FC"/>
+                </a:solidFill>
+                <a:latin typeface="Arial"/>
+              </a:defRPr>
+            </a:pPr>
+            <a:r>
+              <a:t>▸  Paso 5 (Verificar): Ejecuta `./labs/lab-02-rules-and-skills/verify.sh` (`4 passed` + reportes JSON y Markdown).</a:t>
+            </a:r>
+          </a:p>
+        </p:txBody>
+      </p:sp>
+      <p:sp>
+        <p:nvSpPr>
+          <p:cNvPr id="11" name="Rounded Rectangle 10"/>
+          <p:cNvSpPr/>
+          <p:nvPr/>
+        </p:nvSpPr>
+        <p:spPr>
+          <a:xfrm>
+            <a:off x="6199632" y="1755648"/>
+            <a:ext cx="5486400" cy="4160520"/>
+          </a:xfrm>
+          <a:prstGeom prst="roundRect">
+            <a:avLst/>
+          </a:prstGeom>
+          <a:solidFill>
+            <a:srgbClr val="161B22"/>
+          </a:solidFill>
+          <a:ln w="19050">
+            <a:solidFill>
+              <a:srgbClr val="30363D"/>
+            </a:solidFill>
+          </a:ln>
+        </p:spPr>
+        <p:style>
+          <a:lnRef idx="1">
+            <a:schemeClr val="accent1"/>
+          </a:lnRef>
+          <a:fillRef idx="3">
+            <a:schemeClr val="accent1"/>
+          </a:fillRef>
+          <a:effectRef idx="2">
+            <a:schemeClr val="accent1"/>
+          </a:effectRef>
+          <a:fontRef idx="minor">
+            <a:schemeClr val="lt1"/>
+          </a:fontRef>
+        </p:style>
+        <p:txBody>
+          <a:bodyPr rtlCol="0" anchor="ctr"/>
+          <a:lstStyle/>
+          <a:p>
+            <a:pPr algn="ctr"/>
+          </a:p>
+        </p:txBody>
+      </p:sp>
+      <p:sp>
+        <p:nvSpPr>
+          <p:cNvPr id="12" name="Rectangle 11"/>
+          <p:cNvSpPr/>
+          <p:nvPr/>
+        </p:nvSpPr>
+        <p:spPr>
+          <a:xfrm>
+            <a:off x="6199632" y="1755648"/>
+            <a:ext cx="5486400" cy="64008"/>
+          </a:xfrm>
+          <a:prstGeom prst="rect">
+            <a:avLst/>
+          </a:prstGeom>
+          <a:solidFill>
+            <a:srgbClr val="58A6FF"/>
+          </a:solidFill>
+          <a:ln>
+            <a:noFill/>
+          </a:ln>
+        </p:spPr>
+        <p:style>
+          <a:lnRef idx="1">
+            <a:schemeClr val="accent1"/>
+          </a:lnRef>
+          <a:fillRef idx="3">
+            <a:schemeClr val="accent1"/>
+          </a:fillRef>
+          <a:effectRef idx="2">
+            <a:schemeClr val="accent1"/>
+          </a:effectRef>
+          <a:fontRef idx="minor">
+            <a:schemeClr val="lt1"/>
+          </a:fontRef>
+        </p:style>
+        <p:txBody>
+          <a:bodyPr rtlCol="0" anchor="ctr"/>
+          <a:lstStyle/>
+          <a:p>
+            <a:pPr algn="ctr"/>
+          </a:p>
+        </p:txBody>
+      </p:sp>
+      <p:sp>
+        <p:nvSpPr>
+          <p:cNvPr id="13" name="TextBox 12"/>
+          <p:cNvSpPr txBox="1"/>
+          <p:nvPr/>
+        </p:nvSpPr>
+        <p:spPr>
+          <a:xfrm>
+            <a:off x="6400800" y="1901952"/>
+            <a:ext cx="5084064" cy="3922776"/>
+          </a:xfrm>
+          <a:prstGeom prst="rect">
+            <a:avLst/>
+          </a:prstGeom>
+          <a:noFill/>
+        </p:spPr>
+        <p:txBody>
+          <a:bodyPr wrap="square">
+            <a:spAutoFit/>
+          </a:bodyPr>
+          <a:lstStyle/>
           <a:p>
             <a:pPr>
               <a:spcAft>
                 <a:spcPts val="800"/>
               </a:spcAft>
-              <a:defRPr sz="1220">
+              <a:defRPr sz="1500" b="1">
+                <a:solidFill>
+                  <a:srgbClr val="58A6FF"/>
+                </a:solidFill>
+                <a:latin typeface="Arial"/>
+              </a:defRPr>
+            </a:pPr>
+            <a:r>
+              <a:t>Prompts Optimizados (PROMPTS.es.md) y Verificación</a:t>
+            </a:r>
+          </a:p>
+          <a:p>
+            <a:pPr>
+              <a:spcAft>
+                <a:spcPts val="650"/>
+              </a:spcAft>
+              <a:defRPr sz="1130">
                 <a:solidFill>
                   <a:srgbClr val="F0F6FC"/>
                 </a:solidFill>
@@ -10046,15 +13206,15 @@
               </a:defRPr>
             </a:pPr>
             <a:r>
-              <a:t>▸  Setup: Ejecuta ./labs/lab-03-mcp-and-hooks/install.sh</a:t>
+              <a:t>▸  Prompt 1 — Crear Rules de Dominio: '/plan Crea @GEMINI.md y @.agents/rules/telecom-standards.md codificando umbrales 3GPP TS 28.552, GiB binario (1024**3), Decimal ROUND_HALF_UP, estados TMF622 y privacidad CPNI.'</a:t>
             </a:r>
           </a:p>
           <a:p>
             <a:pPr>
               <a:spcAft>
-                <a:spcPts val="800"/>
+                <a:spcPts val="650"/>
               </a:spcAft>
-              <a:defRPr sz="1220">
+              <a:defRPr sz="1130">
                 <a:solidFill>
                   <a:srgbClr val="F0F6FC"/>
                 </a:solidFill>
@@ -10062,15 +13222,15 @@
               </a:defRPr>
             </a:pPr>
             <a:r>
-              <a:t>▸  Tarea 1 (Servidor FastMCP): Implementa herramientas en @mcp_server/telecom_mcp.py (query_ran_cell_health, calculate_contract_penalty_exposure, inspect_unbilled_cdrs, evaluate_slice_capacity)</a:t>
+              <a:t>▸  Prompt 2 — Crear Skill Progresivo: 'Crea @.agents/skills/sla-revenue-audit/SKILL.md con frontmatter YAML (name: sla-revenue-audit) que ejecute ./scripts/run_sla_audit.py y genere data/exports/sla_revenue_audit_report.json y .md.'</a:t>
             </a:r>
           </a:p>
           <a:p>
             <a:pPr>
               <a:spcAft>
-                <a:spcPts val="800"/>
+                <a:spcPts val="650"/>
               </a:spcAft>
-              <a:defRPr sz="1220">
+              <a:defRPr sz="1130">
                 <a:solidFill>
                   <a:srgbClr val="F0F6FC"/>
                 </a:solidFill>
@@ -10078,15 +13238,15 @@
               </a:defRPr>
             </a:pPr>
             <a:r>
-              <a:t>▸  Tarea 2 (MCP y Hook Determinista): Configura .agents/mcp_config.json y .agents/hooks.json (ejecuta @scripts/audit_hook.py bloqueando SQL destructivo con código 2 y registrando auditoría SOX/CPNI)</a:t>
+              <a:t>▸  Prompt 3 — Invocar el Skill: 'Ejecuta una auditoría ejecutiva de SLA de Slices 5G y aseguramiento de ingresos CDR usando nuestro skill del workspace.'</a:t>
             </a:r>
           </a:p>
           <a:p>
             <a:pPr>
               <a:spcAft>
-                <a:spcPts val="800"/>
+                <a:spcPts val="650"/>
               </a:spcAft>
-              <a:defRPr sz="1220">
+              <a:defRPr sz="1130">
                 <a:solidFill>
                   <a:srgbClr val="F0F6FC"/>
                 </a:solidFill>
@@ -10094,30 +13254,14 @@
               </a:defRPr>
             </a:pPr>
             <a:r>
-              <a:t>▸  Prompt Optimizado: 'Completa @mcp_server/telecom_mcp.py, registra @.agents/mcp_config.json y @.agents/hooks.json, y consulta la exposición SLA en vivo vía MCP'</a:t>
-            </a:r>
-          </a:p>
-          <a:p>
-            <a:pPr>
-              <a:spcAft>
-                <a:spcPts val="800"/>
-              </a:spcAft>
-              <a:defRPr sz="1220">
-                <a:solidFill>
-                  <a:srgbClr val="F0F6FC"/>
-                </a:solidFill>
-                <a:latin typeface="Arial"/>
-              </a:defRPr>
-            </a:pPr>
-            <a:r>
-              <a:t>▸  Verificación: Ejecuta ./labs/lab-03-mcp-and-hooks/verify.sh y revisa data/logs/hook_audit.log</a:t>
-            </a:r>
-          </a:p>
-        </p:txBody>
-      </p:sp>
-      <p:sp>
-        <p:nvSpPr>
-          <p:cNvPr id="12" name="Rectangle 11"/>
+              <a:t>▸  Comando de Verificación: Ejecuta `./labs/lab-02-rules-and-skills/verify.sh` y prueba `/learn`.</a:t>
+            </a:r>
+          </a:p>
+        </p:txBody>
+      </p:sp>
+      <p:sp>
+        <p:nvSpPr>
+          <p:cNvPr id="14" name="Rectangle 13"/>
           <p:cNvSpPr/>
           <p:nvPr/>
         </p:nvSpPr>
@@ -10162,7 +13306,7 @@
       </p:sp>
       <p:sp>
         <p:nvSpPr>
-          <p:cNvPr id="13" name="TextBox 12"/>
+          <p:cNvPr id="15" name="TextBox 14"/>
           <p:cNvSpPr txBox="1"/>
           <p:nvPr/>
         </p:nvSpPr>
@@ -10191,7 +13335,7 @@
               </a:defRPr>
             </a:pPr>
             <a:r>
-              <a:t>Abre labs/lab-03-mcp-and-hooks/PROMPTS.es.md para copiar los prompts de construcción y prueba de MCP y Hooks.    |    Slide 9/11</a:t>
+              <a:t>Impartido por Tryolabs • Solución de Referencia: ./labs/lab-02-rules-and-skills/apply_solution.sh    |    Slide 9/15</a:t>
             </a:r>
           </a:p>
         </p:txBody>

--- a/slides/antigravity_telecom_workshop_es.pptx
+++ b/slides/antigravity_telecom_workshop_es.pptx
@@ -379,7 +379,7 @@
             <a:pPr indent="0" algn="r">
               <a:buNone/>
             </a:pPr>
-            <a:fld id="{34342311-F125-4FF2-BEC0-856154709075}" type="slidenum">
+            <a:fld id="{649E8C66-8C75-4D7C-B58C-4EC72E36B29B}" type="slidenum">
               <a:rPr lang="en-US" sz="1400" b="0" u="none" strike="noStrike">
                 <a:solidFill>
                   <a:srgbClr val="000000"/>
@@ -553,7 +553,7 @@
               </a:lnSpc>
               <a:buNone/>
             </a:pPr>
-            <a:fld id="{ECE58C39-F5E6-4A55-8268-F3EFE2ABC8EE}" type="slidenum">
+            <a:fld id="{5C602632-A8A1-4304-8E4A-300609B408F4}" type="slidenum">
               <a:rPr lang="en-US" sz="1200" b="0" u="none" strike="noStrike">
                 <a:solidFill>
                   <a:srgbClr val="000000"/>
@@ -726,7 +726,7 @@
               </a:lnSpc>
               <a:buNone/>
             </a:pPr>
-            <a:fld id="{7A94E039-6A8C-4AC2-99D1-7EAC3CD997AB}" type="slidenum">
+            <a:fld id="{B5BD8C7E-F090-408A-9A6C-01CC7D0DCE37}" type="slidenum">
               <a:rPr lang="en-US" sz="1200" b="0" u="none" strike="noStrike">
                 <a:solidFill>
                   <a:srgbClr val="000000"/>
@@ -899,7 +899,7 @@
               </a:lnSpc>
               <a:buNone/>
             </a:pPr>
-            <a:fld id="{2054749A-1652-475A-91FE-05AF6019DCE5}" type="slidenum">
+            <a:fld id="{7EB28FD6-E6E0-4627-B3DE-84B6BCB5DF2D}" type="slidenum">
               <a:rPr lang="en-US" sz="1200" b="0" u="none" strike="noStrike">
                 <a:solidFill>
                   <a:srgbClr val="000000"/>
@@ -1072,7 +1072,7 @@
               </a:lnSpc>
               <a:buNone/>
             </a:pPr>
-            <a:fld id="{801D0564-6D72-4692-9F46-3094D0BAD315}" type="slidenum">
+            <a:fld id="{C1D6CD07-A261-46A3-9CEE-39E05A0F5DA5}" type="slidenum">
               <a:rPr lang="en-US" sz="1200" b="0" u="none" strike="noStrike">
                 <a:solidFill>
                   <a:srgbClr val="000000"/>
@@ -1245,7 +1245,7 @@
               </a:lnSpc>
               <a:buNone/>
             </a:pPr>
-            <a:fld id="{2F87468F-D6D2-4B4D-B24F-C32088505D80}" type="slidenum">
+            <a:fld id="{10AFF075-ED6C-4C33-BB4B-4C38F481E6E9}" type="slidenum">
               <a:rPr lang="en-US" sz="1200" b="0" u="none" strike="noStrike">
                 <a:solidFill>
                   <a:srgbClr val="000000"/>
@@ -1418,7 +1418,7 @@
               </a:lnSpc>
               <a:buNone/>
             </a:pPr>
-            <a:fld id="{0CB9D90C-7BD1-416E-9E7A-B25CA944A90C}" type="slidenum">
+            <a:fld id="{B68A6E54-7AEC-4848-8272-27D0F7616138}" type="slidenum">
               <a:rPr lang="en-US" sz="1200" b="0" u="none" strike="noStrike">
                 <a:solidFill>
                   <a:srgbClr val="000000"/>
@@ -1591,7 +1591,7 @@
               </a:lnSpc>
               <a:buNone/>
             </a:pPr>
-            <a:fld id="{0A309635-14F6-4C61-9D94-A4D6E1312A6E}" type="slidenum">
+            <a:fld id="{B9C8F2A0-3A63-4332-9A9C-F418D63CBF76}" type="slidenum">
               <a:rPr lang="en-US" sz="1200" b="0" u="none" strike="noStrike">
                 <a:solidFill>
                   <a:srgbClr val="000000"/>
@@ -1764,7 +1764,7 @@
               </a:lnSpc>
               <a:buNone/>
             </a:pPr>
-            <a:fld id="{8B6E2E83-BD0F-4DC8-A692-92B64DF108B6}" type="slidenum">
+            <a:fld id="{3649965F-2949-4CA5-AEB4-5F4F9A3757E4}" type="slidenum">
               <a:rPr lang="en-US" sz="1200" b="0" u="none" strike="noStrike">
                 <a:solidFill>
                   <a:srgbClr val="000000"/>
@@ -1937,7 +1937,7 @@
               </a:lnSpc>
               <a:buNone/>
             </a:pPr>
-            <a:fld id="{DA318082-DBE7-4126-9DB7-C16F00E0838D}" type="slidenum">
+            <a:fld id="{F722D524-5FA6-4BB9-A994-37FA62A6E992}" type="slidenum">
               <a:rPr lang="en-US" sz="1200" b="0" u="none" strike="noStrike">
                 <a:solidFill>
                   <a:srgbClr val="000000"/>
@@ -2110,7 +2110,7 @@
               </a:lnSpc>
               <a:buNone/>
             </a:pPr>
-            <a:fld id="{81D881AA-FA96-42B0-AC2B-11ED2E73026C}" type="slidenum">
+            <a:fld id="{D8A97F5A-7E9F-4B7C-B2EE-7CDF7FAF1429}" type="slidenum">
               <a:rPr lang="en-US" sz="1200" b="0" u="none" strike="noStrike">
                 <a:solidFill>
                   <a:srgbClr val="000000"/>
@@ -2283,7 +2283,7 @@
               </a:lnSpc>
               <a:buNone/>
             </a:pPr>
-            <a:fld id="{CAD61FFF-8A61-41CB-8464-2FD17C127B38}" type="slidenum">
+            <a:fld id="{6FA7DBDE-4D78-49C6-9E08-C34B7B4FAD2D}" type="slidenum">
               <a:rPr lang="en-US" sz="1200" b="0" u="none" strike="noStrike">
                 <a:solidFill>
                   <a:srgbClr val="000000"/>
@@ -2456,7 +2456,7 @@
               </a:lnSpc>
               <a:buNone/>
             </a:pPr>
-            <a:fld id="{7C0CEC85-2926-4FFE-AFAC-4EC6CF727BF7}" type="slidenum">
+            <a:fld id="{1C2AA4FF-53E9-4DCA-A094-4EB017595E8E}" type="slidenum">
               <a:rPr lang="en-US" sz="1200" b="0" u="none" strike="noStrike">
                 <a:solidFill>
                   <a:srgbClr val="000000"/>
@@ -2629,7 +2629,7 @@
               </a:lnSpc>
               <a:buNone/>
             </a:pPr>
-            <a:fld id="{FF437A92-0036-471C-803F-B870FA78F7ED}" type="slidenum">
+            <a:fld id="{2E413160-BE85-4E5F-83B2-48776A88A228}" type="slidenum">
               <a:rPr lang="en-US" sz="1200" b="0" u="none" strike="noStrike">
                 <a:solidFill>
                   <a:srgbClr val="000000"/>
@@ -2802,7 +2802,7 @@
               </a:lnSpc>
               <a:buNone/>
             </a:pPr>
-            <a:fld id="{27AFA4A5-F263-4C74-9F6B-C81CF2D2BA44}" type="slidenum">
+            <a:fld id="{D0CD71B0-916F-41CA-883F-76EF94C192E9}" type="slidenum">
               <a:rPr lang="en-US" sz="1200" b="0" u="none" strike="noStrike">
                 <a:solidFill>
                   <a:srgbClr val="000000"/>
@@ -2975,7 +2975,7 @@
               </a:lnSpc>
               <a:buNone/>
             </a:pPr>
-            <a:fld id="{53E12663-837A-4AC5-86E3-1BBC945EB1D2}" type="slidenum">
+            <a:fld id="{DF5B7FBF-9524-441C-AF83-4DBE4E068D0C}" type="slidenum">
               <a:rPr lang="en-US" sz="1200" b="0" u="none" strike="noStrike">
                 <a:solidFill>
                   <a:srgbClr val="000000"/>
@@ -3292,7 +3292,7 @@
               </a:lnSpc>
               <a:buNone/>
             </a:pPr>
-            <a:fld id="{14C56350-5896-4483-8622-28C1B75FFAD7}" type="slidenum">
+            <a:fld id="{28F72244-ABC1-4835-BD34-F2F72FE7B80B}" type="slidenum">
               <a:rPr lang="en-US" sz="1200" b="0" u="none" strike="noStrike">
                 <a:solidFill>
                   <a:schemeClr val="dk1">
@@ -4001,7 +4001,7 @@
               </a:lnSpc>
               <a:buNone/>
             </a:pPr>
-            <a:fld id="{145892B4-16FE-4A45-A113-904FE4B05655}" type="slidenum">
+            <a:fld id="{39E91D0B-CCD1-4CEC-8453-2516D86570C7}" type="slidenum">
               <a:rPr lang="en-US" sz="1200" b="0" u="none" strike="noStrike">
                 <a:solidFill>
                   <a:schemeClr val="dk1">
@@ -4796,7 +4796,7 @@
               </a:lnSpc>
               <a:buNone/>
             </a:pPr>
-            <a:fld id="{9C3FB67A-3739-4637-B274-95BA18D66FCE}" type="slidenum">
+            <a:fld id="{EDCBC8EF-DFA2-49F4-801A-C61F90D20612}" type="slidenum">
               <a:rPr lang="en-US" sz="1200" b="0" u="none" strike="noStrike">
                 <a:solidFill>
                   <a:schemeClr val="dk1">
@@ -5421,7 +5421,7 @@
               </a:lnSpc>
               <a:buNone/>
             </a:pPr>
-            <a:fld id="{9B047B71-58C6-4523-8C30-82DB45241315}" type="slidenum">
+            <a:fld id="{4A15D92A-E602-4317-B39F-C52C1E6DF61F}" type="slidenum">
               <a:rPr lang="en-US" sz="1200" b="0" u="none" strike="noStrike">
                 <a:solidFill>
                   <a:schemeClr val="dk1">
@@ -6046,7 +6046,7 @@
               </a:lnSpc>
               <a:buNone/>
             </a:pPr>
-            <a:fld id="{941AC7B8-4548-4080-AE0B-2F321FA12EC2}" type="slidenum">
+            <a:fld id="{7D62021E-DC85-43E4-BFED-30C5E85CAC9F}" type="slidenum">
               <a:rPr lang="en-US" sz="1200" b="0" u="none" strike="noStrike">
                 <a:solidFill>
                   <a:schemeClr val="dk1">
@@ -6671,7 +6671,7 @@
               </a:lnSpc>
               <a:buNone/>
             </a:pPr>
-            <a:fld id="{0ECBB780-9EBE-4E21-B47A-2AA6D8E5E08D}" type="slidenum">
+            <a:fld id="{20FA1755-A593-4065-8978-814A8C52069D}" type="slidenum">
               <a:rPr lang="en-US" sz="1200" b="0" u="none" strike="noStrike">
                 <a:solidFill>
                   <a:schemeClr val="dk1">
@@ -7080,7 +7080,7 @@
               </a:lnSpc>
               <a:buNone/>
             </a:pPr>
-            <a:fld id="{20755C57-9F6E-4E49-948B-2BC3B2F18350}" type="slidenum">
+            <a:fld id="{242D5629-A93C-46DF-B205-CC278315DC78}" type="slidenum">
               <a:rPr lang="en-US" sz="1200" b="0" u="none" strike="noStrike">
                 <a:solidFill>
                   <a:schemeClr val="dk1">
@@ -8011,7 +8011,7 @@
               </a:lnSpc>
               <a:buNone/>
             </a:pPr>
-            <a:fld id="{7209480E-5CA3-4590-87DC-2013EDFE1CC0}" type="slidenum">
+            <a:fld id="{E61BDF49-9A69-4154-A647-836B925C826A}" type="slidenum">
               <a:rPr lang="en-US" sz="1200" b="0" u="none" strike="noStrike">
                 <a:solidFill>
                   <a:schemeClr val="dk1">
@@ -9170,7 +9170,7 @@
               </a:lnSpc>
               <a:buNone/>
             </a:pPr>
-            <a:fld id="{B46B5478-91FB-42FA-97E8-58CF2E249A3A}" type="slidenum">
+            <a:fld id="{E6787029-576D-4234-836C-E9C4CFA3F7E4}" type="slidenum">
               <a:rPr lang="en-US" sz="1200" b="0" u="none" strike="noStrike">
                 <a:solidFill>
                   <a:schemeClr val="dk1">
@@ -9489,7 +9489,7 @@
               </a:lnSpc>
               <a:buNone/>
             </a:pPr>
-            <a:fld id="{8E064C21-BEBD-4B54-B3AE-55EB5335063D}" type="slidenum">
+            <a:fld id="{5E28FE4B-ABBA-4625-BD05-319BDAEAF690}" type="slidenum">
               <a:rPr lang="en-US" sz="1200" b="0" u="none" strike="noStrike">
                 <a:solidFill>
                   <a:schemeClr val="dk1">
@@ -9736,7 +9736,7 @@
               </a:lnSpc>
               <a:buNone/>
             </a:pPr>
-            <a:fld id="{A5431F9E-22CF-4B6D-B11C-1F1819C1B329}" type="slidenum">
+            <a:fld id="{16BCDB52-D80E-4A58-A88B-CA7BE14CA11F}" type="slidenum">
               <a:rPr lang="en-US" sz="1200" b="0" u="none" strike="noStrike">
                 <a:solidFill>
                   <a:schemeClr val="dk1">
@@ -13270,7 +13270,29 @@
                 <a:uFillTx/>
                 <a:latin typeface="Arial"/>
               </a:rPr>
-              <a:t> Pasar los 6 tests de MCP y Hooks en </a:t>
+              <a:t> Pasar los 3 tests de MCP y Hooks (</a:t>
+            </a:r>
+            <a:r>
+              <a:rPr lang="en-US" sz="1100" b="1" u="none" strike="noStrike">
+                <a:solidFill>
+                  <a:srgbClr val="20E3B2"/>
+                </a:solidFill>
+                <a:effectLst/>
+                <a:uFillTx/>
+                <a:latin typeface="Courier New"/>
+              </a:rPr>
+              <a:t>11 passed</a:t>
+            </a:r>
+            <a:r>
+              <a:rPr lang="en-US" sz="1100" b="0" u="none" strike="noStrike">
+                <a:solidFill>
+                  <a:srgbClr val="F0F6FC"/>
+                </a:solidFill>
+                <a:effectLst/>
+                <a:uFillTx/>
+                <a:latin typeface="Arial"/>
+              </a:rPr>
+              <a:t> acumulados) en </a:t>
             </a:r>
             <a:r>
               <a:rPr lang="en-US" sz="1100" b="1" u="none" strike="noStrike">
@@ -14635,7 +14657,7 @@
                 <a:uFillTx/>
                 <a:latin typeface="Courier New"/>
               </a:rPr>
-              <a:t>6 passed</a:t>
+              <a:t>11 passed</a:t>
             </a:r>
             <a:r>
               <a:rPr lang="en-US" sz="1100" b="0" u="none" strike="noStrike">
@@ -14646,7 +14668,7 @@
                 <a:uFillTx/>
                 <a:latin typeface="Arial"/>
               </a:rPr>
-              <a:t> + bitácora de auditoría).</a:t>
+              <a:t> acumulados en Labs 01–03 + bitácora de auditoría).</a:t>
             </a:r>
             <a:endParaRPr lang="en-US" sz="1100" b="0" u="none" strike="noStrike">
               <a:solidFill>
@@ -23272,7 +23294,7 @@
                 <a:uFillTx/>
                 <a:latin typeface="Arial"/>
               </a:rPr>
-              <a:t> Pasar los 5 tests en </a:t>
+              <a:t> Pasar los 4 tests en </a:t>
             </a:r>
             <a:r>
               <a:rPr lang="en-US" sz="1100" b="1" u="none" strike="noStrike">
@@ -24505,7 +24527,7 @@
                 <a:uFillTx/>
                 <a:latin typeface="Courier New"/>
               </a:rPr>
-              <a:t>5 passed</a:t>
+              <a:t>4 passed</a:t>
             </a:r>
             <a:r>
               <a:rPr lang="en-US" sz="1100" b="0" u="none" strike="noStrike">
